--- a/交易策略_20260427.pptx
+++ b/交易策略_20260427.pptx
@@ -3,28 +3,28 @@
 <p:presentation xmlns:a="http://schemas.openxmlformats.org/drawingml/2006/main" xmlns:r="http://schemas.openxmlformats.org/officeDocument/2006/relationships" xmlns:p="http://schemas.openxmlformats.org/presentationml/2006/main" showSpecialPlsOnTitleSld="0">
   <p:sldMasterIdLst>
     <p:sldMasterId id="2147483648" r:id="rId1"/>
-    <p:sldMasterId id="2147483660" r:id="rId2"/>
-    <p:sldMasterId id="2147483672" r:id="rId3"/>
-    <p:sldMasterId id="2147483684" r:id="rId4"/>
-    <p:sldMasterId id="2147483696" r:id="rId5"/>
-    <p:sldMasterId id="2147483708" r:id="rId6"/>
-    <p:sldMasterId id="2147483709" r:id="rId7"/>
-    <p:sldMasterId id="2147483722" r:id="rId8"/>
-    <p:sldMasterId id="2147483723" r:id="rId9"/>
-    <p:sldMasterId id="2147483724" r:id="rId10"/>
-    <p:sldMasterId id="2147483725" r:id="rId11"/>
+    <p:sldMasterId id="2147483660" r:id="rId3"/>
+    <p:sldMasterId id="2147483672" r:id="rId4"/>
+    <p:sldMasterId id="2147483684" r:id="rId5"/>
+    <p:sldMasterId id="2147483696" r:id="rId6"/>
+    <p:sldMasterId id="2147483708" r:id="rId7"/>
+    <p:sldMasterId id="2147483709" r:id="rId8"/>
+    <p:sldMasterId id="2147483722" r:id="rId9"/>
+    <p:sldMasterId id="2147483723" r:id="rId10"/>
+    <p:sldMasterId id="2147483724" r:id="rId11"/>
+    <p:sldMasterId id="2147483725" r:id="rId12"/>
   </p:sldMasterIdLst>
   <p:notesMasterIdLst>
-    <p:notesMasterId r:id="rId13"/>
+    <p:notesMasterId r:id="rId14"/>
   </p:notesMasterIdLst>
   <p:handoutMasterIdLst>
-    <p:handoutMasterId r:id="rId14"/>
+    <p:handoutMasterId r:id="rId15"/>
   </p:handoutMasterIdLst>
   <p:sldIdLst>
-    <p:sldId id="3949" r:id="rId12"/>
+    <p:sldId id="3950" r:id="rId13"/>
   </p:sldIdLst>
   <p:sldSz cx="9144000" cy="6858000" type="screen4x3"/>
-  <p:notesSz cx="6797675" cy="9926638"/>
+  <p:notesSz cx="6797675" cy="9926320"/>
   <p:defaultTextStyle>
     <a:defPPr>
       <a:defRPr lang="zh-TW"/>
@@ -155,38 +155,10 @@
       <p14:sectionLst xmlns:p14="http://schemas.microsoft.com/office/powerpoint/2010/main">
         <p14:section name="預設章節" id="{42AA3BAE-0B5A-4CF3-9EE5-B8ACC2ADE216}">
           <p14:sldIdLst>
-            <p14:sldId id="3949"/>
+            <p14:sldId id="3950"/>
           </p14:sldIdLst>
         </p14:section>
       </p14:sectionLst>
-    </p:ext>
-    <p:ext uri="{EFAFB233-063F-42B5-8137-9DF3F51BA10A}">
-      <p15:sldGuideLst xmlns:p15="http://schemas.microsoft.com/office/powerpoint/2012/main">
-        <p15:guide id="1" orient="horz" pos="2146">
-          <p15:clr>
-            <a:srgbClr val="A4A3A4"/>
-          </p15:clr>
-        </p15:guide>
-        <p15:guide id="2" pos="2847">
-          <p15:clr>
-            <a:srgbClr val="A4A3A4"/>
-          </p15:clr>
-        </p15:guide>
-      </p15:sldGuideLst>
-    </p:ext>
-    <p:ext uri="{2D200454-40CA-4A62-9FC3-DE9A4176ACB9}">
-      <p15:notesGuideLst xmlns:p15="http://schemas.microsoft.com/office/powerpoint/2012/main">
-        <p15:guide id="1" orient="horz" pos="3105">
-          <p15:clr>
-            <a:srgbClr val="A4A3A4"/>
-          </p15:clr>
-        </p15:guide>
-        <p15:guide id="2" pos="2116">
-          <p15:clr>
-            <a:srgbClr val="A4A3A4"/>
-          </p15:clr>
-        </p15:guide>
-      </p15:notesGuideLst>
     </p:ext>
   </p:extLst>
 </p:presentation>
@@ -199,9 +171,9 @@
 </file>
 
 <file path=ppt/charts/chart1.xml><?xml version="1.0" encoding="utf-8"?>
-<c:chartSpace xmlns:c="http://schemas.openxmlformats.org/drawingml/2006/chart" xmlns:a="http://schemas.openxmlformats.org/drawingml/2006/main" xmlns:r="http://schemas.openxmlformats.org/officeDocument/2006/relationships" xmlns:c16r2="http://schemas.microsoft.com/office/drawing/2015/06/chart">
+<c:chartSpace xmlns:c="http://schemas.openxmlformats.org/drawingml/2006/chart" xmlns:a="http://schemas.openxmlformats.org/drawingml/2006/main" xmlns:r="http://schemas.openxmlformats.org/officeDocument/2006/relationships">
   <c:date1904 val="0"/>
-  <c:lang val="zh-TW"/>
+  <c:lang val="zh-CN"/>
   <c:roundedCorners val="0"/>
   <mc:AlternateContent xmlns:mc="http://schemas.openxmlformats.org/markup-compatibility/2006">
     <mc:Choice xmlns:c14="http://schemas.microsoft.com/office/drawing/2007/8/2/chart" Requires="c14">
@@ -215,74 +187,42 @@
     <c:title>
       <c:tx>
         <c:rich>
-          <a:bodyPr rot="0" spcFirstLastPara="1" vertOverflow="ellipsis" vert="horz" wrap="square" anchor="ctr" anchorCtr="1"/>
+          <a:bodyPr rot="0" spcFirstLastPara="0" vertOverflow="ellipsis" vert="horz" wrap="square" anchor="ctr" anchorCtr="1"/>
           <a:lstStyle/>
           <a:p>
-            <a:pPr>
-              <a:defRPr lang="zh-TW" sz="1400" b="0" i="0" u="none" strike="noStrike" kern="1200" spc="0" baseline="0">
+            <a:pPr defTabSz="914400">
+              <a:defRPr lang="zh-TW" sz="1400" b="1" i="0" u="none" strike="noStrike" kern="1200" spc="0" baseline="0">
                 <a:solidFill>
                   <a:schemeClr val="tx1">
                     <a:lumMod val="65000"/>
                     <a:lumOff val="35000"/>
                   </a:schemeClr>
                 </a:solidFill>
-                <a:latin typeface="+mn-lt"/>
-                <a:ea typeface="+mn-ea"/>
-                <a:cs typeface="+mn-cs"/>
+                <a:latin typeface="微軟正黑體" panose="020B0604030504040204" pitchFamily="34" charset="-120"/>
+                <a:ea typeface="微軟正黑體" panose="020B0604030504040204" pitchFamily="34" charset="-120"/>
+                <a:cs typeface="微軟正黑體" panose="020B0604030504040204" pitchFamily="34" charset="-120"/>
+                <a:sym typeface="微軟正黑體" panose="020B0604030504040204" pitchFamily="34" charset="-120"/>
               </a:defRPr>
             </a:pPr>
             <a:r>
-              <a:rPr lang="zh-TW" altLang="en-US" b="1" dirty="0">
-                <a:solidFill>
-                  <a:schemeClr val="tx1"/>
-                </a:solidFill>
-                <a:latin typeface="+mj-ea"/>
-                <a:ea typeface="+mj-ea"/>
-                <a:cs typeface="Calibri" panose="020F0502020204030204" pitchFamily="34" charset="0"/>
+              <a:rPr sz="1400" b="1">
+                <a:latin typeface="微軟正黑體" panose="020B0604030504040204" pitchFamily="34" charset="-120"/>
+                <a:ea typeface="微軟正黑體" panose="020B0604030504040204" pitchFamily="34" charset="-120"/>
+                <a:cs typeface="微軟正黑體" panose="020B0604030504040204" pitchFamily="34" charset="-120"/>
+                <a:sym typeface="微軟正黑體" panose="020B0604030504040204" pitchFamily="34" charset="-120"/>
               </a:rPr>
-              <a:t>市場隱含未來</a:t>
-            </a:r>
-            <a:r>
-              <a:rPr lang="en-US" altLang="zh-TW" b="1" dirty="0">
-                <a:solidFill>
-                  <a:schemeClr val="tx1"/>
-                </a:solidFill>
-                <a:latin typeface="+mj-ea"/>
-                <a:ea typeface="+mj-ea"/>
-                <a:cs typeface="Calibri" panose="020F0502020204030204" pitchFamily="34" charset="0"/>
-              </a:rPr>
-              <a:t>FR007</a:t>
-            </a:r>
-            <a:r>
-              <a:rPr lang="zh-TW" altLang="en-US" b="1" dirty="0">
-                <a:solidFill>
-                  <a:schemeClr val="tx1"/>
-                </a:solidFill>
-                <a:latin typeface="+mj-ea"/>
-                <a:ea typeface="+mj-ea"/>
-                <a:cs typeface="Calibri" panose="020F0502020204030204" pitchFamily="34" charset="0"/>
-              </a:rPr>
-              <a:t>利率</a:t>
-            </a:r>
-            <a:endParaRPr lang="en-US" altLang="zh-TW" b="1" dirty="0">
-              <a:solidFill>
-                <a:schemeClr val="tx1"/>
-              </a:solidFill>
-              <a:latin typeface="+mj-ea"/>
-              <a:ea typeface="+mj-ea"/>
-              <a:cs typeface="Calibri" panose="020F0502020204030204" pitchFamily="34" charset="0"/>
+              <a:t>市場隱含今明兩年各升息約兩次半碼</a:t>
+            </a:r>
+            <a:endParaRPr sz="1400" b="1">
+              <a:latin typeface="微軟正黑體" panose="020B0604030504040204" pitchFamily="34" charset="-120"/>
+              <a:ea typeface="微軟正黑體" panose="020B0604030504040204" pitchFamily="34" charset="-120"/>
+              <a:cs typeface="微軟正黑體" panose="020B0604030504040204" pitchFamily="34" charset="-120"/>
+              <a:sym typeface="微軟正黑體" panose="020B0604030504040204" pitchFamily="34" charset="-120"/>
             </a:endParaRPr>
           </a:p>
         </c:rich>
       </c:tx>
-      <c:layout>
-        <c:manualLayout>
-          <c:xMode val="edge"/>
-          <c:yMode val="edge"/>
-          <c:x val="0.30677483496381136"/>
-          <c:y val="0"/>
-        </c:manualLayout>
-      </c:layout>
+      <c:layout/>
       <c:overlay val="0"/>
       <c:spPr>
         <a:noFill/>
@@ -291,57 +231,16 @@
         </a:ln>
         <a:effectLst/>
       </c:spPr>
-      <c:txPr>
-        <a:bodyPr rot="0" spcFirstLastPara="1" vertOverflow="ellipsis" vert="horz" wrap="square" anchor="ctr" anchorCtr="1"/>
-        <a:lstStyle/>
-        <a:p>
-          <a:pPr>
-            <a:defRPr lang="zh-TW" sz="1400" b="0" i="0" u="none" strike="noStrike" kern="1200" spc="0" baseline="0">
-              <a:solidFill>
-                <a:schemeClr val="tx1">
-                  <a:lumMod val="65000"/>
-                  <a:lumOff val="35000"/>
-                </a:schemeClr>
-              </a:solidFill>
-              <a:latin typeface="+mn-lt"/>
-              <a:ea typeface="+mn-ea"/>
-              <a:cs typeface="+mn-cs"/>
-            </a:defRPr>
-          </a:pPr>
-          <a:endParaRPr lang="zh-TW"/>
-        </a:p>
-      </c:txPr>
     </c:title>
     <c:autoTitleDeleted val="0"/>
     <c:plotArea>
-      <c:layout>
-        <c:manualLayout>
-          <c:layoutTarget val="inner"/>
-          <c:xMode val="edge"/>
-          <c:yMode val="edge"/>
-          <c:x val="0.103572267525756"/>
-          <c:y val="2.6830448796912099E-2"/>
-          <c:w val="0.865614617940199"/>
-          <c:h val="0.80155092592592603"/>
-        </c:manualLayout>
-      </c:layout>
+      <c:layout/>
       <c:lineChart>
         <c:grouping val="standard"/>
         <c:varyColors val="0"/>
         <c:ser>
           <c:idx val="0"/>
           <c:order val="0"/>
-          <c:tx>
-            <c:strRef>
-              <c:f>'[twd irs 5x10.xlsx]工作表1'!$G$42</c:f>
-              <c:strCache>
-                <c:ptCount val="1"/>
-                <c:pt idx="0">
-                  <c:v>Rate</c:v>
-                </c:pt>
-              </c:strCache>
-            </c:strRef>
-          </c:tx>
           <c:spPr>
             <a:ln w="28575" cap="rnd">
               <a:solidFill>
@@ -352,27 +251,89 @@
             <a:effectLst/>
           </c:spPr>
           <c:marker>
-            <c:symbol val="none"/>
+            <c:symbol val="square"/>
+            <c:size val="6"/>
+            <c:spPr>
+              <a:solidFill>
+                <a:schemeClr val="accent1"/>
+              </a:solidFill>
+              <a:ln w="9525">
+                <a:solidFill>
+                  <a:schemeClr val="accent1"/>
+                </a:solidFill>
+              </a:ln>
+              <a:effectLst/>
+            </c:spPr>
           </c:marker>
           <c:dLbls>
             <c:dLbl>
-              <c:idx val="0"/>
+              <c:idx val="1"/>
+              <c:layout/>
               <c:tx>
                 <c:rich>
-                  <a:bodyPr/>
+                  <a:bodyPr rot="0" spcFirstLastPara="0" vertOverflow="ellipsis" vert="horz" wrap="square" lIns="38100" tIns="19050" rIns="38100" bIns="19050" anchor="ctr" anchorCtr="1"/>
                   <a:lstStyle/>
                   <a:p>
+                    <a:pPr defTabSz="914400">
+                      <a:defRPr lang="zh-TW" sz="1200" b="1" i="0" u="none" strike="noStrike" kern="1200" baseline="0">
+                        <a:solidFill>
+                          <a:schemeClr val="tx1">
+                            <a:lumMod val="75000"/>
+                            <a:lumOff val="25000"/>
+                          </a:schemeClr>
+                        </a:solidFill>
+                        <a:latin typeface="Calibri" panose="020F0502020204030204" pitchFamily="34" charset="0"/>
+                        <a:ea typeface="Calibri" panose="020F0502020204030204" pitchFamily="34" charset="0"/>
+                        <a:cs typeface="Calibri" panose="020F0502020204030204" pitchFamily="34" charset="0"/>
+                        <a:sym typeface="Calibri" panose="020F0502020204030204" pitchFamily="34" charset="0"/>
+                      </a:defRPr>
+                    </a:pPr>
                     <a:r>
-                      <a:rPr lang="en-US" altLang="zh-TW" sz="1200" b="1">
-                        <a:solidFill>
-                          <a:sysClr val="windowText" lastClr="000000"/>
-                        </a:solidFill>
+                      <a:rPr sz="1200">
+                        <a:latin typeface="Calibri" panose="020F0502020204030204" pitchFamily="34" charset="0"/>
+                        <a:ea typeface="Calibri" panose="020F0502020204030204" pitchFamily="34" charset="0"/>
+                        <a:cs typeface="Calibri" panose="020F0502020204030204" pitchFamily="34" charset="0"/>
+                        <a:sym typeface="Calibri" panose="020F0502020204030204" pitchFamily="34" charset="0"/>
                       </a:rPr>
-                      <a:t>1.54%</a:t>
+                      <a:t>1.74%</a:t>
                     </a:r>
+                    <a:endParaRPr sz="1200">
+                      <a:latin typeface="Calibri" panose="020F0502020204030204" pitchFamily="34" charset="0"/>
+                      <a:ea typeface="Calibri" panose="020F0502020204030204" pitchFamily="34" charset="0"/>
+                      <a:cs typeface="Calibri" panose="020F0502020204030204" pitchFamily="34" charset="0"/>
+                      <a:sym typeface="Calibri" panose="020F0502020204030204" pitchFamily="34" charset="0"/>
+                    </a:endParaRPr>
                   </a:p>
                 </c:rich>
               </c:tx>
+              <c:numFmt formatCode="General" sourceLinked="1"/>
+              <c:spPr>
+                <a:noFill/>
+                <a:ln>
+                  <a:noFill/>
+                </a:ln>
+                <a:effectLst/>
+              </c:spPr>
+              <c:txPr>
+                <a:bodyPr rot="0" spcFirstLastPara="0" vertOverflow="ellipsis" vert="horz" wrap="square" lIns="38100" tIns="19050" rIns="38100" bIns="19050" anchor="ctr" anchorCtr="1"/>
+                <a:lstStyle/>
+                <a:p>
+                  <a:pPr>
+                    <a:defRPr lang="zh-TW" sz="1200" b="1" i="0" u="none" strike="noStrike" kern="1200" baseline="0">
+                      <a:solidFill>
+                        <a:schemeClr val="tx1">
+                          <a:lumMod val="75000"/>
+                          <a:lumOff val="25000"/>
+                        </a:schemeClr>
+                      </a:solidFill>
+                      <a:latin typeface="Calibri" panose="020F0502020204030204" pitchFamily="34" charset="0"/>
+                      <a:ea typeface="Calibri" panose="020F0502020204030204" pitchFamily="34" charset="0"/>
+                      <a:cs typeface="Calibri" panose="020F0502020204030204" pitchFamily="34" charset="0"/>
+                      <a:sym typeface="Calibri" panose="020F0502020204030204" pitchFamily="34" charset="0"/>
+                    </a:defRPr>
+                  </a:pPr>
+                </a:p>
+              </c:txPr>
               <c:dLblPos val="t"/>
               <c:showLegendKey val="0"/>
               <c:showVal val="1"/>
@@ -381,154 +342,7 @@
               <c:showPercent val="0"/>
               <c:showBubbleSize val="0"/>
               <c:extLst>
-                <c:ext xmlns:c15="http://schemas.microsoft.com/office/drawing/2012/chart" uri="{CE6537A1-D6FC-4f65-9D91-7224C49458BB}">
-                  <c15:showDataLabelsRange val="0"/>
-                </c:ext>
-                <c:ext xmlns:c16="http://schemas.microsoft.com/office/drawing/2014/chart" uri="{C3380CC4-5D6E-409C-BE32-E72D297353CC}">
-                  <c16:uniqueId val="{00000000-4675-4842-B28A-50CE623AFF38}"/>
-                </c:ext>
-              </c:extLst>
-            </c:dLbl>
-            <c:dLbl>
-              <c:idx val="1"/>
-              <c:layout>
-                <c:manualLayout>
-                  <c:x val="1.16279069767442E-2"/>
-                  <c:y val="0"/>
-                </c:manualLayout>
-              </c:layout>
-              <c:tx>
-                <c:rich>
-                  <a:bodyPr/>
-                  <a:lstStyle/>
-                  <a:p>
-                    <a:r>
-                      <a:rPr lang="en-US" altLang="zh-TW" sz="1200" b="1">
-                        <a:solidFill>
-                          <a:sysClr val="windowText" lastClr="000000"/>
-                        </a:solidFill>
-                      </a:rPr>
-                      <a:t>1.48%</a:t>
-                    </a:r>
-                  </a:p>
-                </c:rich>
-              </c:tx>
-              <c:dLblPos val="t"/>
-              <c:showLegendKey val="0"/>
-              <c:showVal val="1"/>
-              <c:showCatName val="0"/>
-              <c:showSerName val="0"/>
-              <c:showPercent val="0"/>
-              <c:showBubbleSize val="0"/>
-              <c:extLst>
-                <c:ext xmlns:c15="http://schemas.microsoft.com/office/drawing/2012/chart" uri="{CE6537A1-D6FC-4f65-9D91-7224C49458BB}">
-                  <c15:showDataLabelsRange val="0"/>
-                </c:ext>
-                <c:ext xmlns:c16="http://schemas.microsoft.com/office/drawing/2014/chart" uri="{C3380CC4-5D6E-409C-BE32-E72D297353CC}">
-                  <c16:uniqueId val="{00000001-4675-4842-B28A-50CE623AFF38}"/>
-                </c:ext>
-              </c:extLst>
-            </c:dLbl>
-            <c:dLbl>
-              <c:idx val="2"/>
-              <c:tx>
-                <c:rich>
-                  <a:bodyPr/>
-                  <a:lstStyle/>
-                  <a:p>
-                    <a:r>
-                      <a:rPr lang="en-US" altLang="zh-TW" sz="1200" b="1">
-                        <a:solidFill>
-                          <a:sysClr val="windowText" lastClr="000000"/>
-                        </a:solidFill>
-                      </a:rPr>
-                      <a:t>1.44%</a:t>
-                    </a:r>
-                  </a:p>
-                </c:rich>
-              </c:tx>
-              <c:dLblPos val="t"/>
-              <c:showLegendKey val="0"/>
-              <c:showVal val="1"/>
-              <c:showCatName val="0"/>
-              <c:showSerName val="0"/>
-              <c:showPercent val="0"/>
-              <c:showBubbleSize val="0"/>
-              <c:extLst>
-                <c:ext xmlns:c15="http://schemas.microsoft.com/office/drawing/2012/chart" uri="{CE6537A1-D6FC-4f65-9D91-7224C49458BB}">
-                  <c15:showDataLabelsRange val="0"/>
-                </c:ext>
-                <c:ext xmlns:c16="http://schemas.microsoft.com/office/drawing/2014/chart" uri="{C3380CC4-5D6E-409C-BE32-E72D297353CC}">
-                  <c16:uniqueId val="{00000002-4675-4842-B28A-50CE623AFF38}"/>
-                </c:ext>
-              </c:extLst>
-            </c:dLbl>
-            <c:dLbl>
-              <c:idx val="3"/>
-              <c:tx>
-                <c:rich>
-                  <a:bodyPr/>
-                  <a:lstStyle/>
-                  <a:p>
-                    <a:r>
-                      <a:rPr lang="en-US" altLang="zh-TW" sz="1200" b="1">
-                        <a:solidFill>
-                          <a:sysClr val="windowText" lastClr="000000"/>
-                        </a:solidFill>
-                      </a:rPr>
-                      <a:t>1.43%</a:t>
-                    </a:r>
-                  </a:p>
-                </c:rich>
-              </c:tx>
-              <c:dLblPos val="t"/>
-              <c:showLegendKey val="0"/>
-              <c:showVal val="1"/>
-              <c:showCatName val="0"/>
-              <c:showSerName val="0"/>
-              <c:showPercent val="0"/>
-              <c:showBubbleSize val="0"/>
-              <c:extLst>
-                <c:ext xmlns:c15="http://schemas.microsoft.com/office/drawing/2012/chart" uri="{CE6537A1-D6FC-4f65-9D91-7224C49458BB}">
-                  <c15:showDataLabelsRange val="0"/>
-                </c:ext>
-                <c:ext xmlns:c16="http://schemas.microsoft.com/office/drawing/2014/chart" uri="{C3380CC4-5D6E-409C-BE32-E72D297353CC}">
-                  <c16:uniqueId val="{00000003-4675-4842-B28A-50CE623AFF38}"/>
-                </c:ext>
-              </c:extLst>
-            </c:dLbl>
-            <c:dLbl>
-              <c:idx val="4"/>
-              <c:tx>
-                <c:rich>
-                  <a:bodyPr/>
-                  <a:lstStyle/>
-                  <a:p>
-                    <a:r>
-                      <a:rPr lang="en-US" altLang="zh-TW" sz="1200" b="1">
-                        <a:solidFill>
-                          <a:sysClr val="windowText" lastClr="000000"/>
-                        </a:solidFill>
-                      </a:rPr>
-                      <a:t>1.43%</a:t>
-                    </a:r>
-                  </a:p>
-                </c:rich>
-              </c:tx>
-              <c:dLblPos val="t"/>
-              <c:showLegendKey val="0"/>
-              <c:showVal val="1"/>
-              <c:showCatName val="0"/>
-              <c:showSerName val="0"/>
-              <c:showPercent val="0"/>
-              <c:showBubbleSize val="0"/>
-              <c:extLst>
-                <c:ext xmlns:c15="http://schemas.microsoft.com/office/drawing/2012/chart" uri="{CE6537A1-D6FC-4f65-9D91-7224C49458BB}">
-                  <c15:showDataLabelsRange val="0"/>
-                </c:ext>
-                <c:ext xmlns:c16="http://schemas.microsoft.com/office/drawing/2014/chart" uri="{C3380CC4-5D6E-409C-BE32-E72D297353CC}">
-                  <c16:uniqueId val="{00000004-4675-4842-B28A-50CE623AFF38}"/>
-                </c:ext>
+                <c:ext xmlns:c15="http://schemas.microsoft.com/office/drawing/2012/chart" uri="{CE6537A1-D6FC-4f65-9D91-7224C49458BB}"/>
               </c:extLst>
             </c:dLbl>
             <c:spPr>
@@ -545,14 +359,17 @@
                 <a:pPr>
                   <a:defRPr lang="zh-TW" sz="1200" b="1" i="0" u="none" strike="noStrike" kern="1200" baseline="0">
                     <a:solidFill>
-                      <a:sysClr val="windowText" lastClr="000000"/>
+                      <a:schemeClr val="tx1">
+                        <a:lumMod val="75000"/>
+                        <a:lumOff val="25000"/>
+                      </a:schemeClr>
                     </a:solidFill>
-                    <a:latin typeface="Calibri" panose="020F0502020204030204" charset="0"/>
-                    <a:ea typeface="新細明體" panose="02020500000000000000" charset="-120"/>
-                    <a:cs typeface="+mn-ea"/>
+                    <a:latin typeface="Calibri" panose="020F0502020204030204" pitchFamily="34" charset="0"/>
+                    <a:ea typeface="Calibri" panose="020F0502020204030204" pitchFamily="34" charset="0"/>
+                    <a:cs typeface="Calibri" panose="020F0502020204030204" pitchFamily="34" charset="0"/>
+                    <a:sym typeface="Calibri" panose="020F0502020204030204" pitchFamily="34" charset="0"/>
                   </a:defRPr>
                 </a:pPr>
-                <a:endParaRPr lang="zh-TW"/>
               </a:p>
             </c:txPr>
             <c:dLblPos val="t"/>
@@ -565,6 +382,7 @@
             <c:showLeaderLines val="0"/>
             <c:extLst>
               <c:ext xmlns:c15="http://schemas.microsoft.com/office/drawing/2012/chart" uri="{CE6537A1-D6FC-4f65-9D91-7224C49458BB}">
+                <c15:layout/>
                 <c15:showLeaderLines val="1"/>
                 <c15:leaderLines>
                   <c:spPr>
@@ -584,58 +402,81 @@
             </c:extLst>
           </c:dLbls>
           <c:cat>
-            <c:strRef>
-              <c:f>'[twd irs 5x10.xlsx]工作表1'!$F$43:$F$47</c:f>
-              <c:strCache>
-                <c:ptCount val="5"/>
-                <c:pt idx="0">
-                  <c:v>2026Q1</c:v>
-                </c:pt>
-                <c:pt idx="1">
-                  <c:v>2026Q2</c:v>
-                </c:pt>
-                <c:pt idx="2">
-                  <c:v>2026Q3</c:v>
-                </c:pt>
-                <c:pt idx="3">
-                  <c:v>2026Q4</c:v>
-                </c:pt>
-                <c:pt idx="4">
-                  <c:v>2027Q1</c:v>
-                </c:pt>
-              </c:strCache>
-            </c:strRef>
+            <c:multiLvlStrRef>
+              <c:f>'[twd 2y irs.xlsx]Table Data'!$D$3:$E$10</c:f>
+              <c:multiLvlStrCache>
+                <c:ptCount val="8"/>
+                <c:lvl>
+                  <c:pt idx="0">
+                    <c:v>Q1</c:v>
+                  </c:pt>
+                  <c:pt idx="1">
+                    <c:v>Q2</c:v>
+                  </c:pt>
+                  <c:pt idx="2">
+                    <c:v>Q3</c:v>
+                  </c:pt>
+                  <c:pt idx="3">
+                    <c:v>Q4</c:v>
+                  </c:pt>
+                  <c:pt idx="4">
+                    <c:v>Q1</c:v>
+                  </c:pt>
+                  <c:pt idx="5">
+                    <c:v>Q2</c:v>
+                  </c:pt>
+                  <c:pt idx="6">
+                    <c:v>Q3</c:v>
+                  </c:pt>
+                  <c:pt idx="7">
+                    <c:v>Q4</c:v>
+                  </c:pt>
+                </c:lvl>
+                <c:lvl>
+                  <c:pt idx="0">
+                    <c:v>2026</c:v>
+                  </c:pt>
+                  <c:pt idx="4">
+                    <c:v>2027</c:v>
+                  </c:pt>
+                </c:lvl>
+              </c:multiLvlStrCache>
+            </c:multiLvlStrRef>
           </c:cat>
           <c:val>
             <c:numRef>
-              <c:f>'[twd irs 5x10.xlsx]工作表1'!$G$43:$G$47</c:f>
+              <c:f>'[twd 2y irs.xlsx]Table Data'!$F$3:$F$10</c:f>
               <c:numCache>
-                <c:formatCode>0.00_ </c:formatCode>
-                <c:ptCount val="5"/>
+                <c:formatCode>0.000%</c:formatCode>
+                <c:ptCount val="8"/>
                 <c:pt idx="0">
-                  <c:v>1.54</c:v>
+                  <c:v>0.01678</c:v>
                 </c:pt>
                 <c:pt idx="1">
-                  <c:v>1.48</c:v>
+                  <c:v>0.0174</c:v>
                 </c:pt>
-                <c:pt idx="2">
-                  <c:v>1.44</c:v>
+                <c:pt idx="2" c:formatCode="0.00%">
+                  <c:v>0.0184</c:v>
                 </c:pt>
-                <c:pt idx="3">
-                  <c:v>1.43</c:v>
+                <c:pt idx="3" c:formatCode="0.00%">
+                  <c:v>0.0191</c:v>
                 </c:pt>
-                <c:pt idx="4">
-                  <c:v>1.43</c:v>
+                <c:pt idx="4" c:formatCode="0.00%">
+                  <c:v>0.01977</c:v>
+                </c:pt>
+                <c:pt idx="5" c:formatCode="0.00%">
+                  <c:v>0.0205</c:v>
+                </c:pt>
+                <c:pt idx="6" c:formatCode="0.00%">
+                  <c:v>0.02128</c:v>
+                </c:pt>
+                <c:pt idx="7" c:formatCode="0.00%">
+                  <c:v>0.022</c:v>
                 </c:pt>
               </c:numCache>
             </c:numRef>
           </c:val>
           <c:smooth val="0"/>
-          <c:extLst>
-            <c:ext xmlns:c16="http://schemas.microsoft.com/office/drawing/2014/chart" uri="{C3380CC4-5D6E-409C-BE32-E72D297353CC}">
-              <c16:uniqueId val="{00000005-4675-4842-B28A-50CE623AFF38}"/>
-            </c:ext>
-          </c:extLst>
         </c:ser>
         <c:dLbls>
           <c:showLegendKey val="0"/>
@@ -645,18 +486,18 @@
           <c:showPercent val="0"/>
           <c:showBubbleSize val="0"/>
         </c:dLbls>
+        <c:marker val="1"/>
         <c:smooth val="0"/>
-        <c:axId val="437688686"/>
-        <c:axId val="647867110"/>
+        <c:axId val="903886952"/>
+        <c:axId val="796456255"/>
       </c:lineChart>
       <c:catAx>
-        <c:axId val="437688686"/>
+        <c:axId val="903886952"/>
         <c:scaling>
           <c:orientation val="minMax"/>
         </c:scaling>
         <c:delete val="0"/>
         <c:axPos val="b"/>
-        <c:numFmt formatCode="General" sourceLinked="0"/>
         <c:majorTickMark val="none"/>
         <c:minorTickMark val="none"/>
         <c:tickLblPos val="nextTo"/>
@@ -678,23 +519,22 @@
           <a:lstStyle/>
           <a:p>
             <a:pPr>
-              <a:defRPr lang="zh-TW" sz="1200" b="1" i="0" u="none" strike="noStrike" kern="1200" baseline="0">
+              <a:defRPr lang="zh-TW" sz="1000" b="1" i="0" u="none" strike="noStrike" kern="1200" baseline="0">
                 <a:solidFill>
                   <a:schemeClr val="tx1">
                     <a:lumMod val="65000"/>
                     <a:lumOff val="35000"/>
                   </a:schemeClr>
                 </a:solidFill>
-                <a:latin typeface="Calibri" panose="020F0502020204030204" charset="0"/>
-                <a:ea typeface="Calibri" panose="020F0502020204030204" charset="0"/>
-                <a:cs typeface="Calibri" panose="020F0502020204030204" charset="0"/>
-                <a:sym typeface="Calibri" panose="020F0502020204030204" charset="0"/>
+                <a:latin typeface="Calibri" panose="020F0502020204030204" pitchFamily="34" charset="0"/>
+                <a:ea typeface="Calibri" panose="020F0502020204030204" pitchFamily="34" charset="0"/>
+                <a:cs typeface="Calibri" panose="020F0502020204030204" pitchFamily="34" charset="0"/>
+                <a:sym typeface="Calibri" panose="020F0502020204030204" pitchFamily="34" charset="0"/>
               </a:defRPr>
             </a:pPr>
-            <a:endParaRPr lang="zh-TW"/>
           </a:p>
         </c:txPr>
-        <c:crossAx val="647867110"/>
+        <c:crossAx val="796456255"/>
         <c:crosses val="autoZero"/>
         <c:auto val="1"/>
         <c:lblAlgn val="ctr"/>
@@ -702,15 +542,14 @@
         <c:noMultiLvlLbl val="0"/>
       </c:catAx>
       <c:valAx>
-        <c:axId val="647867110"/>
+        <c:axId val="796456255"/>
         <c:scaling>
           <c:orientation val="minMax"/>
-          <c:max val="1.6"/>
-          <c:min val="1.4"/>
+          <c:min val="0.015"/>
         </c:scaling>
         <c:delete val="0"/>
         <c:axPos val="l"/>
-        <c:numFmt formatCode="0.00_ " sourceLinked="1"/>
+        <c:numFmt formatCode="0.0%" sourceLinked="0"/>
         <c:majorTickMark val="none"/>
         <c:minorTickMark val="none"/>
         <c:tickLblPos val="nextTo"/>
@@ -733,19 +572,17 @@
                     <a:lumOff val="35000"/>
                   </a:schemeClr>
                 </a:solidFill>
-                <a:latin typeface="Calibri" panose="020F0502020204030204" charset="0"/>
-                <a:ea typeface="Calibri" panose="020F0502020204030204" charset="0"/>
-                <a:cs typeface="Calibri" panose="020F0502020204030204" charset="0"/>
-                <a:sym typeface="Calibri" panose="020F0502020204030204" charset="0"/>
+                <a:latin typeface="Calibri" panose="020F0502020204030204" pitchFamily="34" charset="0"/>
+                <a:ea typeface="Calibri" panose="020F0502020204030204" pitchFamily="34" charset="0"/>
+                <a:cs typeface="Calibri" panose="020F0502020204030204" pitchFamily="34" charset="0"/>
+                <a:sym typeface="Calibri" panose="020F0502020204030204" pitchFamily="34" charset="0"/>
               </a:defRPr>
             </a:pPr>
-            <a:endParaRPr lang="zh-TW"/>
           </a:p>
         </c:txPr>
-        <c:crossAx val="437688686"/>
+        <c:crossAx val="903886952"/>
         <c:crosses val="autoZero"/>
         <c:crossBetween val="between"/>
-        <c:majorUnit val="0.1"/>
       </c:valAx>
       <c:spPr>
         <a:noFill/>
@@ -778,10 +615,9 @@
       <a:pPr>
         <a:defRPr lang="zh-TW"/>
       </a:pPr>
-      <a:endParaRPr lang="zh-TW"/>
     </a:p>
   </c:txPr>
-  <c:externalData r:id="rId3">
+  <c:externalData r:id="rId1">
     <c:autoUpdate val="0"/>
   </c:externalData>
 </c:chartSpace>
@@ -1521,18 +1357,12 @@
             </a:pPr>
             <a:fld id="{EA90D26C-E35A-450B-90C7-84C2B9602168}" type="slidenum">
               <a:rPr lang="en-US" altLang="zh-TW"/>
-              <a:t>‹#›</a:t>
             </a:fld>
             <a:endParaRPr lang="en-US" altLang="zh-TW"/>
           </a:p>
         </p:txBody>
       </p:sp>
     </p:spTree>
-    <p:extLst>
-      <p:ext uri="{BB962C8B-B14F-4D97-AF65-F5344CB8AC3E}">
-        <p14:creationId xmlns:p14="http://schemas.microsoft.com/office/powerpoint/2010/main" val="1"/>
-      </p:ext>
-    </p:extLst>
   </p:cSld>
   <p:clrMap bg1="lt1" tx1="dk1" bg2="lt2" tx2="dk2" accent1="accent1" accent2="accent2" accent3="accent3" accent4="accent4" accent5="accent5" accent6="accent6" hlink="hlink" folHlink="folHlink"/>
 </p:handoutMaster>
@@ -1708,6 +1538,7 @@
               <a:rPr lang="zh-TW" altLang="en-US" noProof="0"/>
               <a:t>按一下以編輯母片</a:t>
             </a:r>
+            <a:endParaRPr lang="zh-TW" altLang="en-US" noProof="0"/>
           </a:p>
           <a:p>
             <a:pPr lvl="1"/>
@@ -1715,6 +1546,7 @@
               <a:rPr lang="zh-TW" altLang="en-US" noProof="0"/>
               <a:t>第二層</a:t>
             </a:r>
+            <a:endParaRPr lang="zh-TW" altLang="en-US" noProof="0"/>
           </a:p>
           <a:p>
             <a:pPr lvl="2"/>
@@ -1722,6 +1554,7 @@
               <a:rPr lang="zh-TW" altLang="en-US" noProof="0"/>
               <a:t>第三層</a:t>
             </a:r>
+            <a:endParaRPr lang="zh-TW" altLang="en-US" noProof="0"/>
           </a:p>
           <a:p>
             <a:pPr lvl="3"/>
@@ -1729,6 +1562,7 @@
               <a:rPr lang="zh-TW" altLang="en-US" noProof="0"/>
               <a:t>第四層</a:t>
             </a:r>
+            <a:endParaRPr lang="zh-TW" altLang="en-US" noProof="0"/>
           </a:p>
           <a:p>
             <a:pPr lvl="4"/>
@@ -1736,6 +1570,7 @@
               <a:rPr lang="zh-TW" altLang="en-US" noProof="0"/>
               <a:t>第五層</a:t>
             </a:r>
+            <a:endParaRPr lang="zh-TW" altLang="en-US" noProof="0"/>
           </a:p>
         </p:txBody>
       </p:sp>
@@ -1821,7 +1656,6 @@
             </a:pPr>
             <a:fld id="{360372AD-F29F-4D0F-B513-7219CBDC5F6C}" type="slidenum">
               <a:rPr lang="en-US" altLang="zh-TW"/>
-              <a:t>‹#›</a:t>
             </a:fld>
             <a:endParaRPr lang="en-US" altLang="zh-TW"/>
           </a:p>
@@ -1996,6 +1830,7 @@
               <a:rPr lang="zh-TW" altLang="en-US"/>
               <a:t>按一下以編輯母片標題樣式</a:t>
             </a:r>
+            <a:endParaRPr lang="zh-TW" altLang="en-US"/>
           </a:p>
         </p:txBody>
       </p:sp>
@@ -2060,6 +1895,7 @@
               <a:rPr lang="zh-TW" altLang="en-US"/>
               <a:t>按一下以編輯母片副標題樣式</a:t>
             </a:r>
+            <a:endParaRPr lang="zh-TW" altLang="en-US"/>
           </a:p>
         </p:txBody>
       </p:sp>
@@ -2087,7 +1923,6 @@
             </a:pPr>
             <a:fld id="{35A91DC3-1E7A-4B25-8F56-B5B9998B32DD}" type="slidenum">
               <a:rPr lang="zh-TW" altLang="en-US"/>
-              <a:t>‹#›</a:t>
             </a:fld>
             <a:endParaRPr lang="en-US" altLang="zh-TW"/>
           </a:p>
@@ -2137,6 +1972,7 @@
               <a:rPr lang="zh-TW" altLang="en-US"/>
               <a:t>按一下以編輯母片標題樣式</a:t>
             </a:r>
+            <a:endParaRPr lang="zh-TW" altLang="en-US"/>
           </a:p>
         </p:txBody>
       </p:sp>
@@ -2160,6 +1996,7 @@
               <a:rPr lang="zh-TW" altLang="en-US"/>
               <a:t>按一下以編輯母片文字樣式</a:t>
             </a:r>
+            <a:endParaRPr lang="zh-TW" altLang="en-US"/>
           </a:p>
           <a:p>
             <a:pPr lvl="1"/>
@@ -2167,6 +2004,7 @@
               <a:rPr lang="zh-TW" altLang="en-US"/>
               <a:t>第二層</a:t>
             </a:r>
+            <a:endParaRPr lang="zh-TW" altLang="en-US"/>
           </a:p>
           <a:p>
             <a:pPr lvl="2"/>
@@ -2174,6 +2012,7 @@
               <a:rPr lang="zh-TW" altLang="en-US"/>
               <a:t>第三層</a:t>
             </a:r>
+            <a:endParaRPr lang="zh-TW" altLang="en-US"/>
           </a:p>
           <a:p>
             <a:pPr lvl="3"/>
@@ -2181,6 +2020,7 @@
               <a:rPr lang="zh-TW" altLang="en-US"/>
               <a:t>第四層</a:t>
             </a:r>
+            <a:endParaRPr lang="zh-TW" altLang="en-US"/>
           </a:p>
           <a:p>
             <a:pPr lvl="4"/>
@@ -2188,6 +2028,7 @@
               <a:rPr lang="zh-TW" altLang="en-US"/>
               <a:t>第五層</a:t>
             </a:r>
+            <a:endParaRPr lang="zh-TW" altLang="en-US"/>
           </a:p>
         </p:txBody>
       </p:sp>
@@ -2215,7 +2056,6 @@
             </a:pPr>
             <a:fld id="{EDC0AC26-B1DC-4AE7-A939-642DE9D4B085}" type="slidenum">
               <a:rPr lang="zh-TW" altLang="en-US"/>
-              <a:t>‹#›</a:t>
             </a:fld>
             <a:endParaRPr lang="en-US" altLang="zh-TW"/>
           </a:p>
@@ -2270,6 +2110,7 @@
               <a:rPr lang="zh-TW" altLang="en-US"/>
               <a:t>按一下以編輯母片標題樣式</a:t>
             </a:r>
+            <a:endParaRPr lang="zh-TW" altLang="en-US"/>
           </a:p>
         </p:txBody>
       </p:sp>
@@ -2298,6 +2139,7 @@
               <a:rPr lang="zh-TW" altLang="en-US"/>
               <a:t>按一下以編輯母片文字樣式</a:t>
             </a:r>
+            <a:endParaRPr lang="zh-TW" altLang="en-US"/>
           </a:p>
           <a:p>
             <a:pPr lvl="1"/>
@@ -2305,6 +2147,7 @@
               <a:rPr lang="zh-TW" altLang="en-US"/>
               <a:t>第二層</a:t>
             </a:r>
+            <a:endParaRPr lang="zh-TW" altLang="en-US"/>
           </a:p>
           <a:p>
             <a:pPr lvl="2"/>
@@ -2312,6 +2155,7 @@
               <a:rPr lang="zh-TW" altLang="en-US"/>
               <a:t>第三層</a:t>
             </a:r>
+            <a:endParaRPr lang="zh-TW" altLang="en-US"/>
           </a:p>
           <a:p>
             <a:pPr lvl="3"/>
@@ -2319,6 +2163,7 @@
               <a:rPr lang="zh-TW" altLang="en-US"/>
               <a:t>第四層</a:t>
             </a:r>
+            <a:endParaRPr lang="zh-TW" altLang="en-US"/>
           </a:p>
           <a:p>
             <a:pPr lvl="4"/>
@@ -2326,6 +2171,7 @@
               <a:rPr lang="zh-TW" altLang="en-US"/>
               <a:t>第五層</a:t>
             </a:r>
+            <a:endParaRPr lang="zh-TW" altLang="en-US"/>
           </a:p>
         </p:txBody>
       </p:sp>
@@ -2353,7 +2199,6 @@
             </a:pPr>
             <a:fld id="{5BBDB87F-1281-41B6-A636-95C78B523A08}" type="slidenum">
               <a:rPr lang="zh-TW" altLang="en-US"/>
-              <a:t>‹#›</a:t>
             </a:fld>
             <a:endParaRPr lang="en-US" altLang="zh-TW"/>
           </a:p>
@@ -2408,6 +2253,7 @@
               <a:rPr lang="zh-TW" altLang="en-US"/>
               <a:t>按一下以編輯母片標題樣式</a:t>
             </a:r>
+            <a:endParaRPr lang="zh-TW" altLang="en-US"/>
           </a:p>
         </p:txBody>
       </p:sp>
@@ -2472,6 +2318,7 @@
               <a:rPr lang="zh-TW" altLang="en-US"/>
               <a:t>按一下以編輯母片副標題樣式</a:t>
             </a:r>
+            <a:endParaRPr lang="zh-TW" altLang="en-US"/>
           </a:p>
         </p:txBody>
       </p:sp>
@@ -2500,7 +2347,6 @@
                   <a:srgbClr val="000000"/>
                 </a:solidFill>
               </a:rPr>
-              <a:t>‹#›</a:t>
             </a:fld>
             <a:endParaRPr lang="en-US" altLang="zh-TW">
               <a:solidFill>
@@ -2554,6 +2400,7 @@
               <a:rPr lang="zh-TW" altLang="en-US"/>
               <a:t>按一下以編輯母片標題樣式</a:t>
             </a:r>
+            <a:endParaRPr lang="zh-TW" altLang="en-US"/>
           </a:p>
         </p:txBody>
       </p:sp>
@@ -2577,6 +2424,7 @@
               <a:rPr lang="zh-TW" altLang="en-US"/>
               <a:t>按一下以編輯母片文字樣式</a:t>
             </a:r>
+            <a:endParaRPr lang="zh-TW" altLang="en-US"/>
           </a:p>
           <a:p>
             <a:pPr lvl="1"/>
@@ -2584,6 +2432,7 @@
               <a:rPr lang="zh-TW" altLang="en-US"/>
               <a:t>第二層</a:t>
             </a:r>
+            <a:endParaRPr lang="zh-TW" altLang="en-US"/>
           </a:p>
           <a:p>
             <a:pPr lvl="2"/>
@@ -2591,6 +2440,7 @@
               <a:rPr lang="zh-TW" altLang="en-US"/>
               <a:t>第三層</a:t>
             </a:r>
+            <a:endParaRPr lang="zh-TW" altLang="en-US"/>
           </a:p>
           <a:p>
             <a:pPr lvl="3"/>
@@ -2598,6 +2448,7 @@
               <a:rPr lang="zh-TW" altLang="en-US"/>
               <a:t>第四層</a:t>
             </a:r>
+            <a:endParaRPr lang="zh-TW" altLang="en-US"/>
           </a:p>
           <a:p>
             <a:pPr lvl="4"/>
@@ -2605,6 +2456,7 @@
               <a:rPr lang="zh-TW" altLang="en-US"/>
               <a:t>第五層</a:t>
             </a:r>
+            <a:endParaRPr lang="zh-TW" altLang="en-US"/>
           </a:p>
         </p:txBody>
       </p:sp>
@@ -2633,7 +2485,6 @@
                   <a:srgbClr val="000000"/>
                 </a:solidFill>
               </a:rPr>
-              <a:t>‹#›</a:t>
             </a:fld>
             <a:endParaRPr lang="en-US" altLang="zh-TW">
               <a:solidFill>
@@ -2696,6 +2547,7 @@
               <a:rPr lang="zh-TW" altLang="en-US"/>
               <a:t>按一下以編輯母片標題樣式</a:t>
             </a:r>
+            <a:endParaRPr lang="zh-TW" altLang="en-US"/>
           </a:p>
         </p:txBody>
       </p:sp>
@@ -2761,6 +2613,7 @@
               <a:rPr lang="zh-TW" altLang="en-US"/>
               <a:t>按一下以編輯母片文字樣式</a:t>
             </a:r>
+            <a:endParaRPr lang="zh-TW" altLang="en-US"/>
           </a:p>
         </p:txBody>
       </p:sp>
@@ -2789,7 +2642,6 @@
                   <a:srgbClr val="000000"/>
                 </a:solidFill>
               </a:rPr>
-              <a:t>‹#›</a:t>
             </a:fld>
             <a:endParaRPr lang="en-US" altLang="zh-TW">
               <a:solidFill>
@@ -2843,6 +2695,7 @@
               <a:rPr lang="zh-TW" altLang="en-US" dirty="0"/>
               <a:t>按一下以編輯母片標題樣式</a:t>
             </a:r>
+            <a:endParaRPr lang="zh-TW" altLang="en-US" dirty="0"/>
           </a:p>
         </p:txBody>
       </p:sp>
@@ -2899,6 +2752,7 @@
               <a:rPr lang="zh-TW" altLang="en-US"/>
               <a:t>按一下以編輯母片文字樣式</a:t>
             </a:r>
+            <a:endParaRPr lang="zh-TW" altLang="en-US"/>
           </a:p>
           <a:p>
             <a:pPr lvl="1"/>
@@ -2906,6 +2760,7 @@
               <a:rPr lang="zh-TW" altLang="en-US"/>
               <a:t>第二層</a:t>
             </a:r>
+            <a:endParaRPr lang="zh-TW" altLang="en-US"/>
           </a:p>
           <a:p>
             <a:pPr lvl="2"/>
@@ -2913,6 +2768,7 @@
               <a:rPr lang="zh-TW" altLang="en-US"/>
               <a:t>第三層</a:t>
             </a:r>
+            <a:endParaRPr lang="zh-TW" altLang="en-US"/>
           </a:p>
           <a:p>
             <a:pPr lvl="3"/>
@@ -2920,6 +2776,7 @@
               <a:rPr lang="zh-TW" altLang="en-US"/>
               <a:t>第四層</a:t>
             </a:r>
+            <a:endParaRPr lang="zh-TW" altLang="en-US"/>
           </a:p>
           <a:p>
             <a:pPr lvl="4"/>
@@ -2927,6 +2784,7 @@
               <a:rPr lang="zh-TW" altLang="en-US"/>
               <a:t>第五層</a:t>
             </a:r>
+            <a:endParaRPr lang="zh-TW" altLang="en-US"/>
           </a:p>
         </p:txBody>
       </p:sp>
@@ -2983,6 +2841,7 @@
               <a:rPr lang="zh-TW" altLang="en-US" dirty="0"/>
               <a:t>按一下以編輯母片文字樣式</a:t>
             </a:r>
+            <a:endParaRPr lang="zh-TW" altLang="en-US" dirty="0"/>
           </a:p>
           <a:p>
             <a:pPr lvl="1"/>
@@ -2990,6 +2849,7 @@
               <a:rPr lang="zh-TW" altLang="en-US" dirty="0"/>
               <a:t>第二層</a:t>
             </a:r>
+            <a:endParaRPr lang="zh-TW" altLang="en-US" dirty="0"/>
           </a:p>
           <a:p>
             <a:pPr lvl="2"/>
@@ -2997,6 +2857,7 @@
               <a:rPr lang="zh-TW" altLang="en-US" dirty="0"/>
               <a:t>第三層</a:t>
             </a:r>
+            <a:endParaRPr lang="zh-TW" altLang="en-US" dirty="0"/>
           </a:p>
           <a:p>
             <a:pPr lvl="3"/>
@@ -3004,6 +2865,7 @@
               <a:rPr lang="zh-TW" altLang="en-US" dirty="0"/>
               <a:t>第四層</a:t>
             </a:r>
+            <a:endParaRPr lang="zh-TW" altLang="en-US" dirty="0"/>
           </a:p>
           <a:p>
             <a:pPr lvl="4"/>
@@ -3011,6 +2873,7 @@
               <a:rPr lang="zh-TW" altLang="en-US" dirty="0"/>
               <a:t>第五層</a:t>
             </a:r>
+            <a:endParaRPr lang="zh-TW" altLang="en-US" dirty="0"/>
           </a:p>
         </p:txBody>
       </p:sp>
@@ -3039,7 +2902,6 @@
                   <a:srgbClr val="000000"/>
                 </a:solidFill>
               </a:rPr>
-              <a:t>‹#›</a:t>
             </a:fld>
             <a:endParaRPr lang="en-US" altLang="zh-TW" dirty="0">
               <a:solidFill>
@@ -3102,6 +2964,7 @@
               <a:rPr lang="zh-TW" altLang="en-US"/>
               <a:t>按一下以編輯母片標題樣式</a:t>
             </a:r>
+            <a:endParaRPr lang="zh-TW" altLang="en-US"/>
           </a:p>
         </p:txBody>
       </p:sp>
@@ -3167,6 +3030,7 @@
               <a:rPr lang="zh-TW" altLang="en-US"/>
               <a:t>按一下以編輯母片文字樣式</a:t>
             </a:r>
+            <a:endParaRPr lang="zh-TW" altLang="en-US"/>
           </a:p>
         </p:txBody>
       </p:sp>
@@ -3223,6 +3087,7 @@
               <a:rPr lang="zh-TW" altLang="en-US"/>
               <a:t>按一下以編輯母片文字樣式</a:t>
             </a:r>
+            <a:endParaRPr lang="zh-TW" altLang="en-US"/>
           </a:p>
           <a:p>
             <a:pPr lvl="1"/>
@@ -3230,6 +3095,7 @@
               <a:rPr lang="zh-TW" altLang="en-US"/>
               <a:t>第二層</a:t>
             </a:r>
+            <a:endParaRPr lang="zh-TW" altLang="en-US"/>
           </a:p>
           <a:p>
             <a:pPr lvl="2"/>
@@ -3237,6 +3103,7 @@
               <a:rPr lang="zh-TW" altLang="en-US"/>
               <a:t>第三層</a:t>
             </a:r>
+            <a:endParaRPr lang="zh-TW" altLang="en-US"/>
           </a:p>
           <a:p>
             <a:pPr lvl="3"/>
@@ -3244,6 +3111,7 @@
               <a:rPr lang="zh-TW" altLang="en-US"/>
               <a:t>第四層</a:t>
             </a:r>
+            <a:endParaRPr lang="zh-TW" altLang="en-US"/>
           </a:p>
           <a:p>
             <a:pPr lvl="4"/>
@@ -3251,6 +3119,7 @@
               <a:rPr lang="zh-TW" altLang="en-US"/>
               <a:t>第五層</a:t>
             </a:r>
+            <a:endParaRPr lang="zh-TW" altLang="en-US"/>
           </a:p>
         </p:txBody>
       </p:sp>
@@ -3316,6 +3185,7 @@
               <a:rPr lang="zh-TW" altLang="en-US"/>
               <a:t>按一下以編輯母片文字樣式</a:t>
             </a:r>
+            <a:endParaRPr lang="zh-TW" altLang="en-US"/>
           </a:p>
         </p:txBody>
       </p:sp>
@@ -3372,6 +3242,7 @@
               <a:rPr lang="zh-TW" altLang="en-US"/>
               <a:t>按一下以編輯母片文字樣式</a:t>
             </a:r>
+            <a:endParaRPr lang="zh-TW" altLang="en-US"/>
           </a:p>
           <a:p>
             <a:pPr lvl="1"/>
@@ -3379,6 +3250,7 @@
               <a:rPr lang="zh-TW" altLang="en-US"/>
               <a:t>第二層</a:t>
             </a:r>
+            <a:endParaRPr lang="zh-TW" altLang="en-US"/>
           </a:p>
           <a:p>
             <a:pPr lvl="2"/>
@@ -3386,6 +3258,7 @@
               <a:rPr lang="zh-TW" altLang="en-US"/>
               <a:t>第三層</a:t>
             </a:r>
+            <a:endParaRPr lang="zh-TW" altLang="en-US"/>
           </a:p>
           <a:p>
             <a:pPr lvl="3"/>
@@ -3393,6 +3266,7 @@
               <a:rPr lang="zh-TW" altLang="en-US"/>
               <a:t>第四層</a:t>
             </a:r>
+            <a:endParaRPr lang="zh-TW" altLang="en-US"/>
           </a:p>
           <a:p>
             <a:pPr lvl="4"/>
@@ -3400,6 +3274,7 @@
               <a:rPr lang="zh-TW" altLang="en-US"/>
               <a:t>第五層</a:t>
             </a:r>
+            <a:endParaRPr lang="zh-TW" altLang="en-US"/>
           </a:p>
         </p:txBody>
       </p:sp>
@@ -3428,7 +3303,6 @@
                   <a:srgbClr val="000000"/>
                 </a:solidFill>
               </a:rPr>
-              <a:t>‹#›</a:t>
             </a:fld>
             <a:endParaRPr lang="en-US" altLang="zh-TW">
               <a:solidFill>
@@ -3482,6 +3356,7 @@
               <a:rPr lang="zh-TW" altLang="en-US"/>
               <a:t>按一下以編輯母片標題樣式</a:t>
             </a:r>
+            <a:endParaRPr lang="zh-TW" altLang="en-US"/>
           </a:p>
         </p:txBody>
       </p:sp>
@@ -3510,7 +3385,6 @@
                   <a:srgbClr val="000000"/>
                 </a:solidFill>
               </a:rPr>
-              <a:t>‹#›</a:t>
             </a:fld>
             <a:endParaRPr lang="en-US" altLang="zh-TW">
               <a:solidFill>
@@ -3570,7 +3444,6 @@
                   <a:srgbClr val="000000"/>
                 </a:solidFill>
               </a:rPr>
-              <a:t>‹#›</a:t>
             </a:fld>
             <a:endParaRPr lang="en-US" altLang="zh-TW">
               <a:solidFill>
@@ -3633,6 +3506,7 @@
               <a:rPr lang="zh-TW" altLang="en-US"/>
               <a:t>按一下以編輯母片標題樣式</a:t>
             </a:r>
+            <a:endParaRPr lang="zh-TW" altLang="en-US"/>
           </a:p>
         </p:txBody>
       </p:sp>
@@ -3689,6 +3563,7 @@
               <a:rPr lang="zh-TW" altLang="en-US" dirty="0"/>
               <a:t>按一下以編輯母片文字樣式</a:t>
             </a:r>
+            <a:endParaRPr lang="zh-TW" altLang="en-US" dirty="0"/>
           </a:p>
           <a:p>
             <a:pPr lvl="1"/>
@@ -3696,6 +3571,7 @@
               <a:rPr lang="zh-TW" altLang="en-US" dirty="0"/>
               <a:t>第二層</a:t>
             </a:r>
+            <a:endParaRPr lang="zh-TW" altLang="en-US" dirty="0"/>
           </a:p>
           <a:p>
             <a:pPr lvl="2"/>
@@ -3703,6 +3579,7 @@
               <a:rPr lang="zh-TW" altLang="en-US" dirty="0"/>
               <a:t>第三層</a:t>
             </a:r>
+            <a:endParaRPr lang="zh-TW" altLang="en-US" dirty="0"/>
           </a:p>
           <a:p>
             <a:pPr lvl="3"/>
@@ -3710,6 +3587,7 @@
               <a:rPr lang="zh-TW" altLang="en-US" dirty="0"/>
               <a:t>第四層</a:t>
             </a:r>
+            <a:endParaRPr lang="zh-TW" altLang="en-US" dirty="0"/>
           </a:p>
           <a:p>
             <a:pPr lvl="4"/>
@@ -3717,6 +3595,7 @@
               <a:rPr lang="zh-TW" altLang="en-US" dirty="0"/>
               <a:t>第五層</a:t>
             </a:r>
+            <a:endParaRPr lang="zh-TW" altLang="en-US" dirty="0"/>
           </a:p>
         </p:txBody>
       </p:sp>
@@ -3782,6 +3661,7 @@
               <a:rPr lang="zh-TW" altLang="en-US"/>
               <a:t>按一下以編輯母片文字樣式</a:t>
             </a:r>
+            <a:endParaRPr lang="zh-TW" altLang="en-US"/>
           </a:p>
         </p:txBody>
       </p:sp>
@@ -3810,7 +3690,6 @@
                   <a:srgbClr val="000000"/>
                 </a:solidFill>
               </a:rPr>
-              <a:t>‹#›</a:t>
             </a:fld>
             <a:endParaRPr lang="en-US" altLang="zh-TW">
               <a:solidFill>
@@ -3864,6 +3743,7 @@
               <a:rPr lang="zh-TW" altLang="en-US"/>
               <a:t>按一下以編輯母片標題樣式</a:t>
             </a:r>
+            <a:endParaRPr lang="zh-TW" altLang="en-US"/>
           </a:p>
         </p:txBody>
       </p:sp>
@@ -3887,6 +3767,7 @@
               <a:rPr lang="zh-TW" altLang="en-US"/>
               <a:t>按一下以編輯母片文字樣式</a:t>
             </a:r>
+            <a:endParaRPr lang="zh-TW" altLang="en-US"/>
           </a:p>
           <a:p>
             <a:pPr lvl="1"/>
@@ -3894,6 +3775,7 @@
               <a:rPr lang="zh-TW" altLang="en-US"/>
               <a:t>第二層</a:t>
             </a:r>
+            <a:endParaRPr lang="zh-TW" altLang="en-US"/>
           </a:p>
           <a:p>
             <a:pPr lvl="2"/>
@@ -3901,6 +3783,7 @@
               <a:rPr lang="zh-TW" altLang="en-US"/>
               <a:t>第三層</a:t>
             </a:r>
+            <a:endParaRPr lang="zh-TW" altLang="en-US"/>
           </a:p>
           <a:p>
             <a:pPr lvl="3"/>
@@ -3908,6 +3791,7 @@
               <a:rPr lang="zh-TW" altLang="en-US"/>
               <a:t>第四層</a:t>
             </a:r>
+            <a:endParaRPr lang="zh-TW" altLang="en-US"/>
           </a:p>
           <a:p>
             <a:pPr lvl="4"/>
@@ -3915,6 +3799,7 @@
               <a:rPr lang="zh-TW" altLang="en-US"/>
               <a:t>第五層</a:t>
             </a:r>
+            <a:endParaRPr lang="zh-TW" altLang="en-US"/>
           </a:p>
         </p:txBody>
       </p:sp>
@@ -3942,7 +3827,6 @@
             </a:pPr>
             <a:fld id="{13824797-BBCB-46D5-B74F-32D725404A6B}" type="slidenum">
               <a:rPr lang="zh-TW" altLang="en-US"/>
-              <a:t>‹#›</a:t>
             </a:fld>
             <a:endParaRPr lang="en-US" altLang="zh-TW"/>
           </a:p>
@@ -4096,6 +3980,7 @@
               <a:rPr lang="zh-TW" altLang="en-US"/>
               <a:t>按一下以編輯母片文字樣式</a:t>
             </a:r>
+            <a:endParaRPr lang="zh-TW" altLang="en-US"/>
           </a:p>
         </p:txBody>
       </p:sp>
@@ -4124,7 +4009,6 @@
                   <a:srgbClr val="000000"/>
                 </a:solidFill>
               </a:rPr>
-              <a:t>‹#›</a:t>
             </a:fld>
             <a:endParaRPr lang="en-US" altLang="zh-TW">
               <a:solidFill>
@@ -4153,6 +4037,7 @@
               <a:rPr lang="zh-TW" altLang="en-US"/>
               <a:t>按一下以編輯母片標題樣式</a:t>
             </a:r>
+            <a:endParaRPr lang="zh-TW" altLang="en-US"/>
           </a:p>
         </p:txBody>
       </p:sp>
@@ -4200,6 +4085,7 @@
               <a:rPr lang="zh-TW" altLang="en-US"/>
               <a:t>按一下以編輯母片標題樣式</a:t>
             </a:r>
+            <a:endParaRPr lang="zh-TW" altLang="en-US"/>
           </a:p>
         </p:txBody>
       </p:sp>
@@ -4223,6 +4109,7 @@
               <a:rPr lang="zh-TW" altLang="en-US"/>
               <a:t>按一下以編輯母片文字樣式</a:t>
             </a:r>
+            <a:endParaRPr lang="zh-TW" altLang="en-US"/>
           </a:p>
           <a:p>
             <a:pPr lvl="1"/>
@@ -4230,6 +4117,7 @@
               <a:rPr lang="zh-TW" altLang="en-US"/>
               <a:t>第二層</a:t>
             </a:r>
+            <a:endParaRPr lang="zh-TW" altLang="en-US"/>
           </a:p>
           <a:p>
             <a:pPr lvl="2"/>
@@ -4237,6 +4125,7 @@
               <a:rPr lang="zh-TW" altLang="en-US"/>
               <a:t>第三層</a:t>
             </a:r>
+            <a:endParaRPr lang="zh-TW" altLang="en-US"/>
           </a:p>
           <a:p>
             <a:pPr lvl="3"/>
@@ -4244,6 +4133,7 @@
               <a:rPr lang="zh-TW" altLang="en-US"/>
               <a:t>第四層</a:t>
             </a:r>
+            <a:endParaRPr lang="zh-TW" altLang="en-US"/>
           </a:p>
           <a:p>
             <a:pPr lvl="4"/>
@@ -4251,6 +4141,7 @@
               <a:rPr lang="zh-TW" altLang="en-US"/>
               <a:t>第五層</a:t>
             </a:r>
+            <a:endParaRPr lang="zh-TW" altLang="en-US"/>
           </a:p>
         </p:txBody>
       </p:sp>
@@ -4279,7 +4170,6 @@
                   <a:srgbClr val="000000"/>
                 </a:solidFill>
               </a:rPr>
-              <a:t>‹#›</a:t>
             </a:fld>
             <a:endParaRPr lang="en-US" altLang="zh-TW">
               <a:solidFill>
@@ -4338,6 +4228,7 @@
               <a:rPr lang="zh-TW" altLang="en-US"/>
               <a:t>按一下以編輯母片標題樣式</a:t>
             </a:r>
+            <a:endParaRPr lang="zh-TW" altLang="en-US"/>
           </a:p>
         </p:txBody>
       </p:sp>
@@ -4366,6 +4257,7 @@
               <a:rPr lang="zh-TW" altLang="en-US"/>
               <a:t>按一下以編輯母片文字樣式</a:t>
             </a:r>
+            <a:endParaRPr lang="zh-TW" altLang="en-US"/>
           </a:p>
           <a:p>
             <a:pPr lvl="1"/>
@@ -4373,6 +4265,7 @@
               <a:rPr lang="zh-TW" altLang="en-US"/>
               <a:t>第二層</a:t>
             </a:r>
+            <a:endParaRPr lang="zh-TW" altLang="en-US"/>
           </a:p>
           <a:p>
             <a:pPr lvl="2"/>
@@ -4380,6 +4273,7 @@
               <a:rPr lang="zh-TW" altLang="en-US"/>
               <a:t>第三層</a:t>
             </a:r>
+            <a:endParaRPr lang="zh-TW" altLang="en-US"/>
           </a:p>
           <a:p>
             <a:pPr lvl="3"/>
@@ -4387,6 +4281,7 @@
               <a:rPr lang="zh-TW" altLang="en-US"/>
               <a:t>第四層</a:t>
             </a:r>
+            <a:endParaRPr lang="zh-TW" altLang="en-US"/>
           </a:p>
           <a:p>
             <a:pPr lvl="4"/>
@@ -4394,6 +4289,7 @@
               <a:rPr lang="zh-TW" altLang="en-US"/>
               <a:t>第五層</a:t>
             </a:r>
+            <a:endParaRPr lang="zh-TW" altLang="en-US"/>
           </a:p>
         </p:txBody>
       </p:sp>
@@ -4422,7 +4318,6 @@
                   <a:srgbClr val="000000"/>
                 </a:solidFill>
               </a:rPr>
-              <a:t>‹#›</a:t>
             </a:fld>
             <a:endParaRPr lang="en-US" altLang="zh-TW">
               <a:solidFill>
@@ -4481,6 +4376,7 @@
               <a:rPr lang="zh-TW" altLang="en-US"/>
               <a:t>按一下以編輯母片標題樣式</a:t>
             </a:r>
+            <a:endParaRPr lang="zh-TW" altLang="en-US"/>
           </a:p>
         </p:txBody>
       </p:sp>
@@ -4599,6 +4495,7 @@
               <a:rPr lang="zh-TW" altLang="en-US"/>
               <a:t>按一下以編輯母片副標題樣式</a:t>
             </a:r>
+            <a:endParaRPr lang="zh-TW" altLang="en-US"/>
           </a:p>
         </p:txBody>
       </p:sp>
@@ -4619,7 +4516,6 @@
           <a:p>
             <a:fld id="{388997FB-EFBE-4ED6-A43F-DDA1512FD57C}" type="datetimeFigureOut">
               <a:rPr lang="zh-TW" altLang="en-US" smtClean="0"/>
-              <a:t>2026/4/24</a:t>
             </a:fld>
             <a:endParaRPr lang="zh-TW" altLang="en-US"/>
           </a:p>
@@ -4661,7 +4557,6 @@
           <a:p>
             <a:fld id="{13C0E97A-62D1-41C7-936F-199E295F9AB2}" type="slidenum">
               <a:rPr lang="zh-TW" altLang="en-US" smtClean="0"/>
-              <a:t>‹#›</a:t>
             </a:fld>
             <a:endParaRPr lang="zh-TW" altLang="en-US"/>
           </a:p>
@@ -4711,6 +4606,7 @@
               <a:rPr lang="zh-TW" altLang="en-US"/>
               <a:t>按一下以編輯母片標題樣式</a:t>
             </a:r>
+            <a:endParaRPr lang="zh-TW" altLang="en-US"/>
           </a:p>
         </p:txBody>
       </p:sp>
@@ -4734,6 +4630,7 @@
               <a:rPr lang="zh-TW" altLang="en-US"/>
               <a:t>按一下以編輯母片文字樣式</a:t>
             </a:r>
+            <a:endParaRPr lang="zh-TW" altLang="en-US"/>
           </a:p>
           <a:p>
             <a:pPr lvl="1"/>
@@ -4741,6 +4638,7 @@
               <a:rPr lang="zh-TW" altLang="en-US"/>
               <a:t>第二層</a:t>
             </a:r>
+            <a:endParaRPr lang="zh-TW" altLang="en-US"/>
           </a:p>
           <a:p>
             <a:pPr lvl="2"/>
@@ -4748,6 +4646,7 @@
               <a:rPr lang="zh-TW" altLang="en-US"/>
               <a:t>第三層</a:t>
             </a:r>
+            <a:endParaRPr lang="zh-TW" altLang="en-US"/>
           </a:p>
           <a:p>
             <a:pPr lvl="3"/>
@@ -4755,6 +4654,7 @@
               <a:rPr lang="zh-TW" altLang="en-US"/>
               <a:t>第四層</a:t>
             </a:r>
+            <a:endParaRPr lang="zh-TW" altLang="en-US"/>
           </a:p>
           <a:p>
             <a:pPr lvl="4"/>
@@ -4762,6 +4662,7 @@
               <a:rPr lang="zh-TW" altLang="en-US"/>
               <a:t>第五層</a:t>
             </a:r>
+            <a:endParaRPr lang="zh-TW" altLang="en-US"/>
           </a:p>
         </p:txBody>
       </p:sp>
@@ -4782,7 +4683,6 @@
           <a:p>
             <a:fld id="{388997FB-EFBE-4ED6-A43F-DDA1512FD57C}" type="datetimeFigureOut">
               <a:rPr lang="zh-TW" altLang="en-US" smtClean="0"/>
-              <a:t>2026/4/24</a:t>
             </a:fld>
             <a:endParaRPr lang="zh-TW" altLang="en-US"/>
           </a:p>
@@ -4824,7 +4724,6 @@
           <a:p>
             <a:fld id="{13C0E97A-62D1-41C7-936F-199E295F9AB2}" type="slidenum">
               <a:rPr lang="zh-TW" altLang="en-US" smtClean="0"/>
-              <a:t>‹#›</a:t>
             </a:fld>
             <a:endParaRPr lang="zh-TW" altLang="en-US"/>
           </a:p>
@@ -4883,6 +4782,7 @@
               <a:rPr lang="zh-TW" altLang="en-US"/>
               <a:t>按一下以編輯母片標題樣式</a:t>
             </a:r>
+            <a:endParaRPr lang="zh-TW" altLang="en-US"/>
           </a:p>
         </p:txBody>
       </p:sp>
@@ -5002,6 +4902,7 @@
               <a:rPr lang="zh-TW" altLang="en-US"/>
               <a:t>按一下以編輯母片文字樣式</a:t>
             </a:r>
+            <a:endParaRPr lang="zh-TW" altLang="en-US"/>
           </a:p>
         </p:txBody>
       </p:sp>
@@ -5022,7 +4923,6 @@
           <a:p>
             <a:fld id="{388997FB-EFBE-4ED6-A43F-DDA1512FD57C}" type="datetimeFigureOut">
               <a:rPr lang="zh-TW" altLang="en-US" smtClean="0"/>
-              <a:t>2026/4/24</a:t>
             </a:fld>
             <a:endParaRPr lang="zh-TW" altLang="en-US"/>
           </a:p>
@@ -5064,7 +4964,6 @@
           <a:p>
             <a:fld id="{13C0E97A-62D1-41C7-936F-199E295F9AB2}" type="slidenum">
               <a:rPr lang="zh-TW" altLang="en-US" smtClean="0"/>
-              <a:t>‹#›</a:t>
             </a:fld>
             <a:endParaRPr lang="zh-TW" altLang="en-US"/>
           </a:p>
@@ -5114,6 +5013,7 @@
               <a:rPr lang="zh-TW" altLang="en-US"/>
               <a:t>按一下以編輯母片標題樣式</a:t>
             </a:r>
+            <a:endParaRPr lang="zh-TW" altLang="en-US"/>
           </a:p>
         </p:txBody>
       </p:sp>
@@ -5170,6 +5070,7 @@
               <a:rPr lang="zh-TW" altLang="en-US"/>
               <a:t>按一下以編輯母片文字樣式</a:t>
             </a:r>
+            <a:endParaRPr lang="zh-TW" altLang="en-US"/>
           </a:p>
           <a:p>
             <a:pPr lvl="1"/>
@@ -5177,6 +5078,7 @@
               <a:rPr lang="zh-TW" altLang="en-US"/>
               <a:t>第二層</a:t>
             </a:r>
+            <a:endParaRPr lang="zh-TW" altLang="en-US"/>
           </a:p>
           <a:p>
             <a:pPr lvl="2"/>
@@ -5184,6 +5086,7 @@
               <a:rPr lang="zh-TW" altLang="en-US"/>
               <a:t>第三層</a:t>
             </a:r>
+            <a:endParaRPr lang="zh-TW" altLang="en-US"/>
           </a:p>
           <a:p>
             <a:pPr lvl="3"/>
@@ -5191,6 +5094,7 @@
               <a:rPr lang="zh-TW" altLang="en-US"/>
               <a:t>第四層</a:t>
             </a:r>
+            <a:endParaRPr lang="zh-TW" altLang="en-US"/>
           </a:p>
           <a:p>
             <a:pPr lvl="4"/>
@@ -5198,6 +5102,7 @@
               <a:rPr lang="zh-TW" altLang="en-US"/>
               <a:t>第五層</a:t>
             </a:r>
+            <a:endParaRPr lang="zh-TW" altLang="en-US"/>
           </a:p>
         </p:txBody>
       </p:sp>
@@ -5254,6 +5159,7 @@
               <a:rPr lang="zh-TW" altLang="en-US"/>
               <a:t>按一下以編輯母片文字樣式</a:t>
             </a:r>
+            <a:endParaRPr lang="zh-TW" altLang="en-US"/>
           </a:p>
           <a:p>
             <a:pPr lvl="1"/>
@@ -5261,6 +5167,7 @@
               <a:rPr lang="zh-TW" altLang="en-US"/>
               <a:t>第二層</a:t>
             </a:r>
+            <a:endParaRPr lang="zh-TW" altLang="en-US"/>
           </a:p>
           <a:p>
             <a:pPr lvl="2"/>
@@ -5268,6 +5175,7 @@
               <a:rPr lang="zh-TW" altLang="en-US"/>
               <a:t>第三層</a:t>
             </a:r>
+            <a:endParaRPr lang="zh-TW" altLang="en-US"/>
           </a:p>
           <a:p>
             <a:pPr lvl="3"/>
@@ -5275,6 +5183,7 @@
               <a:rPr lang="zh-TW" altLang="en-US"/>
               <a:t>第四層</a:t>
             </a:r>
+            <a:endParaRPr lang="zh-TW" altLang="en-US"/>
           </a:p>
           <a:p>
             <a:pPr lvl="4"/>
@@ -5282,6 +5191,7 @@
               <a:rPr lang="zh-TW" altLang="en-US"/>
               <a:t>第五層</a:t>
             </a:r>
+            <a:endParaRPr lang="zh-TW" altLang="en-US"/>
           </a:p>
         </p:txBody>
       </p:sp>
@@ -5302,7 +5212,6 @@
           <a:p>
             <a:fld id="{388997FB-EFBE-4ED6-A43F-DDA1512FD57C}" type="datetimeFigureOut">
               <a:rPr lang="zh-TW" altLang="en-US" smtClean="0"/>
-              <a:t>2026/4/24</a:t>
             </a:fld>
             <a:endParaRPr lang="zh-TW" altLang="en-US"/>
           </a:p>
@@ -5344,7 +5253,6 @@
           <a:p>
             <a:fld id="{13C0E97A-62D1-41C7-936F-199E295F9AB2}" type="slidenum">
               <a:rPr lang="zh-TW" altLang="en-US" smtClean="0"/>
-              <a:t>‹#›</a:t>
             </a:fld>
             <a:endParaRPr lang="zh-TW" altLang="en-US"/>
           </a:p>
@@ -5398,6 +5306,7 @@
               <a:rPr lang="zh-TW" altLang="en-US"/>
               <a:t>按一下以編輯母片標題樣式</a:t>
             </a:r>
+            <a:endParaRPr lang="zh-TW" altLang="en-US"/>
           </a:p>
         </p:txBody>
       </p:sp>
@@ -5463,6 +5372,7 @@
               <a:rPr lang="zh-TW" altLang="en-US"/>
               <a:t>按一下以編輯母片文字樣式</a:t>
             </a:r>
+            <a:endParaRPr lang="zh-TW" altLang="en-US"/>
           </a:p>
         </p:txBody>
       </p:sp>
@@ -5519,6 +5429,7 @@
               <a:rPr lang="zh-TW" altLang="en-US"/>
               <a:t>按一下以編輯母片文字樣式</a:t>
             </a:r>
+            <a:endParaRPr lang="zh-TW" altLang="en-US"/>
           </a:p>
           <a:p>
             <a:pPr lvl="1"/>
@@ -5526,6 +5437,7 @@
               <a:rPr lang="zh-TW" altLang="en-US"/>
               <a:t>第二層</a:t>
             </a:r>
+            <a:endParaRPr lang="zh-TW" altLang="en-US"/>
           </a:p>
           <a:p>
             <a:pPr lvl="2"/>
@@ -5533,6 +5445,7 @@
               <a:rPr lang="zh-TW" altLang="en-US"/>
               <a:t>第三層</a:t>
             </a:r>
+            <a:endParaRPr lang="zh-TW" altLang="en-US"/>
           </a:p>
           <a:p>
             <a:pPr lvl="3"/>
@@ -5540,6 +5453,7 @@
               <a:rPr lang="zh-TW" altLang="en-US"/>
               <a:t>第四層</a:t>
             </a:r>
+            <a:endParaRPr lang="zh-TW" altLang="en-US"/>
           </a:p>
           <a:p>
             <a:pPr lvl="4"/>
@@ -5547,6 +5461,7 @@
               <a:rPr lang="zh-TW" altLang="en-US"/>
               <a:t>第五層</a:t>
             </a:r>
+            <a:endParaRPr lang="zh-TW" altLang="en-US"/>
           </a:p>
         </p:txBody>
       </p:sp>
@@ -5612,6 +5527,7 @@
               <a:rPr lang="zh-TW" altLang="en-US"/>
               <a:t>按一下以編輯母片文字樣式</a:t>
             </a:r>
+            <a:endParaRPr lang="zh-TW" altLang="en-US"/>
           </a:p>
         </p:txBody>
       </p:sp>
@@ -5668,6 +5584,7 @@
               <a:rPr lang="zh-TW" altLang="en-US"/>
               <a:t>按一下以編輯母片文字樣式</a:t>
             </a:r>
+            <a:endParaRPr lang="zh-TW" altLang="en-US"/>
           </a:p>
           <a:p>
             <a:pPr lvl="1"/>
@@ -5675,6 +5592,7 @@
               <a:rPr lang="zh-TW" altLang="en-US"/>
               <a:t>第二層</a:t>
             </a:r>
+            <a:endParaRPr lang="zh-TW" altLang="en-US"/>
           </a:p>
           <a:p>
             <a:pPr lvl="2"/>
@@ -5682,6 +5600,7 @@
               <a:rPr lang="zh-TW" altLang="en-US"/>
               <a:t>第三層</a:t>
             </a:r>
+            <a:endParaRPr lang="zh-TW" altLang="en-US"/>
           </a:p>
           <a:p>
             <a:pPr lvl="3"/>
@@ -5689,6 +5608,7 @@
               <a:rPr lang="zh-TW" altLang="en-US"/>
               <a:t>第四層</a:t>
             </a:r>
+            <a:endParaRPr lang="zh-TW" altLang="en-US"/>
           </a:p>
           <a:p>
             <a:pPr lvl="4"/>
@@ -5696,6 +5616,7 @@
               <a:rPr lang="zh-TW" altLang="en-US"/>
               <a:t>第五層</a:t>
             </a:r>
+            <a:endParaRPr lang="zh-TW" altLang="en-US"/>
           </a:p>
         </p:txBody>
       </p:sp>
@@ -5716,7 +5637,6 @@
           <a:p>
             <a:fld id="{388997FB-EFBE-4ED6-A43F-DDA1512FD57C}" type="datetimeFigureOut">
               <a:rPr lang="zh-TW" altLang="en-US" smtClean="0"/>
-              <a:t>2026/4/24</a:t>
             </a:fld>
             <a:endParaRPr lang="zh-TW" altLang="en-US"/>
           </a:p>
@@ -5758,7 +5678,6 @@
           <a:p>
             <a:fld id="{13C0E97A-62D1-41C7-936F-199E295F9AB2}" type="slidenum">
               <a:rPr lang="zh-TW" altLang="en-US" smtClean="0"/>
-              <a:t>‹#›</a:t>
             </a:fld>
             <a:endParaRPr lang="zh-TW" altLang="en-US"/>
           </a:p>
@@ -5808,6 +5727,7 @@
               <a:rPr lang="zh-TW" altLang="en-US"/>
               <a:t>按一下以編輯母片標題樣式</a:t>
             </a:r>
+            <a:endParaRPr lang="zh-TW" altLang="en-US"/>
           </a:p>
         </p:txBody>
       </p:sp>
@@ -5828,7 +5748,6 @@
           <a:p>
             <a:fld id="{388997FB-EFBE-4ED6-A43F-DDA1512FD57C}" type="datetimeFigureOut">
               <a:rPr lang="zh-TW" altLang="en-US" smtClean="0"/>
-              <a:t>2026/4/24</a:t>
             </a:fld>
             <a:endParaRPr lang="zh-TW" altLang="en-US"/>
           </a:p>
@@ -5870,7 +5789,6 @@
           <a:p>
             <a:fld id="{13C0E97A-62D1-41C7-936F-199E295F9AB2}" type="slidenum">
               <a:rPr lang="zh-TW" altLang="en-US" smtClean="0"/>
-              <a:t>‹#›</a:t>
             </a:fld>
             <a:endParaRPr lang="zh-TW" altLang="en-US"/>
           </a:p>
@@ -5918,7 +5836,6 @@
           <a:p>
             <a:fld id="{388997FB-EFBE-4ED6-A43F-DDA1512FD57C}" type="datetimeFigureOut">
               <a:rPr lang="zh-TW" altLang="en-US" smtClean="0"/>
-              <a:t>2026/4/24</a:t>
             </a:fld>
             <a:endParaRPr lang="zh-TW" altLang="en-US"/>
           </a:p>
@@ -5960,7 +5877,6 @@
           <a:p>
             <a:fld id="{13C0E97A-62D1-41C7-936F-199E295F9AB2}" type="slidenum">
               <a:rPr lang="zh-TW" altLang="en-US" smtClean="0"/>
-              <a:t>‹#›</a:t>
             </a:fld>
             <a:endParaRPr lang="zh-TW" altLang="en-US"/>
           </a:p>
@@ -6019,6 +5935,7 @@
               <a:rPr lang="zh-TW" altLang="en-US"/>
               <a:t>按一下以編輯母片標題樣式</a:t>
             </a:r>
+            <a:endParaRPr lang="zh-TW" altLang="en-US"/>
           </a:p>
         </p:txBody>
       </p:sp>
@@ -6084,6 +6001,7 @@
               <a:rPr lang="zh-TW" altLang="en-US"/>
               <a:t>按一下以編輯母片文字樣式</a:t>
             </a:r>
+            <a:endParaRPr lang="zh-TW" altLang="en-US"/>
           </a:p>
         </p:txBody>
       </p:sp>
@@ -6111,7 +6029,6 @@
             </a:pPr>
             <a:fld id="{B13CE306-2D5A-4AB4-AC5D-5D21E1944430}" type="slidenum">
               <a:rPr lang="zh-TW" altLang="en-US"/>
-              <a:t>‹#›</a:t>
             </a:fld>
             <a:endParaRPr lang="en-US" altLang="zh-TW"/>
           </a:p>
@@ -6170,6 +6087,7 @@
               <a:rPr lang="zh-TW" altLang="en-US"/>
               <a:t>按一下以編輯母片標題樣式</a:t>
             </a:r>
+            <a:endParaRPr lang="zh-TW" altLang="en-US"/>
           </a:p>
         </p:txBody>
       </p:sp>
@@ -6226,6 +6144,7 @@
               <a:rPr lang="zh-TW" altLang="en-US"/>
               <a:t>按一下以編輯母片文字樣式</a:t>
             </a:r>
+            <a:endParaRPr lang="zh-TW" altLang="en-US"/>
           </a:p>
           <a:p>
             <a:pPr lvl="1"/>
@@ -6233,6 +6152,7 @@
               <a:rPr lang="zh-TW" altLang="en-US"/>
               <a:t>第二層</a:t>
             </a:r>
+            <a:endParaRPr lang="zh-TW" altLang="en-US"/>
           </a:p>
           <a:p>
             <a:pPr lvl="2"/>
@@ -6240,6 +6160,7 @@
               <a:rPr lang="zh-TW" altLang="en-US"/>
               <a:t>第三層</a:t>
             </a:r>
+            <a:endParaRPr lang="zh-TW" altLang="en-US"/>
           </a:p>
           <a:p>
             <a:pPr lvl="3"/>
@@ -6247,6 +6168,7 @@
               <a:rPr lang="zh-TW" altLang="en-US"/>
               <a:t>第四層</a:t>
             </a:r>
+            <a:endParaRPr lang="zh-TW" altLang="en-US"/>
           </a:p>
           <a:p>
             <a:pPr lvl="4"/>
@@ -6254,6 +6176,7 @@
               <a:rPr lang="zh-TW" altLang="en-US"/>
               <a:t>第五層</a:t>
             </a:r>
+            <a:endParaRPr lang="zh-TW" altLang="en-US"/>
           </a:p>
         </p:txBody>
       </p:sp>
@@ -6319,6 +6242,7 @@
               <a:rPr lang="zh-TW" altLang="en-US"/>
               <a:t>按一下以編輯母片文字樣式</a:t>
             </a:r>
+            <a:endParaRPr lang="zh-TW" altLang="en-US"/>
           </a:p>
         </p:txBody>
       </p:sp>
@@ -6339,7 +6263,6 @@
           <a:p>
             <a:fld id="{388997FB-EFBE-4ED6-A43F-DDA1512FD57C}" type="datetimeFigureOut">
               <a:rPr lang="zh-TW" altLang="en-US" smtClean="0"/>
-              <a:t>2026/4/24</a:t>
             </a:fld>
             <a:endParaRPr lang="zh-TW" altLang="en-US"/>
           </a:p>
@@ -6381,7 +6304,6 @@
           <a:p>
             <a:fld id="{13C0E97A-62D1-41C7-936F-199E295F9AB2}" type="slidenum">
               <a:rPr lang="zh-TW" altLang="en-US" smtClean="0"/>
-              <a:t>‹#›</a:t>
             </a:fld>
             <a:endParaRPr lang="zh-TW" altLang="en-US"/>
           </a:p>
@@ -6440,6 +6362,7 @@
               <a:rPr lang="zh-TW" altLang="en-US"/>
               <a:t>按一下以編輯母片標題樣式</a:t>
             </a:r>
+            <a:endParaRPr lang="zh-TW" altLang="en-US"/>
           </a:p>
         </p:txBody>
       </p:sp>
@@ -6566,6 +6489,7 @@
               <a:rPr lang="zh-TW" altLang="en-US"/>
               <a:t>按一下以編輯母片文字樣式</a:t>
             </a:r>
+            <a:endParaRPr lang="zh-TW" altLang="en-US"/>
           </a:p>
         </p:txBody>
       </p:sp>
@@ -6586,7 +6510,6 @@
           <a:p>
             <a:fld id="{388997FB-EFBE-4ED6-A43F-DDA1512FD57C}" type="datetimeFigureOut">
               <a:rPr lang="zh-TW" altLang="en-US" smtClean="0"/>
-              <a:t>2026/4/24</a:t>
             </a:fld>
             <a:endParaRPr lang="zh-TW" altLang="en-US"/>
           </a:p>
@@ -6628,7 +6551,6 @@
           <a:p>
             <a:fld id="{13C0E97A-62D1-41C7-936F-199E295F9AB2}" type="slidenum">
               <a:rPr lang="zh-TW" altLang="en-US" smtClean="0"/>
-              <a:t>‹#›</a:t>
             </a:fld>
             <a:endParaRPr lang="zh-TW" altLang="en-US"/>
           </a:p>
@@ -6678,6 +6600,7 @@
               <a:rPr lang="zh-TW" altLang="en-US"/>
               <a:t>按一下以編輯母片標題樣式</a:t>
             </a:r>
+            <a:endParaRPr lang="zh-TW" altLang="en-US"/>
           </a:p>
         </p:txBody>
       </p:sp>
@@ -6701,6 +6624,7 @@
               <a:rPr lang="zh-TW" altLang="en-US"/>
               <a:t>按一下以編輯母片文字樣式</a:t>
             </a:r>
+            <a:endParaRPr lang="zh-TW" altLang="en-US"/>
           </a:p>
           <a:p>
             <a:pPr lvl="1"/>
@@ -6708,6 +6632,7 @@
               <a:rPr lang="zh-TW" altLang="en-US"/>
               <a:t>第二層</a:t>
             </a:r>
+            <a:endParaRPr lang="zh-TW" altLang="en-US"/>
           </a:p>
           <a:p>
             <a:pPr lvl="2"/>
@@ -6715,6 +6640,7 @@
               <a:rPr lang="zh-TW" altLang="en-US"/>
               <a:t>第三層</a:t>
             </a:r>
+            <a:endParaRPr lang="zh-TW" altLang="en-US"/>
           </a:p>
           <a:p>
             <a:pPr lvl="3"/>
@@ -6722,6 +6648,7 @@
               <a:rPr lang="zh-TW" altLang="en-US"/>
               <a:t>第四層</a:t>
             </a:r>
+            <a:endParaRPr lang="zh-TW" altLang="en-US"/>
           </a:p>
           <a:p>
             <a:pPr lvl="4"/>
@@ -6729,6 +6656,7 @@
               <a:rPr lang="zh-TW" altLang="en-US"/>
               <a:t>第五層</a:t>
             </a:r>
+            <a:endParaRPr lang="zh-TW" altLang="en-US"/>
           </a:p>
         </p:txBody>
       </p:sp>
@@ -6749,7 +6677,6 @@
           <a:p>
             <a:fld id="{388997FB-EFBE-4ED6-A43F-DDA1512FD57C}" type="datetimeFigureOut">
               <a:rPr lang="zh-TW" altLang="en-US" smtClean="0"/>
-              <a:t>2026/4/24</a:t>
             </a:fld>
             <a:endParaRPr lang="zh-TW" altLang="en-US"/>
           </a:p>
@@ -6791,7 +6718,6 @@
           <a:p>
             <a:fld id="{13C0E97A-62D1-41C7-936F-199E295F9AB2}" type="slidenum">
               <a:rPr lang="zh-TW" altLang="en-US" smtClean="0"/>
-              <a:t>‹#›</a:t>
             </a:fld>
             <a:endParaRPr lang="zh-TW" altLang="en-US"/>
           </a:p>
@@ -6846,6 +6772,7 @@
               <a:rPr lang="zh-TW" altLang="en-US"/>
               <a:t>按一下以編輯母片標題樣式</a:t>
             </a:r>
+            <a:endParaRPr lang="zh-TW" altLang="en-US"/>
           </a:p>
         </p:txBody>
       </p:sp>
@@ -6874,6 +6801,7 @@
               <a:rPr lang="zh-TW" altLang="en-US"/>
               <a:t>按一下以編輯母片文字樣式</a:t>
             </a:r>
+            <a:endParaRPr lang="zh-TW" altLang="en-US"/>
           </a:p>
           <a:p>
             <a:pPr lvl="1"/>
@@ -6881,6 +6809,7 @@
               <a:rPr lang="zh-TW" altLang="en-US"/>
               <a:t>第二層</a:t>
             </a:r>
+            <a:endParaRPr lang="zh-TW" altLang="en-US"/>
           </a:p>
           <a:p>
             <a:pPr lvl="2"/>
@@ -6888,6 +6817,7 @@
               <a:rPr lang="zh-TW" altLang="en-US"/>
               <a:t>第三層</a:t>
             </a:r>
+            <a:endParaRPr lang="zh-TW" altLang="en-US"/>
           </a:p>
           <a:p>
             <a:pPr lvl="3"/>
@@ -6895,6 +6825,7 @@
               <a:rPr lang="zh-TW" altLang="en-US"/>
               <a:t>第四層</a:t>
             </a:r>
+            <a:endParaRPr lang="zh-TW" altLang="en-US"/>
           </a:p>
           <a:p>
             <a:pPr lvl="4"/>
@@ -6902,6 +6833,7 @@
               <a:rPr lang="zh-TW" altLang="en-US"/>
               <a:t>第五層</a:t>
             </a:r>
+            <a:endParaRPr lang="zh-TW" altLang="en-US"/>
           </a:p>
         </p:txBody>
       </p:sp>
@@ -6922,7 +6854,6 @@
           <a:p>
             <a:fld id="{388997FB-EFBE-4ED6-A43F-DDA1512FD57C}" type="datetimeFigureOut">
               <a:rPr lang="zh-TW" altLang="en-US" smtClean="0"/>
-              <a:t>2026/4/24</a:t>
             </a:fld>
             <a:endParaRPr lang="zh-TW" altLang="en-US"/>
           </a:p>
@@ -6964,7 +6895,6 @@
           <a:p>
             <a:fld id="{13C0E97A-62D1-41C7-936F-199E295F9AB2}" type="slidenum">
               <a:rPr lang="zh-TW" altLang="en-US" smtClean="0"/>
-              <a:t>‹#›</a:t>
             </a:fld>
             <a:endParaRPr lang="zh-TW" altLang="en-US"/>
           </a:p>
@@ -7019,6 +6949,7 @@
               <a:rPr lang="zh-TW" altLang="en-US"/>
               <a:t>按一下以編輯母片標題樣式</a:t>
             </a:r>
+            <a:endParaRPr lang="zh-TW" altLang="en-US"/>
           </a:p>
         </p:txBody>
       </p:sp>
@@ -7083,6 +7014,7 @@
               <a:rPr lang="zh-TW" altLang="en-US"/>
               <a:t>按一下以編輯母片副標題樣式</a:t>
             </a:r>
+            <a:endParaRPr lang="zh-TW" altLang="en-US"/>
           </a:p>
         </p:txBody>
       </p:sp>
@@ -7114,7 +7046,6 @@
                   <a:srgbClr val="000000"/>
                 </a:solidFill>
               </a:rPr>
-              <a:t>‹#›</a:t>
             </a:fld>
             <a:endParaRPr lang="en-US" altLang="zh-TW">
               <a:solidFill>
@@ -7168,6 +7099,7 @@
               <a:rPr lang="zh-TW" altLang="en-US"/>
               <a:t>按一下以編輯母片標題樣式</a:t>
             </a:r>
+            <a:endParaRPr lang="zh-TW" altLang="en-US"/>
           </a:p>
         </p:txBody>
       </p:sp>
@@ -7191,6 +7123,7 @@
               <a:rPr lang="zh-TW" altLang="en-US"/>
               <a:t>按一下以編輯母片文字樣式</a:t>
             </a:r>
+            <a:endParaRPr lang="zh-TW" altLang="en-US"/>
           </a:p>
           <a:p>
             <a:pPr lvl="1"/>
@@ -7198,6 +7131,7 @@
               <a:rPr lang="zh-TW" altLang="en-US"/>
               <a:t>第二層</a:t>
             </a:r>
+            <a:endParaRPr lang="zh-TW" altLang="en-US"/>
           </a:p>
           <a:p>
             <a:pPr lvl="2"/>
@@ -7205,6 +7139,7 @@
               <a:rPr lang="zh-TW" altLang="en-US"/>
               <a:t>第三層</a:t>
             </a:r>
+            <a:endParaRPr lang="zh-TW" altLang="en-US"/>
           </a:p>
           <a:p>
             <a:pPr lvl="3"/>
@@ -7212,6 +7147,7 @@
               <a:rPr lang="zh-TW" altLang="en-US"/>
               <a:t>第四層</a:t>
             </a:r>
+            <a:endParaRPr lang="zh-TW" altLang="en-US"/>
           </a:p>
           <a:p>
             <a:pPr lvl="4"/>
@@ -7219,6 +7155,7 @@
               <a:rPr lang="zh-TW" altLang="en-US"/>
               <a:t>第五層</a:t>
             </a:r>
+            <a:endParaRPr lang="zh-TW" altLang="en-US"/>
           </a:p>
         </p:txBody>
       </p:sp>
@@ -7250,7 +7187,6 @@
                   <a:srgbClr val="000000"/>
                 </a:solidFill>
               </a:rPr>
-              <a:t>‹#›</a:t>
             </a:fld>
             <a:endParaRPr lang="en-US" altLang="zh-TW">
               <a:solidFill>
@@ -7313,6 +7249,7 @@
               <a:rPr lang="zh-TW" altLang="en-US"/>
               <a:t>按一下以編輯母片標題樣式</a:t>
             </a:r>
+            <a:endParaRPr lang="zh-TW" altLang="en-US"/>
           </a:p>
         </p:txBody>
       </p:sp>
@@ -7378,6 +7315,7 @@
               <a:rPr lang="zh-TW" altLang="en-US"/>
               <a:t>按一下以編輯母片文字樣式</a:t>
             </a:r>
+            <a:endParaRPr lang="zh-TW" altLang="en-US"/>
           </a:p>
         </p:txBody>
       </p:sp>
@@ -7409,7 +7347,6 @@
                   <a:srgbClr val="000000"/>
                 </a:solidFill>
               </a:rPr>
-              <a:t>‹#›</a:t>
             </a:fld>
             <a:endParaRPr lang="en-US" altLang="zh-TW">
               <a:solidFill>
@@ -7463,6 +7400,7 @@
               <a:rPr lang="zh-TW" altLang="en-US"/>
               <a:t>按一下以編輯母片標題樣式</a:t>
             </a:r>
+            <a:endParaRPr lang="zh-TW" altLang="en-US"/>
           </a:p>
         </p:txBody>
       </p:sp>
@@ -7519,6 +7457,7 @@
               <a:rPr lang="zh-TW" altLang="en-US"/>
               <a:t>按一下以編輯母片文字樣式</a:t>
             </a:r>
+            <a:endParaRPr lang="zh-TW" altLang="en-US"/>
           </a:p>
           <a:p>
             <a:pPr lvl="1"/>
@@ -7526,6 +7465,7 @@
               <a:rPr lang="zh-TW" altLang="en-US"/>
               <a:t>第二層</a:t>
             </a:r>
+            <a:endParaRPr lang="zh-TW" altLang="en-US"/>
           </a:p>
           <a:p>
             <a:pPr lvl="2"/>
@@ -7533,6 +7473,7 @@
               <a:rPr lang="zh-TW" altLang="en-US"/>
               <a:t>第三層</a:t>
             </a:r>
+            <a:endParaRPr lang="zh-TW" altLang="en-US"/>
           </a:p>
           <a:p>
             <a:pPr lvl="3"/>
@@ -7540,6 +7481,7 @@
               <a:rPr lang="zh-TW" altLang="en-US"/>
               <a:t>第四層</a:t>
             </a:r>
+            <a:endParaRPr lang="zh-TW" altLang="en-US"/>
           </a:p>
           <a:p>
             <a:pPr lvl="4"/>
@@ -7547,6 +7489,7 @@
               <a:rPr lang="zh-TW" altLang="en-US"/>
               <a:t>第五層</a:t>
             </a:r>
+            <a:endParaRPr lang="zh-TW" altLang="en-US"/>
           </a:p>
         </p:txBody>
       </p:sp>
@@ -7603,6 +7546,7 @@
               <a:rPr lang="zh-TW" altLang="en-US"/>
               <a:t>按一下以編輯母片文字樣式</a:t>
             </a:r>
+            <a:endParaRPr lang="zh-TW" altLang="en-US"/>
           </a:p>
           <a:p>
             <a:pPr lvl="1"/>
@@ -7610,6 +7554,7 @@
               <a:rPr lang="zh-TW" altLang="en-US"/>
               <a:t>第二層</a:t>
             </a:r>
+            <a:endParaRPr lang="zh-TW" altLang="en-US"/>
           </a:p>
           <a:p>
             <a:pPr lvl="2"/>
@@ -7617,6 +7562,7 @@
               <a:rPr lang="zh-TW" altLang="en-US"/>
               <a:t>第三層</a:t>
             </a:r>
+            <a:endParaRPr lang="zh-TW" altLang="en-US"/>
           </a:p>
           <a:p>
             <a:pPr lvl="3"/>
@@ -7624,6 +7570,7 @@
               <a:rPr lang="zh-TW" altLang="en-US"/>
               <a:t>第四層</a:t>
             </a:r>
+            <a:endParaRPr lang="zh-TW" altLang="en-US"/>
           </a:p>
           <a:p>
             <a:pPr lvl="4"/>
@@ -7631,6 +7578,7 @@
               <a:rPr lang="zh-TW" altLang="en-US"/>
               <a:t>第五層</a:t>
             </a:r>
+            <a:endParaRPr lang="zh-TW" altLang="en-US"/>
           </a:p>
         </p:txBody>
       </p:sp>
@@ -7662,7 +7610,6 @@
                   <a:srgbClr val="000000"/>
                 </a:solidFill>
               </a:rPr>
-              <a:t>‹#›</a:t>
             </a:fld>
             <a:endParaRPr lang="en-US" altLang="zh-TW">
               <a:solidFill>
@@ -7725,6 +7672,7 @@
               <a:rPr lang="zh-TW" altLang="en-US"/>
               <a:t>按一下以編輯母片標題樣式</a:t>
             </a:r>
+            <a:endParaRPr lang="zh-TW" altLang="en-US"/>
           </a:p>
         </p:txBody>
       </p:sp>
@@ -7790,6 +7738,7 @@
               <a:rPr lang="zh-TW" altLang="en-US"/>
               <a:t>按一下以編輯母片文字樣式</a:t>
             </a:r>
+            <a:endParaRPr lang="zh-TW" altLang="en-US"/>
           </a:p>
         </p:txBody>
       </p:sp>
@@ -7846,6 +7795,7 @@
               <a:rPr lang="zh-TW" altLang="en-US"/>
               <a:t>按一下以編輯母片文字樣式</a:t>
             </a:r>
+            <a:endParaRPr lang="zh-TW" altLang="en-US"/>
           </a:p>
           <a:p>
             <a:pPr lvl="1"/>
@@ -7853,6 +7803,7 @@
               <a:rPr lang="zh-TW" altLang="en-US"/>
               <a:t>第二層</a:t>
             </a:r>
+            <a:endParaRPr lang="zh-TW" altLang="en-US"/>
           </a:p>
           <a:p>
             <a:pPr lvl="2"/>
@@ -7860,6 +7811,7 @@
               <a:rPr lang="zh-TW" altLang="en-US"/>
               <a:t>第三層</a:t>
             </a:r>
+            <a:endParaRPr lang="zh-TW" altLang="en-US"/>
           </a:p>
           <a:p>
             <a:pPr lvl="3"/>
@@ -7867,6 +7819,7 @@
               <a:rPr lang="zh-TW" altLang="en-US"/>
               <a:t>第四層</a:t>
             </a:r>
+            <a:endParaRPr lang="zh-TW" altLang="en-US"/>
           </a:p>
           <a:p>
             <a:pPr lvl="4"/>
@@ -7874,6 +7827,7 @@
               <a:rPr lang="zh-TW" altLang="en-US"/>
               <a:t>第五層</a:t>
             </a:r>
+            <a:endParaRPr lang="zh-TW" altLang="en-US"/>
           </a:p>
         </p:txBody>
       </p:sp>
@@ -7939,6 +7893,7 @@
               <a:rPr lang="zh-TW" altLang="en-US"/>
               <a:t>按一下以編輯母片文字樣式</a:t>
             </a:r>
+            <a:endParaRPr lang="zh-TW" altLang="en-US"/>
           </a:p>
         </p:txBody>
       </p:sp>
@@ -7995,6 +7950,7 @@
               <a:rPr lang="zh-TW" altLang="en-US"/>
               <a:t>按一下以編輯母片文字樣式</a:t>
             </a:r>
+            <a:endParaRPr lang="zh-TW" altLang="en-US"/>
           </a:p>
           <a:p>
             <a:pPr lvl="1"/>
@@ -8002,6 +7958,7 @@
               <a:rPr lang="zh-TW" altLang="en-US"/>
               <a:t>第二層</a:t>
             </a:r>
+            <a:endParaRPr lang="zh-TW" altLang="en-US"/>
           </a:p>
           <a:p>
             <a:pPr lvl="2"/>
@@ -8009,6 +7966,7 @@
               <a:rPr lang="zh-TW" altLang="en-US"/>
               <a:t>第三層</a:t>
             </a:r>
+            <a:endParaRPr lang="zh-TW" altLang="en-US"/>
           </a:p>
           <a:p>
             <a:pPr lvl="3"/>
@@ -8016,6 +7974,7 @@
               <a:rPr lang="zh-TW" altLang="en-US"/>
               <a:t>第四層</a:t>
             </a:r>
+            <a:endParaRPr lang="zh-TW" altLang="en-US"/>
           </a:p>
           <a:p>
             <a:pPr lvl="4"/>
@@ -8023,6 +7982,7 @@
               <a:rPr lang="zh-TW" altLang="en-US"/>
               <a:t>第五層</a:t>
             </a:r>
+            <a:endParaRPr lang="zh-TW" altLang="en-US"/>
           </a:p>
         </p:txBody>
       </p:sp>
@@ -8054,7 +8014,6 @@
                   <a:srgbClr val="000000"/>
                 </a:solidFill>
               </a:rPr>
-              <a:t>‹#›</a:t>
             </a:fld>
             <a:endParaRPr lang="en-US" altLang="zh-TW">
               <a:solidFill>
@@ -8108,6 +8067,7 @@
               <a:rPr lang="zh-TW" altLang="en-US"/>
               <a:t>按一下以編輯母片標題樣式</a:t>
             </a:r>
+            <a:endParaRPr lang="zh-TW" altLang="en-US"/>
           </a:p>
         </p:txBody>
       </p:sp>
@@ -8139,7 +8099,6 @@
                   <a:srgbClr val="000000"/>
                 </a:solidFill>
               </a:rPr>
-              <a:t>‹#›</a:t>
             </a:fld>
             <a:endParaRPr lang="en-US" altLang="zh-TW">
               <a:solidFill>
@@ -8193,6 +8152,7 @@
               <a:rPr lang="zh-TW" altLang="en-US"/>
               <a:t>按一下以編輯母片標題樣式</a:t>
             </a:r>
+            <a:endParaRPr lang="zh-TW" altLang="en-US"/>
           </a:p>
         </p:txBody>
       </p:sp>
@@ -8249,6 +8209,7 @@
               <a:rPr lang="zh-TW" altLang="en-US"/>
               <a:t>按一下以編輯母片文字樣式</a:t>
             </a:r>
+            <a:endParaRPr lang="zh-TW" altLang="en-US"/>
           </a:p>
           <a:p>
             <a:pPr lvl="1"/>
@@ -8256,6 +8217,7 @@
               <a:rPr lang="zh-TW" altLang="en-US"/>
               <a:t>第二層</a:t>
             </a:r>
+            <a:endParaRPr lang="zh-TW" altLang="en-US"/>
           </a:p>
           <a:p>
             <a:pPr lvl="2"/>
@@ -8263,6 +8225,7 @@
               <a:rPr lang="zh-TW" altLang="en-US"/>
               <a:t>第三層</a:t>
             </a:r>
+            <a:endParaRPr lang="zh-TW" altLang="en-US"/>
           </a:p>
           <a:p>
             <a:pPr lvl="3"/>
@@ -8270,6 +8233,7 @@
               <a:rPr lang="zh-TW" altLang="en-US"/>
               <a:t>第四層</a:t>
             </a:r>
+            <a:endParaRPr lang="zh-TW" altLang="en-US"/>
           </a:p>
           <a:p>
             <a:pPr lvl="4"/>
@@ -8277,6 +8241,7 @@
               <a:rPr lang="zh-TW" altLang="en-US"/>
               <a:t>第五層</a:t>
             </a:r>
+            <a:endParaRPr lang="zh-TW" altLang="en-US"/>
           </a:p>
         </p:txBody>
       </p:sp>
@@ -8333,6 +8298,7 @@
               <a:rPr lang="zh-TW" altLang="en-US"/>
               <a:t>按一下以編輯母片文字樣式</a:t>
             </a:r>
+            <a:endParaRPr lang="zh-TW" altLang="en-US"/>
           </a:p>
           <a:p>
             <a:pPr lvl="1"/>
@@ -8340,6 +8306,7 @@
               <a:rPr lang="zh-TW" altLang="en-US"/>
               <a:t>第二層</a:t>
             </a:r>
+            <a:endParaRPr lang="zh-TW" altLang="en-US"/>
           </a:p>
           <a:p>
             <a:pPr lvl="2"/>
@@ -8347,6 +8314,7 @@
               <a:rPr lang="zh-TW" altLang="en-US"/>
               <a:t>第三層</a:t>
             </a:r>
+            <a:endParaRPr lang="zh-TW" altLang="en-US"/>
           </a:p>
           <a:p>
             <a:pPr lvl="3"/>
@@ -8354,6 +8322,7 @@
               <a:rPr lang="zh-TW" altLang="en-US"/>
               <a:t>第四層</a:t>
             </a:r>
+            <a:endParaRPr lang="zh-TW" altLang="en-US"/>
           </a:p>
           <a:p>
             <a:pPr lvl="4"/>
@@ -8361,6 +8330,7 @@
               <a:rPr lang="zh-TW" altLang="en-US"/>
               <a:t>第五層</a:t>
             </a:r>
+            <a:endParaRPr lang="zh-TW" altLang="en-US"/>
           </a:p>
         </p:txBody>
       </p:sp>
@@ -8388,7 +8358,6 @@
             </a:pPr>
             <a:fld id="{549D7BD4-4153-4232-9FDF-0A95D9B5C8DE}" type="slidenum">
               <a:rPr lang="zh-TW" altLang="en-US"/>
-              <a:t>‹#›</a:t>
             </a:fld>
             <a:endParaRPr lang="en-US" altLang="zh-TW"/>
           </a:p>
@@ -8447,7 +8416,6 @@
                   <a:srgbClr val="000000"/>
                 </a:solidFill>
               </a:rPr>
-              <a:t>‹#›</a:t>
             </a:fld>
             <a:endParaRPr lang="en-US" altLang="zh-TW">
               <a:solidFill>
@@ -8510,6 +8478,7 @@
               <a:rPr lang="zh-TW" altLang="en-US"/>
               <a:t>按一下以編輯母片標題樣式</a:t>
             </a:r>
+            <a:endParaRPr lang="zh-TW" altLang="en-US"/>
           </a:p>
         </p:txBody>
       </p:sp>
@@ -8575,6 +8544,7 @@
               <a:rPr lang="zh-TW" altLang="en-US"/>
               <a:t>按一下以編輯母片文字樣式</a:t>
             </a:r>
+            <a:endParaRPr lang="zh-TW" altLang="en-US"/>
           </a:p>
         </p:txBody>
       </p:sp>
@@ -8606,7 +8576,6 @@
                   <a:srgbClr val="000000"/>
                 </a:solidFill>
               </a:rPr>
-              <a:t>‹#›</a:t>
             </a:fld>
             <a:endParaRPr lang="en-US" altLang="zh-TW">
               <a:solidFill>
@@ -8669,6 +8638,7 @@
               <a:rPr lang="zh-TW" altLang="en-US"/>
               <a:t>按一下以編輯母片標題樣式</a:t>
             </a:r>
+            <a:endParaRPr lang="zh-TW" altLang="en-US"/>
           </a:p>
         </p:txBody>
       </p:sp>
@@ -8796,6 +8766,7 @@
               <a:rPr lang="zh-TW" altLang="en-US"/>
               <a:t>按一下以編輯母片文字樣式</a:t>
             </a:r>
+            <a:endParaRPr lang="zh-TW" altLang="en-US"/>
           </a:p>
         </p:txBody>
       </p:sp>
@@ -8827,7 +8798,6 @@
                   <a:srgbClr val="000000"/>
                 </a:solidFill>
               </a:rPr>
-              <a:t>‹#›</a:t>
             </a:fld>
             <a:endParaRPr lang="en-US" altLang="zh-TW">
               <a:solidFill>
@@ -8881,6 +8851,7 @@
               <a:rPr lang="zh-TW" altLang="en-US"/>
               <a:t>按一下以編輯母片標題樣式</a:t>
             </a:r>
+            <a:endParaRPr lang="zh-TW" altLang="en-US"/>
           </a:p>
         </p:txBody>
       </p:sp>
@@ -8904,6 +8875,7 @@
               <a:rPr lang="zh-TW" altLang="en-US"/>
               <a:t>按一下以編輯母片文字樣式</a:t>
             </a:r>
+            <a:endParaRPr lang="zh-TW" altLang="en-US"/>
           </a:p>
           <a:p>
             <a:pPr lvl="1"/>
@@ -8911,6 +8883,7 @@
               <a:rPr lang="zh-TW" altLang="en-US"/>
               <a:t>第二層</a:t>
             </a:r>
+            <a:endParaRPr lang="zh-TW" altLang="en-US"/>
           </a:p>
           <a:p>
             <a:pPr lvl="2"/>
@@ -8918,6 +8891,7 @@
               <a:rPr lang="zh-TW" altLang="en-US"/>
               <a:t>第三層</a:t>
             </a:r>
+            <a:endParaRPr lang="zh-TW" altLang="en-US"/>
           </a:p>
           <a:p>
             <a:pPr lvl="3"/>
@@ -8925,6 +8899,7 @@
               <a:rPr lang="zh-TW" altLang="en-US"/>
               <a:t>第四層</a:t>
             </a:r>
+            <a:endParaRPr lang="zh-TW" altLang="en-US"/>
           </a:p>
           <a:p>
             <a:pPr lvl="4"/>
@@ -8932,6 +8907,7 @@
               <a:rPr lang="zh-TW" altLang="en-US"/>
               <a:t>第五層</a:t>
             </a:r>
+            <a:endParaRPr lang="zh-TW" altLang="en-US"/>
           </a:p>
         </p:txBody>
       </p:sp>
@@ -8963,7 +8939,6 @@
                   <a:srgbClr val="000000"/>
                 </a:solidFill>
               </a:rPr>
-              <a:t>‹#›</a:t>
             </a:fld>
             <a:endParaRPr lang="en-US" altLang="zh-TW">
               <a:solidFill>
@@ -9022,6 +8997,7 @@
               <a:rPr lang="zh-TW" altLang="en-US"/>
               <a:t>按一下以編輯母片標題樣式</a:t>
             </a:r>
+            <a:endParaRPr lang="zh-TW" altLang="en-US"/>
           </a:p>
         </p:txBody>
       </p:sp>
@@ -9050,6 +9026,7 @@
               <a:rPr lang="zh-TW" altLang="en-US"/>
               <a:t>按一下以編輯母片文字樣式</a:t>
             </a:r>
+            <a:endParaRPr lang="zh-TW" altLang="en-US"/>
           </a:p>
           <a:p>
             <a:pPr lvl="1"/>
@@ -9057,6 +9034,7 @@
               <a:rPr lang="zh-TW" altLang="en-US"/>
               <a:t>第二層</a:t>
             </a:r>
+            <a:endParaRPr lang="zh-TW" altLang="en-US"/>
           </a:p>
           <a:p>
             <a:pPr lvl="2"/>
@@ -9064,6 +9042,7 @@
               <a:rPr lang="zh-TW" altLang="en-US"/>
               <a:t>第三層</a:t>
             </a:r>
+            <a:endParaRPr lang="zh-TW" altLang="en-US"/>
           </a:p>
           <a:p>
             <a:pPr lvl="3"/>
@@ -9071,6 +9050,7 @@
               <a:rPr lang="zh-TW" altLang="en-US"/>
               <a:t>第四層</a:t>
             </a:r>
+            <a:endParaRPr lang="zh-TW" altLang="en-US"/>
           </a:p>
           <a:p>
             <a:pPr lvl="4"/>
@@ -9078,6 +9058,7 @@
               <a:rPr lang="zh-TW" altLang="en-US"/>
               <a:t>第五層</a:t>
             </a:r>
+            <a:endParaRPr lang="zh-TW" altLang="en-US"/>
           </a:p>
         </p:txBody>
       </p:sp>
@@ -9109,7 +9090,6 @@
                   <a:srgbClr val="000000"/>
                 </a:solidFill>
               </a:rPr>
-              <a:t>‹#›</a:t>
             </a:fld>
             <a:endParaRPr lang="en-US" altLang="zh-TW">
               <a:solidFill>
@@ -9168,6 +9148,7 @@
               <a:rPr lang="zh-TW" altLang="en-US"/>
               <a:t>按一下以編輯母片標題樣式</a:t>
             </a:r>
+            <a:endParaRPr lang="zh-TW" altLang="en-US"/>
           </a:p>
         </p:txBody>
       </p:sp>
@@ -9286,6 +9267,7 @@
               <a:rPr lang="zh-TW" altLang="en-US"/>
               <a:t>按一下以編輯母片副標題樣式</a:t>
             </a:r>
+            <a:endParaRPr lang="zh-TW" altLang="en-US"/>
           </a:p>
         </p:txBody>
       </p:sp>
@@ -9306,7 +9288,6 @@
           <a:p>
             <a:fld id="{79EFF09E-4EA0-4518-A9E8-449DE34F8B74}" type="datetimeFigureOut">
               <a:rPr lang="zh-TW" altLang="en-US" smtClean="0"/>
-              <a:t>2026/4/24</a:t>
             </a:fld>
             <a:endParaRPr lang="zh-TW" altLang="en-US"/>
           </a:p>
@@ -9348,7 +9329,6 @@
           <a:p>
             <a:fld id="{9C4C9021-A16D-4E5C-A421-A5275F523D45}" type="slidenum">
               <a:rPr lang="zh-TW" altLang="en-US" smtClean="0"/>
-              <a:t>‹#›</a:t>
             </a:fld>
             <a:endParaRPr lang="zh-TW" altLang="en-US"/>
           </a:p>
@@ -9398,6 +9378,7 @@
               <a:rPr lang="zh-TW" altLang="en-US"/>
               <a:t>按一下以編輯母片標題樣式</a:t>
             </a:r>
+            <a:endParaRPr lang="zh-TW" altLang="en-US"/>
           </a:p>
         </p:txBody>
       </p:sp>
@@ -9421,6 +9402,7 @@
               <a:rPr lang="zh-TW" altLang="en-US"/>
               <a:t>按一下以編輯母片文字樣式</a:t>
             </a:r>
+            <a:endParaRPr lang="zh-TW" altLang="en-US"/>
           </a:p>
           <a:p>
             <a:pPr lvl="1"/>
@@ -9428,6 +9410,7 @@
               <a:rPr lang="zh-TW" altLang="en-US"/>
               <a:t>第二層</a:t>
             </a:r>
+            <a:endParaRPr lang="zh-TW" altLang="en-US"/>
           </a:p>
           <a:p>
             <a:pPr lvl="2"/>
@@ -9435,6 +9418,7 @@
               <a:rPr lang="zh-TW" altLang="en-US"/>
               <a:t>第三層</a:t>
             </a:r>
+            <a:endParaRPr lang="zh-TW" altLang="en-US"/>
           </a:p>
           <a:p>
             <a:pPr lvl="3"/>
@@ -9442,6 +9426,7 @@
               <a:rPr lang="zh-TW" altLang="en-US"/>
               <a:t>第四層</a:t>
             </a:r>
+            <a:endParaRPr lang="zh-TW" altLang="en-US"/>
           </a:p>
           <a:p>
             <a:pPr lvl="4"/>
@@ -9449,6 +9434,7 @@
               <a:rPr lang="zh-TW" altLang="en-US"/>
               <a:t>第五層</a:t>
             </a:r>
+            <a:endParaRPr lang="zh-TW" altLang="en-US"/>
           </a:p>
         </p:txBody>
       </p:sp>
@@ -9469,7 +9455,6 @@
           <a:p>
             <a:fld id="{79EFF09E-4EA0-4518-A9E8-449DE34F8B74}" type="datetimeFigureOut">
               <a:rPr lang="zh-TW" altLang="en-US" smtClean="0"/>
-              <a:t>2026/4/24</a:t>
             </a:fld>
             <a:endParaRPr lang="zh-TW" altLang="en-US"/>
           </a:p>
@@ -9511,7 +9496,6 @@
           <a:p>
             <a:fld id="{9C4C9021-A16D-4E5C-A421-A5275F523D45}" type="slidenum">
               <a:rPr lang="zh-TW" altLang="en-US" smtClean="0"/>
-              <a:t>‹#›</a:t>
             </a:fld>
             <a:endParaRPr lang="zh-TW" altLang="en-US"/>
           </a:p>
@@ -9570,6 +9554,7 @@
               <a:rPr lang="zh-TW" altLang="en-US"/>
               <a:t>按一下以編輯母片標題樣式</a:t>
             </a:r>
+            <a:endParaRPr lang="zh-TW" altLang="en-US"/>
           </a:p>
         </p:txBody>
       </p:sp>
@@ -9689,6 +9674,7 @@
               <a:rPr lang="zh-TW" altLang="en-US"/>
               <a:t>按一下以編輯母片文字樣式</a:t>
             </a:r>
+            <a:endParaRPr lang="zh-TW" altLang="en-US"/>
           </a:p>
         </p:txBody>
       </p:sp>
@@ -9709,7 +9695,6 @@
           <a:p>
             <a:fld id="{79EFF09E-4EA0-4518-A9E8-449DE34F8B74}" type="datetimeFigureOut">
               <a:rPr lang="zh-TW" altLang="en-US" smtClean="0"/>
-              <a:t>2026/4/24</a:t>
             </a:fld>
             <a:endParaRPr lang="zh-TW" altLang="en-US"/>
           </a:p>
@@ -9751,7 +9736,6 @@
           <a:p>
             <a:fld id="{9C4C9021-A16D-4E5C-A421-A5275F523D45}" type="slidenum">
               <a:rPr lang="zh-TW" altLang="en-US" smtClean="0"/>
-              <a:t>‹#›</a:t>
             </a:fld>
             <a:endParaRPr lang="zh-TW" altLang="en-US"/>
           </a:p>
@@ -9801,6 +9785,7 @@
               <a:rPr lang="zh-TW" altLang="en-US"/>
               <a:t>按一下以編輯母片標題樣式</a:t>
             </a:r>
+            <a:endParaRPr lang="zh-TW" altLang="en-US"/>
           </a:p>
         </p:txBody>
       </p:sp>
@@ -9857,6 +9842,7 @@
               <a:rPr lang="zh-TW" altLang="en-US"/>
               <a:t>按一下以編輯母片文字樣式</a:t>
             </a:r>
+            <a:endParaRPr lang="zh-TW" altLang="en-US"/>
           </a:p>
           <a:p>
             <a:pPr lvl="1"/>
@@ -9864,6 +9850,7 @@
               <a:rPr lang="zh-TW" altLang="en-US"/>
               <a:t>第二層</a:t>
             </a:r>
+            <a:endParaRPr lang="zh-TW" altLang="en-US"/>
           </a:p>
           <a:p>
             <a:pPr lvl="2"/>
@@ -9871,6 +9858,7 @@
               <a:rPr lang="zh-TW" altLang="en-US"/>
               <a:t>第三層</a:t>
             </a:r>
+            <a:endParaRPr lang="zh-TW" altLang="en-US"/>
           </a:p>
           <a:p>
             <a:pPr lvl="3"/>
@@ -9878,6 +9866,7 @@
               <a:rPr lang="zh-TW" altLang="en-US"/>
               <a:t>第四層</a:t>
             </a:r>
+            <a:endParaRPr lang="zh-TW" altLang="en-US"/>
           </a:p>
           <a:p>
             <a:pPr lvl="4"/>
@@ -9885,6 +9874,7 @@
               <a:rPr lang="zh-TW" altLang="en-US"/>
               <a:t>第五層</a:t>
             </a:r>
+            <a:endParaRPr lang="zh-TW" altLang="en-US"/>
           </a:p>
         </p:txBody>
       </p:sp>
@@ -9941,6 +9931,7 @@
               <a:rPr lang="zh-TW" altLang="en-US"/>
               <a:t>按一下以編輯母片文字樣式</a:t>
             </a:r>
+            <a:endParaRPr lang="zh-TW" altLang="en-US"/>
           </a:p>
           <a:p>
             <a:pPr lvl="1"/>
@@ -9948,6 +9939,7 @@
               <a:rPr lang="zh-TW" altLang="en-US"/>
               <a:t>第二層</a:t>
             </a:r>
+            <a:endParaRPr lang="zh-TW" altLang="en-US"/>
           </a:p>
           <a:p>
             <a:pPr lvl="2"/>
@@ -9955,6 +9947,7 @@
               <a:rPr lang="zh-TW" altLang="en-US"/>
               <a:t>第三層</a:t>
             </a:r>
+            <a:endParaRPr lang="zh-TW" altLang="en-US"/>
           </a:p>
           <a:p>
             <a:pPr lvl="3"/>
@@ -9962,6 +9955,7 @@
               <a:rPr lang="zh-TW" altLang="en-US"/>
               <a:t>第四層</a:t>
             </a:r>
+            <a:endParaRPr lang="zh-TW" altLang="en-US"/>
           </a:p>
           <a:p>
             <a:pPr lvl="4"/>
@@ -9969,6 +9963,7 @@
               <a:rPr lang="zh-TW" altLang="en-US"/>
               <a:t>第五層</a:t>
             </a:r>
+            <a:endParaRPr lang="zh-TW" altLang="en-US"/>
           </a:p>
         </p:txBody>
       </p:sp>
@@ -9989,7 +9984,6 @@
           <a:p>
             <a:fld id="{79EFF09E-4EA0-4518-A9E8-449DE34F8B74}" type="datetimeFigureOut">
               <a:rPr lang="zh-TW" altLang="en-US" smtClean="0"/>
-              <a:t>2026/4/24</a:t>
             </a:fld>
             <a:endParaRPr lang="zh-TW" altLang="en-US"/>
           </a:p>
@@ -10031,7 +10025,6 @@
           <a:p>
             <a:fld id="{9C4C9021-A16D-4E5C-A421-A5275F523D45}" type="slidenum">
               <a:rPr lang="zh-TW" altLang="en-US" smtClean="0"/>
-              <a:t>‹#›</a:t>
             </a:fld>
             <a:endParaRPr lang="zh-TW" altLang="en-US"/>
           </a:p>
@@ -10085,6 +10078,7 @@
               <a:rPr lang="zh-TW" altLang="en-US"/>
               <a:t>按一下以編輯母片標題樣式</a:t>
             </a:r>
+            <a:endParaRPr lang="zh-TW" altLang="en-US"/>
           </a:p>
         </p:txBody>
       </p:sp>
@@ -10150,6 +10144,7 @@
               <a:rPr lang="zh-TW" altLang="en-US"/>
               <a:t>按一下以編輯母片文字樣式</a:t>
             </a:r>
+            <a:endParaRPr lang="zh-TW" altLang="en-US"/>
           </a:p>
         </p:txBody>
       </p:sp>
@@ -10206,6 +10201,7 @@
               <a:rPr lang="zh-TW" altLang="en-US"/>
               <a:t>按一下以編輯母片文字樣式</a:t>
             </a:r>
+            <a:endParaRPr lang="zh-TW" altLang="en-US"/>
           </a:p>
           <a:p>
             <a:pPr lvl="1"/>
@@ -10213,6 +10209,7 @@
               <a:rPr lang="zh-TW" altLang="en-US"/>
               <a:t>第二層</a:t>
             </a:r>
+            <a:endParaRPr lang="zh-TW" altLang="en-US"/>
           </a:p>
           <a:p>
             <a:pPr lvl="2"/>
@@ -10220,6 +10217,7 @@
               <a:rPr lang="zh-TW" altLang="en-US"/>
               <a:t>第三層</a:t>
             </a:r>
+            <a:endParaRPr lang="zh-TW" altLang="en-US"/>
           </a:p>
           <a:p>
             <a:pPr lvl="3"/>
@@ -10227,6 +10225,7 @@
               <a:rPr lang="zh-TW" altLang="en-US"/>
               <a:t>第四層</a:t>
             </a:r>
+            <a:endParaRPr lang="zh-TW" altLang="en-US"/>
           </a:p>
           <a:p>
             <a:pPr lvl="4"/>
@@ -10234,6 +10233,7 @@
               <a:rPr lang="zh-TW" altLang="en-US"/>
               <a:t>第五層</a:t>
             </a:r>
+            <a:endParaRPr lang="zh-TW" altLang="en-US"/>
           </a:p>
         </p:txBody>
       </p:sp>
@@ -10299,6 +10299,7 @@
               <a:rPr lang="zh-TW" altLang="en-US"/>
               <a:t>按一下以編輯母片文字樣式</a:t>
             </a:r>
+            <a:endParaRPr lang="zh-TW" altLang="en-US"/>
           </a:p>
         </p:txBody>
       </p:sp>
@@ -10355,6 +10356,7 @@
               <a:rPr lang="zh-TW" altLang="en-US"/>
               <a:t>按一下以編輯母片文字樣式</a:t>
             </a:r>
+            <a:endParaRPr lang="zh-TW" altLang="en-US"/>
           </a:p>
           <a:p>
             <a:pPr lvl="1"/>
@@ -10362,6 +10364,7 @@
               <a:rPr lang="zh-TW" altLang="en-US"/>
               <a:t>第二層</a:t>
             </a:r>
+            <a:endParaRPr lang="zh-TW" altLang="en-US"/>
           </a:p>
           <a:p>
             <a:pPr lvl="2"/>
@@ -10369,6 +10372,7 @@
               <a:rPr lang="zh-TW" altLang="en-US"/>
               <a:t>第三層</a:t>
             </a:r>
+            <a:endParaRPr lang="zh-TW" altLang="en-US"/>
           </a:p>
           <a:p>
             <a:pPr lvl="3"/>
@@ -10376,6 +10380,7 @@
               <a:rPr lang="zh-TW" altLang="en-US"/>
               <a:t>第四層</a:t>
             </a:r>
+            <a:endParaRPr lang="zh-TW" altLang="en-US"/>
           </a:p>
           <a:p>
             <a:pPr lvl="4"/>
@@ -10383,6 +10388,7 @@
               <a:rPr lang="zh-TW" altLang="en-US"/>
               <a:t>第五層</a:t>
             </a:r>
+            <a:endParaRPr lang="zh-TW" altLang="en-US"/>
           </a:p>
         </p:txBody>
       </p:sp>
@@ -10403,7 +10409,6 @@
           <a:p>
             <a:fld id="{79EFF09E-4EA0-4518-A9E8-449DE34F8B74}" type="datetimeFigureOut">
               <a:rPr lang="zh-TW" altLang="en-US" smtClean="0"/>
-              <a:t>2026/4/24</a:t>
             </a:fld>
             <a:endParaRPr lang="zh-TW" altLang="en-US"/>
           </a:p>
@@ -10445,7 +10450,6 @@
           <a:p>
             <a:fld id="{9C4C9021-A16D-4E5C-A421-A5275F523D45}" type="slidenum">
               <a:rPr lang="zh-TW" altLang="en-US" smtClean="0"/>
-              <a:t>‹#›</a:t>
             </a:fld>
             <a:endParaRPr lang="zh-TW" altLang="en-US"/>
           </a:p>
@@ -10504,6 +10508,7 @@
               <a:rPr lang="zh-TW" altLang="en-US"/>
               <a:t>按一下以編輯母片標題樣式</a:t>
             </a:r>
+            <a:endParaRPr lang="zh-TW" altLang="en-US"/>
           </a:p>
         </p:txBody>
       </p:sp>
@@ -10569,6 +10574,7 @@
               <a:rPr lang="zh-TW" altLang="en-US"/>
               <a:t>按一下以編輯母片文字樣式</a:t>
             </a:r>
+            <a:endParaRPr lang="zh-TW" altLang="en-US"/>
           </a:p>
         </p:txBody>
       </p:sp>
@@ -10625,6 +10631,7 @@
               <a:rPr lang="zh-TW" altLang="en-US"/>
               <a:t>按一下以編輯母片文字樣式</a:t>
             </a:r>
+            <a:endParaRPr lang="zh-TW" altLang="en-US"/>
           </a:p>
           <a:p>
             <a:pPr lvl="1"/>
@@ -10632,6 +10639,7 @@
               <a:rPr lang="zh-TW" altLang="en-US"/>
               <a:t>第二層</a:t>
             </a:r>
+            <a:endParaRPr lang="zh-TW" altLang="en-US"/>
           </a:p>
           <a:p>
             <a:pPr lvl="2"/>
@@ -10639,6 +10647,7 @@
               <a:rPr lang="zh-TW" altLang="en-US"/>
               <a:t>第三層</a:t>
             </a:r>
+            <a:endParaRPr lang="zh-TW" altLang="en-US"/>
           </a:p>
           <a:p>
             <a:pPr lvl="3"/>
@@ -10646,6 +10655,7 @@
               <a:rPr lang="zh-TW" altLang="en-US"/>
               <a:t>第四層</a:t>
             </a:r>
+            <a:endParaRPr lang="zh-TW" altLang="en-US"/>
           </a:p>
           <a:p>
             <a:pPr lvl="4"/>
@@ -10653,6 +10663,7 @@
               <a:rPr lang="zh-TW" altLang="en-US"/>
               <a:t>第五層</a:t>
             </a:r>
+            <a:endParaRPr lang="zh-TW" altLang="en-US"/>
           </a:p>
         </p:txBody>
       </p:sp>
@@ -10718,6 +10729,7 @@
               <a:rPr lang="zh-TW" altLang="en-US"/>
               <a:t>按一下以編輯母片文字樣式</a:t>
             </a:r>
+            <a:endParaRPr lang="zh-TW" altLang="en-US"/>
           </a:p>
         </p:txBody>
       </p:sp>
@@ -10774,6 +10786,7 @@
               <a:rPr lang="zh-TW" altLang="en-US"/>
               <a:t>按一下以編輯母片文字樣式</a:t>
             </a:r>
+            <a:endParaRPr lang="zh-TW" altLang="en-US"/>
           </a:p>
           <a:p>
             <a:pPr lvl="1"/>
@@ -10781,6 +10794,7 @@
               <a:rPr lang="zh-TW" altLang="en-US"/>
               <a:t>第二層</a:t>
             </a:r>
+            <a:endParaRPr lang="zh-TW" altLang="en-US"/>
           </a:p>
           <a:p>
             <a:pPr lvl="2"/>
@@ -10788,6 +10802,7 @@
               <a:rPr lang="zh-TW" altLang="en-US"/>
               <a:t>第三層</a:t>
             </a:r>
+            <a:endParaRPr lang="zh-TW" altLang="en-US"/>
           </a:p>
           <a:p>
             <a:pPr lvl="3"/>
@@ -10795,6 +10810,7 @@
               <a:rPr lang="zh-TW" altLang="en-US"/>
               <a:t>第四層</a:t>
             </a:r>
+            <a:endParaRPr lang="zh-TW" altLang="en-US"/>
           </a:p>
           <a:p>
             <a:pPr lvl="4"/>
@@ -10802,6 +10818,7 @@
               <a:rPr lang="zh-TW" altLang="en-US"/>
               <a:t>第五層</a:t>
             </a:r>
+            <a:endParaRPr lang="zh-TW" altLang="en-US"/>
           </a:p>
         </p:txBody>
       </p:sp>
@@ -10829,7 +10846,6 @@
             </a:pPr>
             <a:fld id="{56BE1F83-3BEF-49AC-ABC8-8C6E80176E9C}" type="slidenum">
               <a:rPr lang="zh-TW" altLang="en-US"/>
-              <a:t>‹#›</a:t>
             </a:fld>
             <a:endParaRPr lang="en-US" altLang="zh-TW"/>
           </a:p>
@@ -10879,6 +10895,7 @@
               <a:rPr lang="zh-TW" altLang="en-US"/>
               <a:t>按一下以編輯母片標題樣式</a:t>
             </a:r>
+            <a:endParaRPr lang="zh-TW" altLang="en-US"/>
           </a:p>
         </p:txBody>
       </p:sp>
@@ -10899,7 +10916,6 @@
           <a:p>
             <a:fld id="{79EFF09E-4EA0-4518-A9E8-449DE34F8B74}" type="datetimeFigureOut">
               <a:rPr lang="zh-TW" altLang="en-US" smtClean="0"/>
-              <a:t>2026/4/24</a:t>
             </a:fld>
             <a:endParaRPr lang="zh-TW" altLang="en-US"/>
           </a:p>
@@ -10941,7 +10957,6 @@
           <a:p>
             <a:fld id="{9C4C9021-A16D-4E5C-A421-A5275F523D45}" type="slidenum">
               <a:rPr lang="zh-TW" altLang="en-US" smtClean="0"/>
-              <a:t>‹#›</a:t>
             </a:fld>
             <a:endParaRPr lang="zh-TW" altLang="en-US"/>
           </a:p>
@@ -10989,7 +11004,6 @@
           <a:p>
             <a:fld id="{79EFF09E-4EA0-4518-A9E8-449DE34F8B74}" type="datetimeFigureOut">
               <a:rPr lang="zh-TW" altLang="en-US" smtClean="0"/>
-              <a:t>2026/4/24</a:t>
             </a:fld>
             <a:endParaRPr lang="zh-TW" altLang="en-US"/>
           </a:p>
@@ -11031,7 +11045,6 @@
           <a:p>
             <a:fld id="{9C4C9021-A16D-4E5C-A421-A5275F523D45}" type="slidenum">
               <a:rPr lang="zh-TW" altLang="en-US" smtClean="0"/>
-              <a:t>‹#›</a:t>
             </a:fld>
             <a:endParaRPr lang="zh-TW" altLang="en-US"/>
           </a:p>
@@ -11090,6 +11103,7 @@
               <a:rPr lang="zh-TW" altLang="en-US"/>
               <a:t>按一下以編輯母片標題樣式</a:t>
             </a:r>
+            <a:endParaRPr lang="zh-TW" altLang="en-US"/>
           </a:p>
         </p:txBody>
       </p:sp>
@@ -11146,6 +11160,7 @@
               <a:rPr lang="zh-TW" altLang="en-US"/>
               <a:t>按一下以編輯母片文字樣式</a:t>
             </a:r>
+            <a:endParaRPr lang="zh-TW" altLang="en-US"/>
           </a:p>
           <a:p>
             <a:pPr lvl="1"/>
@@ -11153,6 +11168,7 @@
               <a:rPr lang="zh-TW" altLang="en-US"/>
               <a:t>第二層</a:t>
             </a:r>
+            <a:endParaRPr lang="zh-TW" altLang="en-US"/>
           </a:p>
           <a:p>
             <a:pPr lvl="2"/>
@@ -11160,6 +11176,7 @@
               <a:rPr lang="zh-TW" altLang="en-US"/>
               <a:t>第三層</a:t>
             </a:r>
+            <a:endParaRPr lang="zh-TW" altLang="en-US"/>
           </a:p>
           <a:p>
             <a:pPr lvl="3"/>
@@ -11167,6 +11184,7 @@
               <a:rPr lang="zh-TW" altLang="en-US"/>
               <a:t>第四層</a:t>
             </a:r>
+            <a:endParaRPr lang="zh-TW" altLang="en-US"/>
           </a:p>
           <a:p>
             <a:pPr lvl="4"/>
@@ -11174,6 +11192,7 @@
               <a:rPr lang="zh-TW" altLang="en-US"/>
               <a:t>第五層</a:t>
             </a:r>
+            <a:endParaRPr lang="zh-TW" altLang="en-US"/>
           </a:p>
         </p:txBody>
       </p:sp>
@@ -11239,6 +11258,7 @@
               <a:rPr lang="zh-TW" altLang="en-US"/>
               <a:t>按一下以編輯母片文字樣式</a:t>
             </a:r>
+            <a:endParaRPr lang="zh-TW" altLang="en-US"/>
           </a:p>
         </p:txBody>
       </p:sp>
@@ -11259,7 +11279,6 @@
           <a:p>
             <a:fld id="{79EFF09E-4EA0-4518-A9E8-449DE34F8B74}" type="datetimeFigureOut">
               <a:rPr lang="zh-TW" altLang="en-US" smtClean="0"/>
-              <a:t>2026/4/24</a:t>
             </a:fld>
             <a:endParaRPr lang="zh-TW" altLang="en-US"/>
           </a:p>
@@ -11301,7 +11320,6 @@
           <a:p>
             <a:fld id="{9C4C9021-A16D-4E5C-A421-A5275F523D45}" type="slidenum">
               <a:rPr lang="zh-TW" altLang="en-US" smtClean="0"/>
-              <a:t>‹#›</a:t>
             </a:fld>
             <a:endParaRPr lang="zh-TW" altLang="en-US"/>
           </a:p>
@@ -11360,6 +11378,7 @@
               <a:rPr lang="zh-TW" altLang="en-US"/>
               <a:t>按一下以編輯母片標題樣式</a:t>
             </a:r>
+            <a:endParaRPr lang="zh-TW" altLang="en-US"/>
           </a:p>
         </p:txBody>
       </p:sp>
@@ -11486,6 +11505,7 @@
               <a:rPr lang="zh-TW" altLang="en-US"/>
               <a:t>按一下以編輯母片文字樣式</a:t>
             </a:r>
+            <a:endParaRPr lang="zh-TW" altLang="en-US"/>
           </a:p>
         </p:txBody>
       </p:sp>
@@ -11506,7 +11526,6 @@
           <a:p>
             <a:fld id="{79EFF09E-4EA0-4518-A9E8-449DE34F8B74}" type="datetimeFigureOut">
               <a:rPr lang="zh-TW" altLang="en-US" smtClean="0"/>
-              <a:t>2026/4/24</a:t>
             </a:fld>
             <a:endParaRPr lang="zh-TW" altLang="en-US"/>
           </a:p>
@@ -11548,7 +11567,6 @@
           <a:p>
             <a:fld id="{9C4C9021-A16D-4E5C-A421-A5275F523D45}" type="slidenum">
               <a:rPr lang="zh-TW" altLang="en-US" smtClean="0"/>
-              <a:t>‹#›</a:t>
             </a:fld>
             <a:endParaRPr lang="zh-TW" altLang="en-US"/>
           </a:p>
@@ -11598,6 +11616,7 @@
               <a:rPr lang="zh-TW" altLang="en-US"/>
               <a:t>按一下以編輯母片標題樣式</a:t>
             </a:r>
+            <a:endParaRPr lang="zh-TW" altLang="en-US"/>
           </a:p>
         </p:txBody>
       </p:sp>
@@ -11621,6 +11640,7 @@
               <a:rPr lang="zh-TW" altLang="en-US"/>
               <a:t>按一下以編輯母片文字樣式</a:t>
             </a:r>
+            <a:endParaRPr lang="zh-TW" altLang="en-US"/>
           </a:p>
           <a:p>
             <a:pPr lvl="1"/>
@@ -11628,6 +11648,7 @@
               <a:rPr lang="zh-TW" altLang="en-US"/>
               <a:t>第二層</a:t>
             </a:r>
+            <a:endParaRPr lang="zh-TW" altLang="en-US"/>
           </a:p>
           <a:p>
             <a:pPr lvl="2"/>
@@ -11635,6 +11656,7 @@
               <a:rPr lang="zh-TW" altLang="en-US"/>
               <a:t>第三層</a:t>
             </a:r>
+            <a:endParaRPr lang="zh-TW" altLang="en-US"/>
           </a:p>
           <a:p>
             <a:pPr lvl="3"/>
@@ -11642,6 +11664,7 @@
               <a:rPr lang="zh-TW" altLang="en-US"/>
               <a:t>第四層</a:t>
             </a:r>
+            <a:endParaRPr lang="zh-TW" altLang="en-US"/>
           </a:p>
           <a:p>
             <a:pPr lvl="4"/>
@@ -11649,6 +11672,7 @@
               <a:rPr lang="zh-TW" altLang="en-US"/>
               <a:t>第五層</a:t>
             </a:r>
+            <a:endParaRPr lang="zh-TW" altLang="en-US"/>
           </a:p>
         </p:txBody>
       </p:sp>
@@ -11669,7 +11693,6 @@
           <a:p>
             <a:fld id="{79EFF09E-4EA0-4518-A9E8-449DE34F8B74}" type="datetimeFigureOut">
               <a:rPr lang="zh-TW" altLang="en-US" smtClean="0"/>
-              <a:t>2026/4/24</a:t>
             </a:fld>
             <a:endParaRPr lang="zh-TW" altLang="en-US"/>
           </a:p>
@@ -11711,7 +11734,6 @@
           <a:p>
             <a:fld id="{9C4C9021-A16D-4E5C-A421-A5275F523D45}" type="slidenum">
               <a:rPr lang="zh-TW" altLang="en-US" smtClean="0"/>
-              <a:t>‹#›</a:t>
             </a:fld>
             <a:endParaRPr lang="zh-TW" altLang="en-US"/>
           </a:p>
@@ -11766,6 +11788,7 @@
               <a:rPr lang="zh-TW" altLang="en-US"/>
               <a:t>按一下以編輯母片標題樣式</a:t>
             </a:r>
+            <a:endParaRPr lang="zh-TW" altLang="en-US"/>
           </a:p>
         </p:txBody>
       </p:sp>
@@ -11794,6 +11817,7 @@
               <a:rPr lang="zh-TW" altLang="en-US"/>
               <a:t>按一下以編輯母片文字樣式</a:t>
             </a:r>
+            <a:endParaRPr lang="zh-TW" altLang="en-US"/>
           </a:p>
           <a:p>
             <a:pPr lvl="1"/>
@@ -11801,6 +11825,7 @@
               <a:rPr lang="zh-TW" altLang="en-US"/>
               <a:t>第二層</a:t>
             </a:r>
+            <a:endParaRPr lang="zh-TW" altLang="en-US"/>
           </a:p>
           <a:p>
             <a:pPr lvl="2"/>
@@ -11808,6 +11833,7 @@
               <a:rPr lang="zh-TW" altLang="en-US"/>
               <a:t>第三層</a:t>
             </a:r>
+            <a:endParaRPr lang="zh-TW" altLang="en-US"/>
           </a:p>
           <a:p>
             <a:pPr lvl="3"/>
@@ -11815,6 +11841,7 @@
               <a:rPr lang="zh-TW" altLang="en-US"/>
               <a:t>第四層</a:t>
             </a:r>
+            <a:endParaRPr lang="zh-TW" altLang="en-US"/>
           </a:p>
           <a:p>
             <a:pPr lvl="4"/>
@@ -11822,6 +11849,7 @@
               <a:rPr lang="zh-TW" altLang="en-US"/>
               <a:t>第五層</a:t>
             </a:r>
+            <a:endParaRPr lang="zh-TW" altLang="en-US"/>
           </a:p>
         </p:txBody>
       </p:sp>
@@ -11842,7 +11870,6 @@
           <a:p>
             <a:fld id="{79EFF09E-4EA0-4518-A9E8-449DE34F8B74}" type="datetimeFigureOut">
               <a:rPr lang="zh-TW" altLang="en-US" smtClean="0"/>
-              <a:t>2026/4/24</a:t>
             </a:fld>
             <a:endParaRPr lang="zh-TW" altLang="en-US"/>
           </a:p>
@@ -11884,7 +11911,6 @@
           <a:p>
             <a:fld id="{9C4C9021-A16D-4E5C-A421-A5275F523D45}" type="slidenum">
               <a:rPr lang="zh-TW" altLang="en-US" smtClean="0"/>
-              <a:t>‹#›</a:t>
             </a:fld>
             <a:endParaRPr lang="zh-TW" altLang="en-US"/>
           </a:p>
@@ -11939,6 +11965,7 @@
               <a:rPr lang="zh-TW" altLang="en-US"/>
               <a:t>按一下以編輯母片標題樣式</a:t>
             </a:r>
+            <a:endParaRPr lang="zh-TW" altLang="en-US"/>
           </a:p>
         </p:txBody>
       </p:sp>
@@ -12003,6 +12030,7 @@
               <a:rPr lang="zh-TW" altLang="en-US"/>
               <a:t>按一下以編輯母片副標題樣式</a:t>
             </a:r>
+            <a:endParaRPr lang="zh-TW" altLang="en-US"/>
           </a:p>
         </p:txBody>
       </p:sp>
@@ -12030,7 +12058,6 @@
             </a:pPr>
             <a:fld id="{339EB788-0AD9-4E98-A516-64653248E3DB}" type="slidenum">
               <a:rPr lang="en-US" altLang="zh-TW"/>
-              <a:t>‹#›</a:t>
             </a:fld>
             <a:endParaRPr lang="en-US" altLang="zh-TW"/>
           </a:p>
@@ -12091,6 +12118,7 @@
               <a:rPr lang="zh-TW" altLang="en-US" dirty="0"/>
               <a:t>按一下以編輯母片標題樣式</a:t>
             </a:r>
+            <a:endParaRPr lang="zh-TW" altLang="en-US" dirty="0"/>
           </a:p>
         </p:txBody>
       </p:sp>
@@ -12150,6 +12178,7 @@
               <a:rPr lang="zh-TW" altLang="en-US" dirty="0"/>
               <a:t>按一下以編輯母片文字樣式</a:t>
             </a:r>
+            <a:endParaRPr lang="zh-TW" altLang="en-US" dirty="0"/>
           </a:p>
           <a:p>
             <a:pPr lvl="1"/>
@@ -12157,6 +12186,7 @@
               <a:rPr lang="zh-TW" altLang="en-US" dirty="0"/>
               <a:t>第二層</a:t>
             </a:r>
+            <a:endParaRPr lang="zh-TW" altLang="en-US" dirty="0"/>
           </a:p>
           <a:p>
             <a:pPr lvl="2"/>
@@ -12164,6 +12194,7 @@
               <a:rPr lang="zh-TW" altLang="en-US" dirty="0"/>
               <a:t>第三層</a:t>
             </a:r>
+            <a:endParaRPr lang="zh-TW" altLang="en-US" dirty="0"/>
           </a:p>
           <a:p>
             <a:pPr lvl="3"/>
@@ -12171,6 +12202,7 @@
               <a:rPr lang="zh-TW" altLang="en-US" dirty="0"/>
               <a:t>第四層</a:t>
             </a:r>
+            <a:endParaRPr lang="zh-TW" altLang="en-US" dirty="0"/>
           </a:p>
           <a:p>
             <a:pPr lvl="4"/>
@@ -12178,6 +12210,7 @@
               <a:rPr lang="zh-TW" altLang="en-US" dirty="0"/>
               <a:t>第五層</a:t>
             </a:r>
+            <a:endParaRPr lang="zh-TW" altLang="en-US" dirty="0"/>
           </a:p>
         </p:txBody>
       </p:sp>
@@ -12205,7 +12238,6 @@
             </a:pPr>
             <a:fld id="{01992E49-B35D-4BA4-A4A1-D07A03DA5610}" type="slidenum">
               <a:rPr lang="en-US" altLang="zh-TW"/>
-              <a:t>‹#›</a:t>
             </a:fld>
             <a:endParaRPr lang="en-US" altLang="zh-TW"/>
           </a:p>
@@ -12264,6 +12296,7 @@
               <a:rPr lang="zh-TW" altLang="en-US"/>
               <a:t>按一下以編輯母片標題樣式</a:t>
             </a:r>
+            <a:endParaRPr lang="zh-TW" altLang="en-US"/>
           </a:p>
         </p:txBody>
       </p:sp>
@@ -12329,6 +12362,7 @@
               <a:rPr lang="zh-TW" altLang="en-US"/>
               <a:t>按一下以編輯母片文字樣式</a:t>
             </a:r>
+            <a:endParaRPr lang="zh-TW" altLang="en-US"/>
           </a:p>
         </p:txBody>
       </p:sp>
@@ -12356,7 +12390,6 @@
             </a:pPr>
             <a:fld id="{B7F7D15B-E003-4EB9-A608-239C444D5E90}" type="slidenum">
               <a:rPr lang="en-US" altLang="zh-TW"/>
-              <a:t>‹#›</a:t>
             </a:fld>
             <a:endParaRPr lang="en-US" altLang="zh-TW"/>
           </a:p>
@@ -12406,6 +12439,7 @@
               <a:rPr lang="zh-TW" altLang="en-US"/>
               <a:t>按一下以編輯母片標題樣式</a:t>
             </a:r>
+            <a:endParaRPr lang="zh-TW" altLang="en-US"/>
           </a:p>
         </p:txBody>
       </p:sp>
@@ -12462,6 +12496,7 @@
               <a:rPr lang="zh-TW" altLang="en-US"/>
               <a:t>按一下以編輯母片文字樣式</a:t>
             </a:r>
+            <a:endParaRPr lang="zh-TW" altLang="en-US"/>
           </a:p>
           <a:p>
             <a:pPr lvl="1"/>
@@ -12469,6 +12504,7 @@
               <a:rPr lang="zh-TW" altLang="en-US"/>
               <a:t>第二層</a:t>
             </a:r>
+            <a:endParaRPr lang="zh-TW" altLang="en-US"/>
           </a:p>
           <a:p>
             <a:pPr lvl="2"/>
@@ -12476,6 +12512,7 @@
               <a:rPr lang="zh-TW" altLang="en-US"/>
               <a:t>第三層</a:t>
             </a:r>
+            <a:endParaRPr lang="zh-TW" altLang="en-US"/>
           </a:p>
           <a:p>
             <a:pPr lvl="3"/>
@@ -12483,6 +12520,7 @@
               <a:rPr lang="zh-TW" altLang="en-US"/>
               <a:t>第四層</a:t>
             </a:r>
+            <a:endParaRPr lang="zh-TW" altLang="en-US"/>
           </a:p>
           <a:p>
             <a:pPr lvl="4"/>
@@ -12490,6 +12528,7 @@
               <a:rPr lang="zh-TW" altLang="en-US"/>
               <a:t>第五層</a:t>
             </a:r>
+            <a:endParaRPr lang="zh-TW" altLang="en-US"/>
           </a:p>
         </p:txBody>
       </p:sp>
@@ -12546,6 +12585,7 @@
               <a:rPr lang="zh-TW" altLang="en-US"/>
               <a:t>按一下以編輯母片文字樣式</a:t>
             </a:r>
+            <a:endParaRPr lang="zh-TW" altLang="en-US"/>
           </a:p>
           <a:p>
             <a:pPr lvl="1"/>
@@ -12553,6 +12593,7 @@
               <a:rPr lang="zh-TW" altLang="en-US"/>
               <a:t>第二層</a:t>
             </a:r>
+            <a:endParaRPr lang="zh-TW" altLang="en-US"/>
           </a:p>
           <a:p>
             <a:pPr lvl="2"/>
@@ -12560,6 +12601,7 @@
               <a:rPr lang="zh-TW" altLang="en-US"/>
               <a:t>第三層</a:t>
             </a:r>
+            <a:endParaRPr lang="zh-TW" altLang="en-US"/>
           </a:p>
           <a:p>
             <a:pPr lvl="3"/>
@@ -12567,6 +12609,7 @@
               <a:rPr lang="zh-TW" altLang="en-US"/>
               <a:t>第四層</a:t>
             </a:r>
+            <a:endParaRPr lang="zh-TW" altLang="en-US"/>
           </a:p>
           <a:p>
             <a:pPr lvl="4"/>
@@ -12574,6 +12617,7 @@
               <a:rPr lang="zh-TW" altLang="en-US"/>
               <a:t>第五層</a:t>
             </a:r>
+            <a:endParaRPr lang="zh-TW" altLang="en-US"/>
           </a:p>
         </p:txBody>
       </p:sp>
@@ -12601,7 +12645,6 @@
             </a:pPr>
             <a:fld id="{86BC68BE-B4B0-4564-B8AC-726B6F10D4A3}" type="slidenum">
               <a:rPr lang="en-US" altLang="zh-TW"/>
-              <a:t>‹#›</a:t>
             </a:fld>
             <a:endParaRPr lang="en-US" altLang="zh-TW"/>
           </a:p>
@@ -12651,6 +12694,7 @@
               <a:rPr lang="zh-TW" altLang="en-US"/>
               <a:t>按一下以編輯母片標題樣式</a:t>
             </a:r>
+            <a:endParaRPr lang="zh-TW" altLang="en-US"/>
           </a:p>
         </p:txBody>
       </p:sp>
@@ -12678,7 +12722,6 @@
             </a:pPr>
             <a:fld id="{ED852E88-0254-4B19-81B3-E8664451FBCF}" type="slidenum">
               <a:rPr lang="zh-TW" altLang="en-US"/>
-              <a:t>‹#›</a:t>
             </a:fld>
             <a:endParaRPr lang="en-US" altLang="zh-TW"/>
           </a:p>
@@ -12741,6 +12784,7 @@
               <a:rPr lang="zh-TW" altLang="en-US" dirty="0"/>
               <a:t>按一下以編輯母片標題樣式</a:t>
             </a:r>
+            <a:endParaRPr lang="zh-TW" altLang="en-US" dirty="0"/>
           </a:p>
         </p:txBody>
       </p:sp>
@@ -12806,6 +12850,7 @@
               <a:rPr lang="zh-TW" altLang="en-US"/>
               <a:t>按一下以編輯母片文字樣式</a:t>
             </a:r>
+            <a:endParaRPr lang="zh-TW" altLang="en-US"/>
           </a:p>
         </p:txBody>
       </p:sp>
@@ -12862,6 +12907,7 @@
               <a:rPr lang="zh-TW" altLang="en-US"/>
               <a:t>按一下以編輯母片文字樣式</a:t>
             </a:r>
+            <a:endParaRPr lang="zh-TW" altLang="en-US"/>
           </a:p>
           <a:p>
             <a:pPr lvl="1"/>
@@ -12869,6 +12915,7 @@
               <a:rPr lang="zh-TW" altLang="en-US"/>
               <a:t>第二層</a:t>
             </a:r>
+            <a:endParaRPr lang="zh-TW" altLang="en-US"/>
           </a:p>
           <a:p>
             <a:pPr lvl="2"/>
@@ -12876,6 +12923,7 @@
               <a:rPr lang="zh-TW" altLang="en-US"/>
               <a:t>第三層</a:t>
             </a:r>
+            <a:endParaRPr lang="zh-TW" altLang="en-US"/>
           </a:p>
           <a:p>
             <a:pPr lvl="3"/>
@@ -12883,6 +12931,7 @@
               <a:rPr lang="zh-TW" altLang="en-US"/>
               <a:t>第四層</a:t>
             </a:r>
+            <a:endParaRPr lang="zh-TW" altLang="en-US"/>
           </a:p>
           <a:p>
             <a:pPr lvl="4"/>
@@ -12890,6 +12939,7 @@
               <a:rPr lang="zh-TW" altLang="en-US"/>
               <a:t>第五層</a:t>
             </a:r>
+            <a:endParaRPr lang="zh-TW" altLang="en-US"/>
           </a:p>
         </p:txBody>
       </p:sp>
@@ -12955,6 +13005,7 @@
               <a:rPr lang="zh-TW" altLang="en-US"/>
               <a:t>按一下以編輯母片文字樣式</a:t>
             </a:r>
+            <a:endParaRPr lang="zh-TW" altLang="en-US"/>
           </a:p>
         </p:txBody>
       </p:sp>
@@ -13011,6 +13062,7 @@
               <a:rPr lang="zh-TW" altLang="en-US"/>
               <a:t>按一下以編輯母片文字樣式</a:t>
             </a:r>
+            <a:endParaRPr lang="zh-TW" altLang="en-US"/>
           </a:p>
           <a:p>
             <a:pPr lvl="1"/>
@@ -13018,6 +13070,7 @@
               <a:rPr lang="zh-TW" altLang="en-US"/>
               <a:t>第二層</a:t>
             </a:r>
+            <a:endParaRPr lang="zh-TW" altLang="en-US"/>
           </a:p>
           <a:p>
             <a:pPr lvl="2"/>
@@ -13025,6 +13078,7 @@
               <a:rPr lang="zh-TW" altLang="en-US"/>
               <a:t>第三層</a:t>
             </a:r>
+            <a:endParaRPr lang="zh-TW" altLang="en-US"/>
           </a:p>
           <a:p>
             <a:pPr lvl="3"/>
@@ -13032,6 +13086,7 @@
               <a:rPr lang="zh-TW" altLang="en-US"/>
               <a:t>第四層</a:t>
             </a:r>
+            <a:endParaRPr lang="zh-TW" altLang="en-US"/>
           </a:p>
           <a:p>
             <a:pPr lvl="4"/>
@@ -13039,6 +13094,7 @@
               <a:rPr lang="zh-TW" altLang="en-US"/>
               <a:t>第五層</a:t>
             </a:r>
+            <a:endParaRPr lang="zh-TW" altLang="en-US"/>
           </a:p>
         </p:txBody>
       </p:sp>
@@ -13066,7 +13122,6 @@
             </a:pPr>
             <a:fld id="{338717D7-C8B0-44C5-A62F-3567BF53D398}" type="slidenum">
               <a:rPr lang="en-US" altLang="zh-TW"/>
-              <a:t>‹#›</a:t>
             </a:fld>
             <a:endParaRPr lang="en-US" altLang="zh-TW"/>
           </a:p>
@@ -13116,6 +13171,7 @@
               <a:rPr lang="zh-TW" altLang="en-US"/>
               <a:t>按一下以編輯母片標題樣式</a:t>
             </a:r>
+            <a:endParaRPr lang="zh-TW" altLang="en-US"/>
           </a:p>
         </p:txBody>
       </p:sp>
@@ -13143,7 +13199,6 @@
             </a:pPr>
             <a:fld id="{81FA067D-AD37-4A18-A34B-F0E66789EA77}" type="slidenum">
               <a:rPr lang="en-US" altLang="zh-TW"/>
-              <a:t>‹#›</a:t>
             </a:fld>
             <a:endParaRPr lang="en-US" altLang="zh-TW"/>
           </a:p>
@@ -13198,7 +13253,6 @@
             </a:pPr>
             <a:fld id="{FDA0777A-41B7-4B1E-A08A-E8D847463375}" type="slidenum">
               <a:rPr lang="en-US" altLang="zh-TW"/>
-              <a:t>‹#›</a:t>
             </a:fld>
             <a:endParaRPr lang="en-US" altLang="zh-TW"/>
           </a:p>
@@ -13257,6 +13311,7 @@
               <a:rPr lang="zh-TW" altLang="en-US"/>
               <a:t>按一下以編輯母片標題樣式</a:t>
             </a:r>
+            <a:endParaRPr lang="zh-TW" altLang="en-US"/>
           </a:p>
         </p:txBody>
       </p:sp>
@@ -13313,6 +13368,7 @@
               <a:rPr lang="zh-TW" altLang="en-US"/>
               <a:t>按一下以編輯母片文字樣式</a:t>
             </a:r>
+            <a:endParaRPr lang="zh-TW" altLang="en-US"/>
           </a:p>
           <a:p>
             <a:pPr lvl="1"/>
@@ -13320,6 +13376,7 @@
               <a:rPr lang="zh-TW" altLang="en-US"/>
               <a:t>第二層</a:t>
             </a:r>
+            <a:endParaRPr lang="zh-TW" altLang="en-US"/>
           </a:p>
           <a:p>
             <a:pPr lvl="2"/>
@@ -13327,6 +13384,7 @@
               <a:rPr lang="zh-TW" altLang="en-US"/>
               <a:t>第三層</a:t>
             </a:r>
+            <a:endParaRPr lang="zh-TW" altLang="en-US"/>
           </a:p>
           <a:p>
             <a:pPr lvl="3"/>
@@ -13334,6 +13392,7 @@
               <a:rPr lang="zh-TW" altLang="en-US"/>
               <a:t>第四層</a:t>
             </a:r>
+            <a:endParaRPr lang="zh-TW" altLang="en-US"/>
           </a:p>
           <a:p>
             <a:pPr lvl="4"/>
@@ -13341,6 +13400,7 @@
               <a:rPr lang="zh-TW" altLang="en-US"/>
               <a:t>第五層</a:t>
             </a:r>
+            <a:endParaRPr lang="zh-TW" altLang="en-US"/>
           </a:p>
         </p:txBody>
       </p:sp>
@@ -13406,6 +13466,7 @@
               <a:rPr lang="zh-TW" altLang="en-US"/>
               <a:t>按一下以編輯母片文字樣式</a:t>
             </a:r>
+            <a:endParaRPr lang="zh-TW" altLang="en-US"/>
           </a:p>
         </p:txBody>
       </p:sp>
@@ -13433,7 +13494,6 @@
             </a:pPr>
             <a:fld id="{4F993CA9-BA81-47AA-823D-8B709A5D2C45}" type="slidenum">
               <a:rPr lang="en-US" altLang="zh-TW"/>
-              <a:t>‹#›</a:t>
             </a:fld>
             <a:endParaRPr lang="en-US" altLang="zh-TW"/>
           </a:p>
@@ -13492,6 +13552,7 @@
               <a:rPr lang="zh-TW" altLang="en-US"/>
               <a:t>按一下以編輯母片標題樣式</a:t>
             </a:r>
+            <a:endParaRPr lang="zh-TW" altLang="en-US"/>
           </a:p>
         </p:txBody>
       </p:sp>
@@ -13619,6 +13680,7 @@
               <a:rPr lang="zh-TW" altLang="en-US"/>
               <a:t>按一下以編輯母片文字樣式</a:t>
             </a:r>
+            <a:endParaRPr lang="zh-TW" altLang="en-US"/>
           </a:p>
         </p:txBody>
       </p:sp>
@@ -13646,7 +13708,6 @@
             </a:pPr>
             <a:fld id="{E26ADD22-6B71-41C3-A3B2-EF9911ADB281}" type="slidenum">
               <a:rPr lang="en-US" altLang="zh-TW"/>
-              <a:t>‹#›</a:t>
             </a:fld>
             <a:endParaRPr lang="en-US" altLang="zh-TW"/>
           </a:p>
@@ -13696,6 +13757,7 @@
               <a:rPr lang="zh-TW" altLang="en-US"/>
               <a:t>按一下以編輯母片標題樣式</a:t>
             </a:r>
+            <a:endParaRPr lang="zh-TW" altLang="en-US"/>
           </a:p>
         </p:txBody>
       </p:sp>
@@ -13719,6 +13781,7 @@
               <a:rPr lang="zh-TW" altLang="en-US"/>
               <a:t>按一下以編輯母片文字樣式</a:t>
             </a:r>
+            <a:endParaRPr lang="zh-TW" altLang="en-US"/>
           </a:p>
           <a:p>
             <a:pPr lvl="1"/>
@@ -13726,6 +13789,7 @@
               <a:rPr lang="zh-TW" altLang="en-US"/>
               <a:t>第二層</a:t>
             </a:r>
+            <a:endParaRPr lang="zh-TW" altLang="en-US"/>
           </a:p>
           <a:p>
             <a:pPr lvl="2"/>
@@ -13733,6 +13797,7 @@
               <a:rPr lang="zh-TW" altLang="en-US"/>
               <a:t>第三層</a:t>
             </a:r>
+            <a:endParaRPr lang="zh-TW" altLang="en-US"/>
           </a:p>
           <a:p>
             <a:pPr lvl="3"/>
@@ -13740,6 +13805,7 @@
               <a:rPr lang="zh-TW" altLang="en-US"/>
               <a:t>第四層</a:t>
             </a:r>
+            <a:endParaRPr lang="zh-TW" altLang="en-US"/>
           </a:p>
           <a:p>
             <a:pPr lvl="4"/>
@@ -13747,6 +13813,7 @@
               <a:rPr lang="zh-TW" altLang="en-US"/>
               <a:t>第五層</a:t>
             </a:r>
+            <a:endParaRPr lang="zh-TW" altLang="en-US"/>
           </a:p>
         </p:txBody>
       </p:sp>
@@ -13774,7 +13841,6 @@
             </a:pPr>
             <a:fld id="{F39F7AEA-34EA-4C76-9A47-D6871C043AB0}" type="slidenum">
               <a:rPr lang="en-US" altLang="zh-TW"/>
-              <a:t>‹#›</a:t>
             </a:fld>
             <a:endParaRPr lang="en-US" altLang="zh-TW"/>
           </a:p>
@@ -13829,6 +13895,7 @@
               <a:rPr lang="zh-TW" altLang="en-US"/>
               <a:t>按一下以編輯母片標題樣式</a:t>
             </a:r>
+            <a:endParaRPr lang="zh-TW" altLang="en-US"/>
           </a:p>
         </p:txBody>
       </p:sp>
@@ -13857,6 +13924,7 @@
               <a:rPr lang="zh-TW" altLang="en-US"/>
               <a:t>按一下以編輯母片文字樣式</a:t>
             </a:r>
+            <a:endParaRPr lang="zh-TW" altLang="en-US"/>
           </a:p>
           <a:p>
             <a:pPr lvl="1"/>
@@ -13864,6 +13932,7 @@
               <a:rPr lang="zh-TW" altLang="en-US"/>
               <a:t>第二層</a:t>
             </a:r>
+            <a:endParaRPr lang="zh-TW" altLang="en-US"/>
           </a:p>
           <a:p>
             <a:pPr lvl="2"/>
@@ -13871,6 +13940,7 @@
               <a:rPr lang="zh-TW" altLang="en-US"/>
               <a:t>第三層</a:t>
             </a:r>
+            <a:endParaRPr lang="zh-TW" altLang="en-US"/>
           </a:p>
           <a:p>
             <a:pPr lvl="3"/>
@@ -13878,6 +13948,7 @@
               <a:rPr lang="zh-TW" altLang="en-US"/>
               <a:t>第四層</a:t>
             </a:r>
+            <a:endParaRPr lang="zh-TW" altLang="en-US"/>
           </a:p>
           <a:p>
             <a:pPr lvl="4"/>
@@ -13885,6 +13956,7 @@
               <a:rPr lang="zh-TW" altLang="en-US"/>
               <a:t>第五層</a:t>
             </a:r>
+            <a:endParaRPr lang="zh-TW" altLang="en-US"/>
           </a:p>
         </p:txBody>
       </p:sp>
@@ -13912,7 +13984,6 @@
             </a:pPr>
             <a:fld id="{530654D6-15C0-494A-B753-0640DB25B203}" type="slidenum">
               <a:rPr lang="en-US" altLang="zh-TW"/>
-              <a:t>‹#›</a:t>
             </a:fld>
             <a:endParaRPr lang="en-US" altLang="zh-TW"/>
           </a:p>
@@ -13968,6 +14039,7 @@
               <a:rPr lang="zh-TW" altLang="en-US"/>
               <a:t>按一下以編輯母片文字樣式</a:t>
             </a:r>
+            <a:endParaRPr lang="zh-TW" altLang="en-US"/>
           </a:p>
           <a:p>
             <a:pPr lvl="1"/>
@@ -13975,6 +14047,7 @@
               <a:rPr lang="zh-TW" altLang="en-US"/>
               <a:t>第二層</a:t>
             </a:r>
+            <a:endParaRPr lang="zh-TW" altLang="en-US"/>
           </a:p>
           <a:p>
             <a:pPr lvl="2"/>
@@ -13982,6 +14055,7 @@
               <a:rPr lang="zh-TW" altLang="en-US"/>
               <a:t>第三層</a:t>
             </a:r>
+            <a:endParaRPr lang="zh-TW" altLang="en-US"/>
           </a:p>
           <a:p>
             <a:pPr lvl="3"/>
@@ -13989,6 +14063,7 @@
               <a:rPr lang="zh-TW" altLang="en-US"/>
               <a:t>第四層</a:t>
             </a:r>
+            <a:endParaRPr lang="zh-TW" altLang="en-US"/>
           </a:p>
           <a:p>
             <a:pPr lvl="4"/>
@@ -13996,6 +14071,7 @@
               <a:rPr lang="zh-TW" altLang="en-US"/>
               <a:t>第五層</a:t>
             </a:r>
+            <a:endParaRPr lang="zh-TW" altLang="en-US"/>
           </a:p>
         </p:txBody>
       </p:sp>
@@ -14023,7 +14099,6 @@
             </a:pPr>
             <a:fld id="{B4502D48-BB1D-4132-8A0E-4D78DE52EF59}" type="slidenum">
               <a:rPr lang="en-US" altLang="zh-TW"/>
-              <a:t>‹#›</a:t>
             </a:fld>
             <a:endParaRPr lang="en-US" altLang="zh-TW"/>
           </a:p>
@@ -14078,7 +14153,6 @@
             </a:pPr>
             <a:fld id="{A71697D7-8013-4975-95E3-48F7F3F7499B}" type="slidenum">
               <a:rPr lang="zh-TW" altLang="en-US"/>
-              <a:t>‹#›</a:t>
             </a:fld>
             <a:endParaRPr lang="en-US" altLang="zh-TW"/>
           </a:p>
@@ -14137,6 +14211,7 @@
               <a:rPr lang="zh-TW" altLang="en-US"/>
               <a:t>按一下以編輯母片標題樣式</a:t>
             </a:r>
+            <a:endParaRPr lang="zh-TW" altLang="en-US"/>
           </a:p>
         </p:txBody>
       </p:sp>
@@ -14202,6 +14277,7 @@
               <a:rPr lang="zh-TW" altLang="en-US"/>
               <a:t>按一下以編輯母片文字樣式</a:t>
             </a:r>
+            <a:endParaRPr lang="zh-TW" altLang="en-US"/>
           </a:p>
         </p:txBody>
       </p:sp>
@@ -14229,7 +14305,6 @@
             </a:pPr>
             <a:fld id="{3FEA8A6C-E419-4A2D-A59F-0183255F70EA}" type="slidenum">
               <a:rPr lang="zh-TW" altLang="en-US"/>
-              <a:t>‹#›</a:t>
             </a:fld>
             <a:endParaRPr lang="en-US" altLang="zh-TW"/>
           </a:p>
@@ -14288,6 +14363,7 @@
               <a:rPr lang="zh-TW" altLang="en-US"/>
               <a:t>按一下以編輯母片標題樣式</a:t>
             </a:r>
+            <a:endParaRPr lang="zh-TW" altLang="en-US"/>
           </a:p>
         </p:txBody>
       </p:sp>
@@ -14415,6 +14491,7 @@
               <a:rPr lang="zh-TW" altLang="en-US"/>
               <a:t>按一下以編輯母片文字樣式</a:t>
             </a:r>
+            <a:endParaRPr lang="zh-TW" altLang="en-US"/>
           </a:p>
         </p:txBody>
       </p:sp>
@@ -14442,7 +14519,6 @@
             </a:pPr>
             <a:fld id="{8A8F0E97-51B7-4FFA-9BFC-ED098C10D8ED}" type="slidenum">
               <a:rPr lang="zh-TW" altLang="en-US"/>
-              <a:t>‹#›</a:t>
             </a:fld>
             <a:endParaRPr lang="en-US" altLang="zh-TW"/>
           </a:p>
@@ -14520,7 +14596,6 @@
             </a:pPr>
             <a:fld id="{3F21431A-0C06-4923-9B61-C55D1AEC9577}" type="slidenum">
               <a:rPr lang="zh-TW" altLang="en-US"/>
-              <a:t>‹#›</a:t>
             </a:fld>
             <a:endParaRPr lang="en-US" altLang="zh-TW"/>
           </a:p>
@@ -14570,6 +14645,13 @@
               </a:rPr>
               <a:t>誠信  承諾  創新  合作</a:t>
             </a:r>
+            <a:endParaRPr lang="zh-TW" altLang="en-US" sz="1000">
+              <a:solidFill>
+                <a:schemeClr val="bg2"/>
+              </a:solidFill>
+              <a:latin typeface="標楷體" panose="03000509000000000000" pitchFamily="65" charset="-120"/>
+              <a:ea typeface="標楷體" panose="03000509000000000000" pitchFamily="65" charset="-120"/>
+            </a:endParaRPr>
           </a:p>
         </p:txBody>
       </p:sp>
@@ -14658,7 +14740,7 @@
           <p:nvPr/>
         </p:nvPicPr>
         <p:blipFill>
-          <a:blip r:embed="rId13"/>
+          <a:blip r:embed="rId12"/>
           <a:srcRect/>
           <a:stretch>
             <a:fillRect/>
@@ -14714,6 +14796,7 @@
               <a:rPr lang="zh-TW" altLang="en-US"/>
               <a:t>按一下以編輯母片標題樣式</a:t>
             </a:r>
+            <a:endParaRPr lang="zh-TW" altLang="en-US"/>
           </a:p>
         </p:txBody>
       </p:sp>
@@ -14750,6 +14833,7 @@
               <a:rPr lang="zh-TW" altLang="en-US"/>
               <a:t>按一下以編輯母片</a:t>
             </a:r>
+            <a:endParaRPr lang="zh-TW" altLang="en-US"/>
           </a:p>
           <a:p>
             <a:pPr lvl="1"/>
@@ -14757,6 +14841,7 @@
               <a:rPr lang="zh-TW" altLang="en-US"/>
               <a:t>第二層</a:t>
             </a:r>
+            <a:endParaRPr lang="zh-TW" altLang="en-US"/>
           </a:p>
           <a:p>
             <a:pPr lvl="2"/>
@@ -14764,6 +14849,7 @@
               <a:rPr lang="zh-TW" altLang="en-US"/>
               <a:t>第三層</a:t>
             </a:r>
+            <a:endParaRPr lang="zh-TW" altLang="en-US"/>
           </a:p>
         </p:txBody>
       </p:sp>
@@ -15865,7 +15951,7 @@
           <p:nvPr/>
         </p:nvPicPr>
         <p:blipFill>
-          <a:blip r:embed="rId2">
+          <a:blip r:embed="rId1">
             <a:extLst>
               <a:ext uri="{28A0092B-C50C-407E-A947-70E740481C1C}">
                 <a14:useLocalDpi xmlns:a14="http://schemas.microsoft.com/office/drawing/2010/main" val="0"/>
@@ -15963,7 +16049,6 @@
                   <a:prstClr val="black"/>
                 </a:solidFill>
               </a:rPr>
-              <a:t>‹#›</a:t>
             </a:fld>
             <a:r>
               <a:rPr lang="zh-TW" altLang="en-US">
@@ -16168,6 +16253,7 @@
               <a:rPr lang="zh-TW" altLang="en-US"/>
               <a:t>按一下以編輯母片標題樣式</a:t>
             </a:r>
+            <a:endParaRPr lang="zh-TW" altLang="en-US"/>
           </a:p>
         </p:txBody>
       </p:sp>
@@ -16222,6 +16308,7 @@
               <a:rPr lang="zh-TW" altLang="en-US" dirty="0"/>
               <a:t>按一下以編輯母片</a:t>
             </a:r>
+            <a:endParaRPr lang="zh-TW" altLang="en-US" dirty="0"/>
           </a:p>
           <a:p>
             <a:pPr lvl="1"/>
@@ -16229,6 +16316,7 @@
               <a:rPr lang="zh-TW" altLang="en-US" dirty="0"/>
               <a:t>第二層</a:t>
             </a:r>
+            <a:endParaRPr lang="zh-TW" altLang="en-US" dirty="0"/>
           </a:p>
           <a:p>
             <a:pPr lvl="2"/>
@@ -16236,6 +16324,7 @@
               <a:rPr lang="zh-TW" altLang="en-US" dirty="0"/>
               <a:t>第三層</a:t>
             </a:r>
+            <a:endParaRPr lang="zh-TW" altLang="en-US" dirty="0"/>
           </a:p>
         </p:txBody>
       </p:sp>
@@ -16417,6 +16506,13 @@
               </a:rPr>
               <a:t>誠信  承諾  創新  合作</a:t>
             </a:r>
+            <a:endParaRPr lang="zh-TW" altLang="en-US" sz="975" b="1" dirty="0">
+              <a:solidFill>
+                <a:srgbClr val="808080"/>
+              </a:solidFill>
+              <a:latin typeface="微軟正黑體" panose="020B0604030504040204" pitchFamily="34" charset="-120"/>
+              <a:ea typeface="微軟正黑體" panose="020B0604030504040204" pitchFamily="34" charset="-120"/>
+            </a:endParaRPr>
           </a:p>
         </p:txBody>
       </p:sp>
@@ -16855,7 +16951,7 @@
           <p:nvPr/>
         </p:nvPicPr>
         <p:blipFill>
-          <a:blip r:embed="rId2">
+          <a:blip r:embed="rId1">
             <a:extLst>
               <a:ext uri="{28A0092B-C50C-407E-A947-70E740481C1C}">
                 <a14:useLocalDpi xmlns:a14="http://schemas.microsoft.com/office/drawing/2010/main" val="0"/>
@@ -16953,7 +17049,6 @@
                   <a:prstClr val="black"/>
                 </a:solidFill>
               </a:rPr>
-              <a:t>‹#›</a:t>
             </a:fld>
             <a:r>
               <a:rPr lang="zh-TW" altLang="en-US">
@@ -17158,6 +17253,7 @@
               <a:rPr lang="zh-TW" altLang="en-US"/>
               <a:t>按一下以編輯母片標題樣式</a:t>
             </a:r>
+            <a:endParaRPr lang="zh-TW" altLang="en-US"/>
           </a:p>
         </p:txBody>
       </p:sp>
@@ -17212,6 +17308,7 @@
               <a:rPr lang="zh-TW" altLang="en-US" dirty="0"/>
               <a:t>按一下以編輯母片</a:t>
             </a:r>
+            <a:endParaRPr lang="zh-TW" altLang="en-US" dirty="0"/>
           </a:p>
           <a:p>
             <a:pPr lvl="1"/>
@@ -17219,6 +17316,7 @@
               <a:rPr lang="zh-TW" altLang="en-US" dirty="0"/>
               <a:t>第二層</a:t>
             </a:r>
+            <a:endParaRPr lang="zh-TW" altLang="en-US" dirty="0"/>
           </a:p>
           <a:p>
             <a:pPr lvl="2"/>
@@ -17226,6 +17324,7 @@
               <a:rPr lang="zh-TW" altLang="en-US" dirty="0"/>
               <a:t>第三層</a:t>
             </a:r>
+            <a:endParaRPr lang="zh-TW" altLang="en-US" dirty="0"/>
           </a:p>
         </p:txBody>
       </p:sp>
@@ -17407,6 +17506,13 @@
               </a:rPr>
               <a:t>誠信  承諾  創新  合作</a:t>
             </a:r>
+            <a:endParaRPr lang="zh-TW" altLang="en-US" sz="975" b="1" dirty="0">
+              <a:solidFill>
+                <a:srgbClr val="808080"/>
+              </a:solidFill>
+              <a:latin typeface="微軟正黑體" panose="020B0604030504040204" pitchFamily="34" charset="-120"/>
+              <a:ea typeface="微軟正黑體" panose="020B0604030504040204" pitchFamily="34" charset="-120"/>
+            </a:endParaRPr>
           </a:p>
         </p:txBody>
       </p:sp>
@@ -17903,7 +18009,6 @@
                 </a:solidFill>
                 <a:ea typeface="新細明體" panose="02020500000000000000" charset="-120"/>
               </a:rPr>
-              <a:t>‹#›</a:t>
             </a:fld>
             <a:endParaRPr lang="en-US" altLang="zh-TW">
               <a:solidFill>
@@ -17985,6 +18090,13 @@
               </a:rPr>
               <a:t>誠信  承諾  創新  合作</a:t>
             </a:r>
+            <a:endParaRPr lang="zh-TW" altLang="en-US" sz="1000">
+              <a:solidFill>
+                <a:srgbClr val="808080"/>
+              </a:solidFill>
+              <a:latin typeface="標楷體" panose="03000509000000000000" pitchFamily="65" charset="-120"/>
+              <a:ea typeface="標楷體" panose="03000509000000000000" pitchFamily="65" charset="-120"/>
+            </a:endParaRPr>
           </a:p>
         </p:txBody>
       </p:sp>
@@ -18105,7 +18217,7 @@
           <p:nvPr/>
         </p:nvPicPr>
         <p:blipFill>
-          <a:blip r:embed="rId13">
+          <a:blip r:embed="rId12">
             <a:extLst>
               <a:ext uri="{28A0092B-C50C-407E-A947-70E740481C1C}">
                 <a14:useLocalDpi xmlns:a14="http://schemas.microsoft.com/office/drawing/2010/main" val="0"/>
@@ -18198,6 +18310,7 @@
               <a:rPr lang="zh-TW" altLang="en-US"/>
               <a:t>按一下以編輯母片標題樣式</a:t>
             </a:r>
+            <a:endParaRPr lang="zh-TW" altLang="en-US"/>
           </a:p>
         </p:txBody>
       </p:sp>
@@ -18262,6 +18375,7 @@
               <a:rPr lang="zh-TW" altLang="en-US"/>
               <a:t>按一下以編輯母片</a:t>
             </a:r>
+            <a:endParaRPr lang="zh-TW" altLang="en-US"/>
           </a:p>
           <a:p>
             <a:pPr lvl="1"/>
@@ -18269,6 +18383,7 @@
               <a:rPr lang="zh-TW" altLang="en-US"/>
               <a:t>第二層</a:t>
             </a:r>
+            <a:endParaRPr lang="zh-TW" altLang="en-US"/>
           </a:p>
           <a:p>
             <a:pPr lvl="2"/>
@@ -18276,6 +18391,7 @@
               <a:rPr lang="zh-TW" altLang="en-US"/>
               <a:t>第三層</a:t>
             </a:r>
+            <a:endParaRPr lang="zh-TW" altLang="en-US"/>
           </a:p>
         </p:txBody>
       </p:sp>
@@ -19394,6 +19510,7 @@
               <a:rPr lang="zh-TW" altLang="en-US"/>
               <a:t>按一下以編輯母片標題樣式</a:t>
             </a:r>
+            <a:endParaRPr lang="zh-TW" altLang="en-US"/>
           </a:p>
         </p:txBody>
       </p:sp>
@@ -19427,6 +19544,7 @@
               <a:rPr lang="zh-TW" altLang="en-US"/>
               <a:t>按一下以編輯母片文字樣式</a:t>
             </a:r>
+            <a:endParaRPr lang="zh-TW" altLang="en-US"/>
           </a:p>
           <a:p>
             <a:pPr lvl="1"/>
@@ -19434,6 +19552,7 @@
               <a:rPr lang="zh-TW" altLang="en-US"/>
               <a:t>第二層</a:t>
             </a:r>
+            <a:endParaRPr lang="zh-TW" altLang="en-US"/>
           </a:p>
           <a:p>
             <a:pPr lvl="2"/>
@@ -19441,6 +19560,7 @@
               <a:rPr lang="zh-TW" altLang="en-US"/>
               <a:t>第三層</a:t>
             </a:r>
+            <a:endParaRPr lang="zh-TW" altLang="en-US"/>
           </a:p>
           <a:p>
             <a:pPr lvl="3"/>
@@ -19448,6 +19568,7 @@
               <a:rPr lang="zh-TW" altLang="en-US"/>
               <a:t>第四層</a:t>
             </a:r>
+            <a:endParaRPr lang="zh-TW" altLang="en-US"/>
           </a:p>
           <a:p>
             <a:pPr lvl="4"/>
@@ -19455,6 +19576,7 @@
               <a:rPr lang="zh-TW" altLang="en-US"/>
               <a:t>第五層</a:t>
             </a:r>
+            <a:endParaRPr lang="zh-TW" altLang="en-US"/>
           </a:p>
         </p:txBody>
       </p:sp>
@@ -19493,7 +19615,6 @@
           <a:p>
             <a:fld id="{388997FB-EFBE-4ED6-A43F-DDA1512FD57C}" type="datetimeFigureOut">
               <a:rPr lang="zh-TW" altLang="en-US" smtClean="0"/>
-              <a:t>2026/4/24</a:t>
             </a:fld>
             <a:endParaRPr lang="zh-TW" altLang="en-US"/>
           </a:p>
@@ -19571,7 +19692,6 @@
           <a:p>
             <a:fld id="{13C0E97A-62D1-41C7-936F-199E295F9AB2}" type="slidenum">
               <a:rPr lang="zh-TW" altLang="en-US" smtClean="0"/>
-              <a:t>‹#›</a:t>
             </a:fld>
             <a:endParaRPr lang="zh-TW" altLang="en-US"/>
           </a:p>
@@ -19914,7 +20034,6 @@
                   <a:srgbClr val="000000"/>
                 </a:solidFill>
               </a:rPr>
-              <a:t>‹#›</a:t>
             </a:fld>
             <a:endParaRPr lang="en-US" altLang="zh-TW">
               <a:solidFill>
@@ -19968,6 +20087,13 @@
               </a:rPr>
               <a:t>誠信  承諾  創新  合作</a:t>
             </a:r>
+            <a:endParaRPr lang="zh-TW" altLang="en-US" sz="1000">
+              <a:solidFill>
+                <a:srgbClr val="808080"/>
+              </a:solidFill>
+              <a:latin typeface="標楷體" panose="03000509000000000000" pitchFamily="65" charset="-120"/>
+              <a:ea typeface="標楷體" panose="03000509000000000000" pitchFamily="65" charset="-120"/>
+            </a:endParaRPr>
           </a:p>
         </p:txBody>
       </p:sp>
@@ -20062,7 +20188,7 @@
           <p:nvPr/>
         </p:nvPicPr>
         <p:blipFill>
-          <a:blip r:embed="rId13"/>
+          <a:blip r:embed="rId12"/>
           <a:srcRect/>
           <a:stretch>
             <a:fillRect/>
@@ -20118,6 +20244,7 @@
               <a:rPr lang="zh-TW" altLang="en-US"/>
               <a:t>按一下以編輯母片標題樣式</a:t>
             </a:r>
+            <a:endParaRPr lang="zh-TW" altLang="en-US"/>
           </a:p>
         </p:txBody>
       </p:sp>
@@ -20154,6 +20281,7 @@
               <a:rPr lang="zh-TW" altLang="en-US"/>
               <a:t>按一下以編輯母片</a:t>
             </a:r>
+            <a:endParaRPr lang="zh-TW" altLang="en-US"/>
           </a:p>
           <a:p>
             <a:pPr lvl="1"/>
@@ -20161,6 +20289,7 @@
               <a:rPr lang="zh-TW" altLang="en-US"/>
               <a:t>第二層</a:t>
             </a:r>
+            <a:endParaRPr lang="zh-TW" altLang="en-US"/>
           </a:p>
           <a:p>
             <a:pPr lvl="2"/>
@@ -20168,6 +20297,7 @@
               <a:rPr lang="zh-TW" altLang="en-US"/>
               <a:t>第三層</a:t>
             </a:r>
+            <a:endParaRPr lang="zh-TW" altLang="en-US"/>
           </a:p>
         </p:txBody>
       </p:sp>
@@ -21286,6 +21416,7 @@
               <a:rPr lang="zh-TW" altLang="en-US"/>
               <a:t>按一下以編輯母片標題樣式</a:t>
             </a:r>
+            <a:endParaRPr lang="zh-TW" altLang="en-US"/>
           </a:p>
         </p:txBody>
       </p:sp>
@@ -21319,6 +21450,7 @@
               <a:rPr lang="zh-TW" altLang="en-US"/>
               <a:t>按一下以編輯母片文字樣式</a:t>
             </a:r>
+            <a:endParaRPr lang="zh-TW" altLang="en-US"/>
           </a:p>
           <a:p>
             <a:pPr lvl="1"/>
@@ -21326,6 +21458,7 @@
               <a:rPr lang="zh-TW" altLang="en-US"/>
               <a:t>第二層</a:t>
             </a:r>
+            <a:endParaRPr lang="zh-TW" altLang="en-US"/>
           </a:p>
           <a:p>
             <a:pPr lvl="2"/>
@@ -21333,6 +21466,7 @@
               <a:rPr lang="zh-TW" altLang="en-US"/>
               <a:t>第三層</a:t>
             </a:r>
+            <a:endParaRPr lang="zh-TW" altLang="en-US"/>
           </a:p>
           <a:p>
             <a:pPr lvl="3"/>
@@ -21340,6 +21474,7 @@
               <a:rPr lang="zh-TW" altLang="en-US"/>
               <a:t>第四層</a:t>
             </a:r>
+            <a:endParaRPr lang="zh-TW" altLang="en-US"/>
           </a:p>
           <a:p>
             <a:pPr lvl="4"/>
@@ -21347,6 +21482,7 @@
               <a:rPr lang="zh-TW" altLang="en-US"/>
               <a:t>第五層</a:t>
             </a:r>
+            <a:endParaRPr lang="zh-TW" altLang="en-US"/>
           </a:p>
         </p:txBody>
       </p:sp>
@@ -21385,7 +21521,6 @@
           <a:p>
             <a:fld id="{79EFF09E-4EA0-4518-A9E8-449DE34F8B74}" type="datetimeFigureOut">
               <a:rPr lang="zh-TW" altLang="en-US" smtClean="0"/>
-              <a:t>2026/4/24</a:t>
             </a:fld>
             <a:endParaRPr lang="zh-TW" altLang="en-US"/>
           </a:p>
@@ -21463,7 +21598,6 @@
           <a:p>
             <a:fld id="{9C4C9021-A16D-4E5C-A421-A5275F523D45}" type="slidenum">
               <a:rPr lang="zh-TW" altLang="en-US" smtClean="0"/>
-              <a:t>‹#›</a:t>
             </a:fld>
             <a:endParaRPr lang="zh-TW" altLang="en-US"/>
           </a:p>
@@ -21772,7 +21906,7 @@
           <p:nvPr/>
         </p:nvPicPr>
         <p:blipFill>
-          <a:blip r:embed="rId2">
+          <a:blip r:embed="rId1">
             <a:extLst>
               <a:ext uri="{28A0092B-C50C-407E-A947-70E740481C1C}">
                 <a14:useLocalDpi xmlns:a14="http://schemas.microsoft.com/office/drawing/2010/main" val="0"/>
@@ -21873,7 +22007,6 @@
                   <a:prstClr val="black"/>
                 </a:solidFill>
               </a:rPr>
-              <a:t>‹#›</a:t>
             </a:fld>
             <a:r>
               <a:rPr lang="zh-TW" altLang="en-US">
@@ -22078,6 +22211,7 @@
               <a:rPr lang="zh-TW" altLang="en-US"/>
               <a:t>按一下以編輯母片標題樣式</a:t>
             </a:r>
+            <a:endParaRPr lang="zh-TW" altLang="en-US"/>
           </a:p>
         </p:txBody>
       </p:sp>
@@ -22132,6 +22266,7 @@
               <a:rPr lang="zh-TW" altLang="en-US" dirty="0"/>
               <a:t>按一下以編輯母片</a:t>
             </a:r>
+            <a:endParaRPr lang="zh-TW" altLang="en-US" dirty="0"/>
           </a:p>
           <a:p>
             <a:pPr lvl="1"/>
@@ -22139,6 +22274,7 @@
               <a:rPr lang="zh-TW" altLang="en-US" dirty="0"/>
               <a:t>第二層</a:t>
             </a:r>
+            <a:endParaRPr lang="zh-TW" altLang="en-US" dirty="0"/>
           </a:p>
           <a:p>
             <a:pPr lvl="2"/>
@@ -22146,6 +22282,7 @@
               <a:rPr lang="zh-TW" altLang="en-US" dirty="0"/>
               <a:t>第三層</a:t>
             </a:r>
+            <a:endParaRPr lang="zh-TW" altLang="en-US" dirty="0"/>
           </a:p>
         </p:txBody>
       </p:sp>
@@ -22327,6 +22464,13 @@
               </a:rPr>
               <a:t>誠信  承諾  創新  合作</a:t>
             </a:r>
+            <a:endParaRPr lang="zh-TW" altLang="en-US" sz="975" b="1" dirty="0">
+              <a:solidFill>
+                <a:srgbClr val="808080"/>
+              </a:solidFill>
+              <a:latin typeface="微軟正黑體" panose="020B0604030504040204" pitchFamily="34" charset="-120"/>
+              <a:ea typeface="微軟正黑體" panose="020B0604030504040204" pitchFamily="34" charset="-120"/>
+            </a:endParaRPr>
           </a:p>
         </p:txBody>
       </p:sp>
@@ -22827,7 +22971,6 @@
             </a:pPr>
             <a:fld id="{A9CD9766-93A3-4E76-9B20-A4D620225CC1}" type="slidenum">
               <a:rPr lang="en-US" altLang="zh-TW"/>
-              <a:t>‹#›</a:t>
             </a:fld>
             <a:endParaRPr lang="en-US" altLang="zh-TW" dirty="0"/>
           </a:p>
@@ -23007,6 +23150,12 @@
               </a:rPr>
               <a:t>誠信  承諾  創新  合作</a:t>
             </a:r>
+            <a:endParaRPr lang="zh-TW" altLang="en-US" sz="1000">
+              <a:solidFill>
+                <a:schemeClr val="bg2"/>
+              </a:solidFill>
+              <a:latin typeface="標楷體" panose="03000509000000000000" pitchFamily="65" charset="-120"/>
+            </a:endParaRPr>
           </a:p>
         </p:txBody>
       </p:sp>
@@ -23117,7 +23266,7 @@
           <p:nvPr/>
         </p:nvPicPr>
         <p:blipFill>
-          <a:blip r:embed="rId14" cstate="print">
+          <a:blip r:embed="rId13" cstate="print">
             <a:extLst>
               <a:ext uri="{28A0092B-C50C-407E-A947-70E740481C1C}">
                 <a14:useLocalDpi xmlns:a14="http://schemas.microsoft.com/office/drawing/2010/main" val="0"/>
@@ -23223,6 +23372,7 @@
               <a:rPr lang="zh-TW" altLang="en-US" dirty="0"/>
               <a:t>按一下以編輯母片標題樣式</a:t>
             </a:r>
+            <a:endParaRPr lang="zh-TW" altLang="en-US" dirty="0"/>
           </a:p>
         </p:txBody>
       </p:sp>
@@ -23287,6 +23437,7 @@
               <a:rPr lang="zh-TW" altLang="en-US" dirty="0"/>
               <a:t>按一下以編輯母片</a:t>
             </a:r>
+            <a:endParaRPr lang="zh-TW" altLang="en-US" dirty="0"/>
           </a:p>
           <a:p>
             <a:pPr lvl="1"/>
@@ -23294,6 +23445,7 @@
               <a:rPr lang="zh-TW" altLang="en-US" dirty="0"/>
               <a:t>第二層</a:t>
             </a:r>
+            <a:endParaRPr lang="zh-TW" altLang="en-US" dirty="0"/>
           </a:p>
           <a:p>
             <a:pPr lvl="2"/>
@@ -23301,6 +23453,7 @@
               <a:rPr lang="zh-TW" altLang="en-US" dirty="0"/>
               <a:t>第三層</a:t>
             </a:r>
+            <a:endParaRPr lang="zh-TW" altLang="en-US" dirty="0"/>
           </a:p>
         </p:txBody>
       </p:sp>
@@ -23755,7 +23908,7 @@
           <p:nvPr/>
         </p:nvPicPr>
         <p:blipFill>
-          <a:blip r:embed="rId2">
+          <a:blip r:embed="rId1">
             <a:extLst>
               <a:ext uri="{28A0092B-C50C-407E-A947-70E740481C1C}">
                 <a14:useLocalDpi xmlns:a14="http://schemas.microsoft.com/office/drawing/2010/main" val="0"/>
@@ -23853,7 +24006,6 @@
                   <a:prstClr val="black"/>
                 </a:solidFill>
               </a:rPr>
-              <a:t>‹#›</a:t>
             </a:fld>
             <a:r>
               <a:rPr lang="zh-TW" altLang="en-US">
@@ -24058,6 +24210,7 @@
               <a:rPr lang="zh-TW" altLang="en-US"/>
               <a:t>按一下以編輯母片標題樣式</a:t>
             </a:r>
+            <a:endParaRPr lang="zh-TW" altLang="en-US"/>
           </a:p>
         </p:txBody>
       </p:sp>
@@ -24112,6 +24265,7 @@
               <a:rPr lang="zh-TW" altLang="en-US" dirty="0"/>
               <a:t>按一下以編輯母片</a:t>
             </a:r>
+            <a:endParaRPr lang="zh-TW" altLang="en-US" dirty="0"/>
           </a:p>
           <a:p>
             <a:pPr lvl="1"/>
@@ -24119,6 +24273,7 @@
               <a:rPr lang="zh-TW" altLang="en-US" dirty="0"/>
               <a:t>第二層</a:t>
             </a:r>
+            <a:endParaRPr lang="zh-TW" altLang="en-US" dirty="0"/>
           </a:p>
           <a:p>
             <a:pPr lvl="2"/>
@@ -24126,6 +24281,7 @@
               <a:rPr lang="zh-TW" altLang="en-US" dirty="0"/>
               <a:t>第三層</a:t>
             </a:r>
+            <a:endParaRPr lang="zh-TW" altLang="en-US" dirty="0"/>
           </a:p>
         </p:txBody>
       </p:sp>
@@ -24307,6 +24463,13 @@
               </a:rPr>
               <a:t>誠信  承諾  創新  合作</a:t>
             </a:r>
+            <a:endParaRPr lang="zh-TW" altLang="en-US" sz="975" b="1" dirty="0">
+              <a:solidFill>
+                <a:srgbClr val="808080"/>
+              </a:solidFill>
+              <a:latin typeface="微軟正黑體" panose="020B0604030504040204" pitchFamily="34" charset="-120"/>
+              <a:ea typeface="微軟正黑體" panose="020B0604030504040204" pitchFamily="34" charset="-120"/>
+            </a:endParaRPr>
           </a:p>
         </p:txBody>
       </p:sp>
@@ -24745,7 +24908,7 @@
           <p:nvPr/>
         </p:nvPicPr>
         <p:blipFill>
-          <a:blip r:embed="rId2">
+          <a:blip r:embed="rId1">
             <a:extLst>
               <a:ext uri="{28A0092B-C50C-407E-A947-70E740481C1C}">
                 <a14:useLocalDpi xmlns:a14="http://schemas.microsoft.com/office/drawing/2010/main" val="0"/>
@@ -24843,7 +25006,6 @@
                   <a:prstClr val="black"/>
                 </a:solidFill>
               </a:rPr>
-              <a:t>‹#›</a:t>
             </a:fld>
             <a:r>
               <a:rPr lang="zh-TW" altLang="en-US">
@@ -25048,6 +25210,7 @@
               <a:rPr lang="zh-TW" altLang="en-US"/>
               <a:t>按一下以編輯母片標題樣式</a:t>
             </a:r>
+            <a:endParaRPr lang="zh-TW" altLang="en-US"/>
           </a:p>
         </p:txBody>
       </p:sp>
@@ -25102,6 +25265,7 @@
               <a:rPr lang="zh-TW" altLang="en-US" dirty="0"/>
               <a:t>按一下以編輯母片</a:t>
             </a:r>
+            <a:endParaRPr lang="zh-TW" altLang="en-US" dirty="0"/>
           </a:p>
           <a:p>
             <a:pPr lvl="1"/>
@@ -25109,6 +25273,7 @@
               <a:rPr lang="zh-TW" altLang="en-US" dirty="0"/>
               <a:t>第二層</a:t>
             </a:r>
+            <a:endParaRPr lang="zh-TW" altLang="en-US" dirty="0"/>
           </a:p>
           <a:p>
             <a:pPr lvl="2"/>
@@ -25116,6 +25281,7 @@
               <a:rPr lang="zh-TW" altLang="en-US" dirty="0"/>
               <a:t>第三層</a:t>
             </a:r>
+            <a:endParaRPr lang="zh-TW" altLang="en-US" dirty="0"/>
           </a:p>
         </p:txBody>
       </p:sp>
@@ -25297,6 +25463,13 @@
               </a:rPr>
               <a:t>誠信  承諾  創新  合作</a:t>
             </a:r>
+            <a:endParaRPr lang="zh-TW" altLang="en-US" sz="975" b="1" dirty="0">
+              <a:solidFill>
+                <a:srgbClr val="808080"/>
+              </a:solidFill>
+              <a:latin typeface="微軟正黑體" panose="020B0604030504040204" pitchFamily="34" charset="-120"/>
+              <a:ea typeface="微軟正黑體" panose="020B0604030504040204" pitchFamily="34" charset="-120"/>
+            </a:endParaRPr>
           </a:p>
         </p:txBody>
       </p:sp>
@@ -25745,8 +25918,9 @@
             </a:r>
             <a:r>
               <a:rPr lang="en-US" altLang="zh-TW" sz="2500" dirty="0"/>
-              <a:t>TWD IRS Pay 6s, rec 2y</a:t>
-            </a:r>
+              <a:t>TWD IRS pay 6s, rec 2y</a:t>
+            </a:r>
+            <a:endParaRPr lang="en-US" altLang="zh-TW" sz="2500" dirty="0"/>
           </a:p>
         </p:txBody>
       </p:sp>
@@ -25762,7 +25936,7 @@
         </p:nvSpPr>
         <p:spPr>
           <a:xfrm>
-            <a:off x="534194" y="1412776"/>
+            <a:off x="534829" y="1412776"/>
             <a:ext cx="8075612" cy="3168352"/>
           </a:xfrm>
         </p:spPr>
@@ -25797,7 +25971,7 @@
         <p:spPr>
           <a:xfrm>
             <a:off x="226060" y="967135"/>
-            <a:ext cx="8460740" cy="332851"/>
+            <a:ext cx="8460740" cy="369267"/>
           </a:xfrm>
           <a:prstGeom prst="roundRect">
             <a:avLst/>
@@ -25829,55 +26003,22 @@
               <a:defRPr/>
             </a:pPr>
             <a:r>
-              <a:rPr kumimoji="0" lang="zh-TW" altLang="en-US" sz="1400" b="1" dirty="0">
+              <a:rPr kumimoji="0" lang="zh-TW" altLang="en-US" sz="1600" b="1" dirty="0">
                 <a:solidFill>
                   <a:srgbClr val="FFFFFF"/>
                 </a:solidFill>
                 <a:latin typeface="微軟正黑體" panose="020B0604030504040204" pitchFamily="34" charset="-120"/>
                 <a:ea typeface="微軟正黑體" panose="020B0604030504040204" pitchFamily="34" charset="-120"/>
               </a:rPr>
-              <a:t>根據</a:t>
-            </a:r>
-            <a:r>
-              <a:rPr kumimoji="0" lang="en-US" altLang="zh-TW" sz="1400" b="1" dirty="0">
-                <a:solidFill>
-                  <a:srgbClr val="FFFFFF"/>
-                </a:solidFill>
-                <a:latin typeface="微軟正黑體" panose="020B0604030504040204" pitchFamily="34" charset="-120"/>
-                <a:ea typeface="微軟正黑體" panose="020B0604030504040204" pitchFamily="34" charset="-120"/>
-              </a:rPr>
-              <a:t>2/10</a:t>
-            </a:r>
-            <a:r>
-              <a:rPr kumimoji="0" lang="zh-TW" altLang="en-US" sz="1400" b="1" dirty="0">
-                <a:solidFill>
-                  <a:srgbClr val="FFFFFF"/>
-                </a:solidFill>
-                <a:latin typeface="微軟正黑體" panose="020B0604030504040204" pitchFamily="34" charset="-120"/>
-                <a:ea typeface="微軟正黑體" panose="020B0604030504040204" pitchFamily="34" charset="-120"/>
-              </a:rPr>
-              <a:t>公布的中國央行</a:t>
-            </a:r>
-            <a:r>
-              <a:rPr kumimoji="0" lang="en-US" altLang="zh-TW" sz="1400" b="1" dirty="0">
-                <a:solidFill>
-                  <a:srgbClr val="FFFFFF"/>
-                </a:solidFill>
-                <a:latin typeface="微軟正黑體" panose="020B0604030504040204" pitchFamily="34" charset="-120"/>
-                <a:ea typeface="微軟正黑體" panose="020B0604030504040204" pitchFamily="34" charset="-120"/>
-              </a:rPr>
-              <a:t>2025Q4</a:t>
-            </a:r>
-            <a:r>
-              <a:rPr kumimoji="0" lang="zh-TW" altLang="en-US" sz="1400" b="1" dirty="0">
-                <a:solidFill>
-                  <a:srgbClr val="FFFFFF"/>
-                </a:solidFill>
-                <a:latin typeface="微軟正黑體" panose="020B0604030504040204" pitchFamily="34" charset="-120"/>
-                <a:ea typeface="微軟正黑體" panose="020B0604030504040204" pitchFamily="34" charset="-120"/>
-              </a:rPr>
-              <a:t>貨幣政策執行報告，認為今年降息時間將比目前市場定價晚</a:t>
-            </a:r>
+              <a:t>認為央行貨幣政策最終不如市場預期激進</a:t>
+            </a:r>
+            <a:endParaRPr kumimoji="0" lang="zh-TW" altLang="en-US" sz="1600" b="1" dirty="0">
+              <a:solidFill>
+                <a:srgbClr val="FFFFFF"/>
+              </a:solidFill>
+              <a:latin typeface="微軟正黑體" panose="020B0604030504040204" pitchFamily="34" charset="-120"/>
+              <a:ea typeface="微軟正黑體" panose="020B0604030504040204" pitchFamily="34" charset="-120"/>
+            </a:endParaRPr>
           </a:p>
         </p:txBody>
       </p:sp>
@@ -26074,288 +26215,203 @@
                 <a:latin typeface="+mj-ea"/>
                 <a:ea typeface="+mj-ea"/>
               </a:rPr>
-              <a:t>主流觀點</a:t>
+              <a:t>楊金龍：預防可能的</a:t>
+            </a:r>
+            <a:r>
+              <a:rPr lang="zh-TW" altLang="en-US" sz="2000" dirty="0">
+                <a:latin typeface="+mj-ea"/>
+                <a:ea typeface="+mj-ea"/>
+              </a:rPr>
+              <a:t>通膨預期，貨幣政策朝緊縮方向走，關鍵在第二季</a:t>
+            </a:r>
+            <a:endParaRPr lang="zh-TW" altLang="en-US" sz="2000" dirty="0">
+              <a:latin typeface="+mj-ea"/>
+              <a:ea typeface="+mj-ea"/>
+            </a:endParaRPr>
+          </a:p>
+          <a:p>
+            <a:pPr marL="0" indent="0">
+              <a:buNone/>
+            </a:pPr>
+            <a:r>
+              <a:rPr lang="zh-TW" altLang="en-US" sz="2000" dirty="0">
+                <a:latin typeface="+mj-ea"/>
+                <a:ea typeface="+mj-ea"/>
+              </a:rPr>
+              <a:t>      →</a:t>
             </a:r>
             <a:r>
               <a:rPr lang="en-US" altLang="zh-TW" sz="2000" dirty="0">
                 <a:latin typeface="+mj-ea"/>
                 <a:ea typeface="+mj-ea"/>
               </a:rPr>
-              <a:t>: Q1-Q2</a:t>
+              <a:t>Pay 6s IRS</a:t>
             </a:r>
             <a:r>
               <a:rPr lang="zh-TW" altLang="en-US" sz="2000" dirty="0">
                 <a:latin typeface="+mj-ea"/>
                 <a:ea typeface="+mj-ea"/>
               </a:rPr>
-              <a:t>調降政策利率</a:t>
+              <a:t>預防央行預防性升息</a:t>
+            </a:r>
+            <a:endParaRPr lang="zh-TW" altLang="en-US" sz="2000" dirty="0">
+              <a:latin typeface="+mj-ea"/>
+              <a:ea typeface="+mj-ea"/>
+            </a:endParaRPr>
+          </a:p>
+          <a:p>
+            <a:endParaRPr lang="zh-TW" altLang="en-US" sz="1000" dirty="0">
+              <a:latin typeface="+mj-ea"/>
+              <a:ea typeface="+mj-ea"/>
+            </a:endParaRPr>
+          </a:p>
+          <a:p>
+            <a:r>
+              <a:rPr lang="zh-TW" altLang="en-US" sz="2000" dirty="0">
+                <a:latin typeface="+mj-ea"/>
+                <a:ea typeface="+mj-ea"/>
+              </a:rPr>
+              <a:t>但</a:t>
             </a:r>
             <a:r>
               <a:rPr lang="en-US" altLang="zh-TW" sz="2000" dirty="0">
                 <a:latin typeface="+mj-ea"/>
                 <a:ea typeface="+mj-ea"/>
               </a:rPr>
-              <a:t>(7D OMO)10bps; </a:t>
+              <a:t>2Y IRS</a:t>
             </a:r>
             <a:r>
               <a:rPr lang="zh-TW" altLang="en-US" sz="2000" dirty="0">
                 <a:latin typeface="+mj-ea"/>
                 <a:ea typeface="+mj-ea"/>
               </a:rPr>
-              <a:t>全年</a:t>
+              <a:t>隱含未來升息路徑過於激進</a:t>
+            </a:r>
+            <a:endParaRPr lang="zh-TW" altLang="en-US" sz="2000" dirty="0">
+              <a:latin typeface="+mj-ea"/>
+              <a:ea typeface="+mj-ea"/>
+            </a:endParaRPr>
+          </a:p>
+          <a:p>
+            <a:pPr marL="0" indent="0">
+              <a:buNone/>
+            </a:pPr>
+            <a:r>
+              <a:rPr lang="zh-TW" altLang="en-US" sz="2000" dirty="0">
+                <a:latin typeface="+mj-ea"/>
+                <a:ea typeface="+mj-ea"/>
+              </a:rPr>
+              <a:t>      →央行</a:t>
+            </a:r>
+            <a:r>
+              <a:rPr lang="zh-TW" altLang="en-US" sz="2000" dirty="0">
+                <a:latin typeface="+mj-ea"/>
+                <a:ea typeface="+mj-ea"/>
+              </a:rPr>
+              <a:t>管控輸入性通膨：</a:t>
+            </a:r>
+            <a:r>
+              <a:rPr lang="zh-TW" altLang="en-US" sz="2000" dirty="0">
+                <a:latin typeface="+mj-ea"/>
+                <a:ea typeface="+mj-ea"/>
+              </a:rPr>
+              <a:t>匯率</a:t>
             </a:r>
             <a:r>
               <a:rPr lang="en-US" altLang="zh-TW" sz="2000" dirty="0">
                 <a:latin typeface="+mj-ea"/>
                 <a:ea typeface="+mj-ea"/>
               </a:rPr>
-              <a:t>10-20bps</a:t>
-            </a:r>
-          </a:p>
-          <a:p>
+              <a:t> &gt; </a:t>
+            </a:r>
             <a:r>
               <a:rPr lang="zh-TW" altLang="en-US" sz="2000" dirty="0">
                 <a:latin typeface="+mj-ea"/>
                 <a:ea typeface="+mj-ea"/>
               </a:rPr>
-              <a:t>預期：延至</a:t>
-            </a:r>
+              <a:t>利率</a:t>
+            </a:r>
+            <a:endParaRPr lang="zh-TW" altLang="en-US" sz="2000" dirty="0">
+              <a:latin typeface="+mj-ea"/>
+              <a:ea typeface="+mj-ea"/>
+            </a:endParaRPr>
+          </a:p>
+          <a:p>
+            <a:pPr marL="0" indent="0">
+              <a:buNone/>
+            </a:pPr>
             <a:r>
               <a:rPr lang="en-US" altLang="zh-TW" sz="2000" dirty="0">
                 <a:latin typeface="+mj-ea"/>
                 <a:ea typeface="+mj-ea"/>
               </a:rPr>
-              <a:t>Q3-Q4</a:t>
+              <a:t>      </a:t>
             </a:r>
             <a:r>
               <a:rPr lang="zh-TW" altLang="en-US" sz="2000" dirty="0">
                 <a:latin typeface="+mj-ea"/>
                 <a:ea typeface="+mj-ea"/>
               </a:rPr>
-              <a:t>，降息</a:t>
+              <a:t>→</a:t>
             </a:r>
             <a:r>
               <a:rPr lang="en-US" altLang="zh-TW" sz="2000" dirty="0">
                 <a:latin typeface="+mj-ea"/>
                 <a:ea typeface="+mj-ea"/>
               </a:rPr>
-              <a:t>10bps</a:t>
-            </a:r>
-          </a:p>
-          <a:p>
-            <a:endParaRPr lang="zh-TW" altLang="en-US" sz="1000" dirty="0">
-              <a:latin typeface="+mj-ea"/>
-              <a:ea typeface="+mj-ea"/>
-            </a:endParaRPr>
-          </a:p>
-          <a:p>
+              <a:t>3/19</a:t>
+            </a:r>
             <a:r>
               <a:rPr lang="zh-TW" altLang="en-US" sz="2000" dirty="0">
                 <a:latin typeface="+mj-ea"/>
                 <a:ea typeface="+mj-ea"/>
               </a:rPr>
-              <a:t>人行報告</a:t>
+              <a:t>明確表達市場有此預期是</a:t>
             </a:r>
             <a:r>
               <a:rPr lang="en-US" altLang="zh-TW" sz="2000" dirty="0">
                 <a:latin typeface="+mj-ea"/>
                 <a:ea typeface="+mj-ea"/>
               </a:rPr>
-              <a:t>:</a:t>
+              <a:t>overreaction</a:t>
+            </a:r>
+            <a:endParaRPr lang="en-US" altLang="zh-TW" sz="2000" dirty="0">
+              <a:latin typeface="+mj-ea"/>
+              <a:ea typeface="+mj-ea"/>
+            </a:endParaRPr>
+          </a:p>
+          <a:p>
+            <a:endParaRPr lang="zh-TW" altLang="en-US" sz="2000" dirty="0">
+              <a:latin typeface="+mj-ea"/>
+              <a:ea typeface="+mj-ea"/>
+            </a:endParaRPr>
+          </a:p>
+          <a:p>
+            <a:r>
+              <a:rPr lang="en-US" altLang="zh-TW" sz="2000" dirty="0">
+                <a:latin typeface="+mj-ea"/>
+                <a:ea typeface="+mj-ea"/>
+              </a:rPr>
+              <a:t>TWD IRS</a:t>
             </a:r>
             <a:r>
               <a:rPr lang="zh-TW" altLang="en-US" sz="2000" dirty="0">
                 <a:latin typeface="+mj-ea"/>
                 <a:ea typeface="+mj-ea"/>
               </a:rPr>
-              <a:t> 財政</a:t>
-            </a:r>
-            <a:r>
-              <a:rPr lang="en-US" altLang="zh-TW" sz="2000" dirty="0">
-                <a:latin typeface="+mj-ea"/>
-                <a:ea typeface="+mj-ea"/>
-              </a:rPr>
-              <a:t>&gt;</a:t>
+              <a:t>目前各年期</a:t>
             </a:r>
             <a:r>
               <a:rPr lang="zh-TW" altLang="en-US" sz="2000" dirty="0">
                 <a:latin typeface="+mj-ea"/>
                 <a:ea typeface="+mj-ea"/>
               </a:rPr>
-              <a:t>貨幣政策</a:t>
-            </a:r>
-          </a:p>
-          <a:p>
-            <a:pPr marL="0" indent="0">
-              <a:buNone/>
-            </a:pPr>
-            <a:r>
-              <a:rPr lang="en-US" altLang="zh-TW" sz="2000" dirty="0">
-                <a:latin typeface="+mj-ea"/>
-                <a:ea typeface="+mj-ea"/>
-              </a:rPr>
-              <a:t>1. 刪除了「支持就業、增長和預期」等表述</a:t>
-            </a:r>
-          </a:p>
-          <a:p>
-            <a:pPr marL="0" indent="0">
-              <a:buNone/>
-            </a:pPr>
-            <a:r>
-              <a:rPr lang="en-US" altLang="zh-TW" sz="2000" dirty="0">
-                <a:latin typeface="+mj-ea"/>
-                <a:ea typeface="+mj-ea"/>
-              </a:rPr>
-              <a:t>2. </a:t>
-            </a:r>
-            <a:r>
-              <a:rPr lang="zh-TW" altLang="en-US" sz="2000" dirty="0">
-                <a:latin typeface="+mj-ea"/>
-                <a:ea typeface="+mj-ea"/>
-              </a:rPr>
-              <a:t>「</a:t>
-            </a:r>
-            <a:r>
-              <a:rPr lang="en-US" altLang="zh-TW" sz="2000" dirty="0">
-                <a:latin typeface="+mj-ea"/>
-                <a:ea typeface="+mj-ea"/>
-              </a:rPr>
-              <a:t>引導社會融資成本進一步下降</a:t>
-            </a:r>
-            <a:r>
-              <a:rPr lang="zh-TW" altLang="en-US" sz="2000" dirty="0">
-                <a:latin typeface="+mj-ea"/>
-                <a:ea typeface="+mj-ea"/>
-              </a:rPr>
-              <a:t>」→ 「</a:t>
-            </a:r>
-            <a:r>
-              <a:rPr lang="en-US" altLang="zh-TW" sz="2000" dirty="0">
-                <a:latin typeface="+mj-ea"/>
-                <a:ea typeface="+mj-ea"/>
-              </a:rPr>
-              <a:t>保持社會融資成本在低位</a:t>
-            </a:r>
-            <a:r>
-              <a:rPr lang="zh-TW" altLang="en-US" sz="2000" dirty="0">
-                <a:latin typeface="+mj-ea"/>
-                <a:ea typeface="+mj-ea"/>
-              </a:rPr>
-              <a:t>」</a:t>
-            </a:r>
-          </a:p>
-          <a:p>
-            <a:pPr marL="0" indent="0">
-              <a:buNone/>
-            </a:pPr>
-            <a:r>
-              <a:rPr lang="en-US" altLang="zh-TW" sz="2000" dirty="0">
-                <a:latin typeface="+mj-ea"/>
-                <a:ea typeface="+mj-ea"/>
-              </a:rPr>
-              <a:t>3. </a:t>
-            </a:r>
-            <a:r>
-              <a:rPr lang="zh-TW" altLang="en-US" sz="2000" dirty="0">
-                <a:latin typeface="+mj-ea"/>
-                <a:ea typeface="+mj-ea"/>
-              </a:rPr>
-              <a:t>定向再貸款工具、央行購債</a:t>
-            </a:r>
-          </a:p>
-          <a:p>
-            <a:endParaRPr lang="zh-TW" altLang="en-US" sz="1000" dirty="0">
+              <a:t>利率</a:t>
+            </a:r>
+            <a:endParaRPr lang="zh-TW" altLang="en-US" sz="2000" dirty="0">
               <a:latin typeface="+mj-ea"/>
               <a:ea typeface="+mj-ea"/>
             </a:endParaRPr>
-          </a:p>
-          <a:p>
-            <a:r>
-              <a:rPr lang="zh-TW" altLang="en-US" sz="2000" dirty="0">
-                <a:latin typeface="+mj-ea"/>
-                <a:ea typeface="+mj-ea"/>
-              </a:rPr>
-              <a:t>現有</a:t>
-            </a:r>
-            <a:r>
-              <a:rPr lang="en-US" altLang="zh-TW" sz="2000" dirty="0">
-                <a:latin typeface="+mj-ea"/>
-                <a:ea typeface="+mj-ea"/>
-              </a:rPr>
-              <a:t>CNY</a:t>
-            </a:r>
-            <a:r>
-              <a:rPr lang="zh-TW" altLang="en-US" sz="2000" dirty="0">
-                <a:latin typeface="+mj-ea"/>
-                <a:ea typeface="+mj-ea"/>
-              </a:rPr>
-              <a:t>部位</a:t>
-            </a:r>
-            <a:r>
-              <a:rPr lang="en-US" altLang="zh-TW" sz="2000" dirty="0">
-                <a:latin typeface="+mj-ea"/>
-                <a:ea typeface="+mj-ea"/>
-              </a:rPr>
-              <a:t>: Rec 5Y NDIRS, 7Y</a:t>
-            </a:r>
-            <a:r>
-              <a:rPr lang="zh-TW" altLang="en-US" sz="2000" dirty="0">
-                <a:latin typeface="+mj-ea"/>
-                <a:ea typeface="+mj-ea"/>
-              </a:rPr>
-              <a:t>國債</a:t>
-            </a:r>
-            <a:r>
-              <a:rPr lang="en-US" altLang="zh-TW" sz="2000" dirty="0">
-                <a:latin typeface="+mj-ea"/>
-                <a:ea typeface="+mj-ea"/>
-              </a:rPr>
-              <a:t>; DV01</a:t>
-            </a:r>
-            <a:r>
-              <a:rPr lang="zh-TW" altLang="en-US" sz="2000" dirty="0">
-                <a:latin typeface="+mj-ea"/>
-                <a:ea typeface="+mj-ea"/>
-              </a:rPr>
-              <a:t>共約</a:t>
-            </a:r>
-            <a:r>
-              <a:rPr lang="en-US" altLang="zh-TW" sz="2000" dirty="0">
-                <a:latin typeface="+mj-ea"/>
-                <a:ea typeface="+mj-ea"/>
-              </a:rPr>
-              <a:t>TWD 60</a:t>
-            </a:r>
-            <a:r>
-              <a:rPr lang="zh-TW" altLang="en-US" sz="2000" dirty="0">
-                <a:latin typeface="+mj-ea"/>
-                <a:ea typeface="+mj-ea"/>
-              </a:rPr>
-              <a:t>萬</a:t>
-            </a:r>
-          </a:p>
-          <a:p>
-            <a:r>
-              <a:rPr lang="zh-TW" altLang="en-US" sz="2000" dirty="0">
-                <a:latin typeface="+mj-ea"/>
-                <a:ea typeface="+mj-ea"/>
-              </a:rPr>
-              <a:t>預計承做部位</a:t>
-            </a:r>
-            <a:r>
-              <a:rPr lang="en-US" altLang="zh-TW" sz="2000" dirty="0">
-                <a:latin typeface="+mj-ea"/>
-                <a:ea typeface="+mj-ea"/>
-              </a:rPr>
-              <a:t>: Pay 1Y NDIRS @1.48% ; DV01 100-120</a:t>
-            </a:r>
-            <a:r>
-              <a:rPr lang="zh-TW" altLang="en-US" sz="2000" dirty="0">
-                <a:latin typeface="+mj-ea"/>
-                <a:ea typeface="+mj-ea"/>
-              </a:rPr>
-              <a:t>萬</a:t>
-            </a:r>
           </a:p>
           <a:p>
             <a:pPr lvl="1"/>
@@ -26364,7 +26420,7 @@
                 <a:latin typeface="+mj-ea"/>
                 <a:ea typeface="+mj-ea"/>
               </a:rPr>
-              <a:t>FR007</a:t>
+              <a:t>3M TAIBOR</a:t>
             </a:r>
             <a:r>
               <a:rPr lang="zh-TW" altLang="en-US" sz="1600" dirty="0">
@@ -26378,8 +26434,12 @@
                 <a:latin typeface="+mj-ea"/>
                 <a:ea typeface="+mj-ea"/>
               </a:rPr>
-              <a:t>1.60%</a:t>
-            </a:r>
+              <a:t>1.678%</a:t>
+            </a:r>
+            <a:endParaRPr lang="en-US" altLang="zh-TW" sz="1600" dirty="0">
+              <a:latin typeface="+mj-ea"/>
+              <a:ea typeface="+mj-ea"/>
+            </a:endParaRPr>
           </a:p>
           <a:p>
             <a:pPr lvl="1"/>
@@ -26388,7 +26448,7 @@
                 <a:latin typeface="+mj-ea"/>
                 <a:ea typeface="+mj-ea"/>
               </a:rPr>
-              <a:t>1Y NDIRS</a:t>
+              <a:t>6M</a:t>
             </a:r>
             <a:r>
               <a:rPr lang="zh-TW" altLang="en-US" sz="1600" dirty="0">
@@ -26402,17 +26462,63 @@
                 <a:latin typeface="+mj-ea"/>
                 <a:ea typeface="+mj-ea"/>
               </a:rPr>
-              <a:t>1.48%</a:t>
-            </a:r>
+              <a:t>1.71%</a:t>
+            </a:r>
+            <a:endParaRPr lang="en-US" altLang="zh-TW" sz="1600" dirty="0">
+              <a:latin typeface="+mj-ea"/>
+              <a:ea typeface="+mj-ea"/>
+            </a:endParaRPr>
           </a:p>
           <a:p>
             <a:pPr lvl="1"/>
+            <a:r>
+              <a:rPr lang="en-US" altLang="zh-TW" sz="1600" dirty="0">
+                <a:latin typeface="+mj-ea"/>
+                <a:ea typeface="+mj-ea"/>
+              </a:rPr>
+              <a:t>1Y</a:t>
+            </a:r>
             <a:r>
               <a:rPr lang="zh-TW" altLang="en-US" sz="1600" dirty="0">
                 <a:latin typeface="+mj-ea"/>
                 <a:ea typeface="+mj-ea"/>
               </a:rPr>
-              <a:t>若如預期</a:t>
+              <a:t>：</a:t>
+            </a:r>
+            <a:r>
+              <a:rPr lang="en-US" altLang="zh-TW" sz="1600" dirty="0">
+                <a:latin typeface="+mj-ea"/>
+                <a:ea typeface="+mj-ea"/>
+              </a:rPr>
+              <a:t>1.79%</a:t>
+            </a:r>
+            <a:endParaRPr lang="en-US" altLang="zh-TW" sz="1600" dirty="0">
+              <a:latin typeface="+mj-ea"/>
+              <a:ea typeface="+mj-ea"/>
+            </a:endParaRPr>
+          </a:p>
+          <a:p>
+            <a:pPr lvl="1"/>
+            <a:r>
+              <a:rPr lang="en-US" altLang="zh-TW" sz="1600" dirty="0">
+                <a:latin typeface="+mj-ea"/>
+                <a:ea typeface="+mj-ea"/>
+              </a:rPr>
+              <a:t>2Y</a:t>
+            </a:r>
+            <a:r>
+              <a:rPr lang="zh-TW" altLang="en-US" sz="1600" dirty="0">
+                <a:latin typeface="+mj-ea"/>
+                <a:ea typeface="+mj-ea"/>
+              </a:rPr>
+              <a:t>：</a:t>
+            </a:r>
+            <a:r>
+              <a:rPr lang="en-US" altLang="zh-TW" sz="1600" dirty="0">
+                <a:latin typeface="+mj-ea"/>
+                <a:ea typeface="+mj-ea"/>
+              </a:rPr>
+              <a:t>1.94%</a:t>
             </a:r>
             <a:endParaRPr lang="en-US" altLang="zh-TW" sz="1600" dirty="0">
               <a:latin typeface="+mj-ea"/>
@@ -26430,20 +26536,10 @@
               </a:rPr>
               <a:t>      </a:t>
             </a:r>
-            <a:r>
-              <a:rPr lang="zh-TW" altLang="en-US" sz="1600" dirty="0">
-                <a:latin typeface="+mj-ea"/>
-                <a:ea typeface="+mj-ea"/>
-              </a:rPr>
-              <a:t>則此策略預計獲利約</a:t>
-            </a:r>
-            <a:r>
-              <a:rPr lang="en-US" altLang="zh-TW" sz="1600" dirty="0">
-                <a:latin typeface="+mj-ea"/>
-                <a:ea typeface="+mj-ea"/>
-              </a:rPr>
-              <a:t>8~10bps</a:t>
-            </a:r>
+            <a:endParaRPr lang="en-US" altLang="zh-TW" sz="1600" dirty="0">
+              <a:latin typeface="+mj-ea"/>
+              <a:ea typeface="+mj-ea"/>
+            </a:endParaRPr>
           </a:p>
           <a:p>
             <a:pPr lvl="1"/>
@@ -26478,23 +26574,17 @@
       </p:sp>
       <p:graphicFrame>
         <p:nvGraphicFramePr>
-          <p:cNvPr id="9" name="圖表 8"/>
+          <p:cNvPr id="6" name="圖表 5"/>
           <p:cNvGraphicFramePr/>
-          <p:nvPr>
-            <p:extLst>
-              <p:ext uri="{D42A27DB-BD31-4B8C-83A1-F6EECF244321}">
-                <p14:modId xmlns:p14="http://schemas.microsoft.com/office/powerpoint/2010/main" val="1022870351"/>
-              </p:ext>
-            </p:extLst>
-          </p:nvPr>
+          <p:nvPr/>
         </p:nvGraphicFramePr>
         <p:xfrm>
-          <a:off x="4519295" y="4650740"/>
-          <a:ext cx="4400550" cy="2004695"/>
+          <a:off x="3582035" y="3444240"/>
+          <a:ext cx="5307965" cy="3361690"/>
         </p:xfrm>
         <a:graphic>
           <a:graphicData uri="http://schemas.openxmlformats.org/drawingml/2006/chart">
-            <c:chart xmlns:c="http://schemas.openxmlformats.org/drawingml/2006/chart" xmlns:r="http://schemas.openxmlformats.org/officeDocument/2006/relationships" r:id="rId2"/>
+            <c:chart xmlns:c="http://schemas.openxmlformats.org/drawingml/2006/chart" xmlns:r="http://schemas.openxmlformats.org/officeDocument/2006/relationships" r:id="rId1"/>
           </a:graphicData>
         </a:graphic>
       </p:graphicFrame>
@@ -26726,7 +26816,6 @@
       </a:bgFillStyleLst>
     </a:fmtScheme>
   </a:themeElements>
-  <a:objectDefaults/>
   <a:extraClrSchemeLst>
     <a:extraClrScheme>
       <a:clrScheme name="3_自訂設計 1">
@@ -29107,8 +29196,6 @@
       </a:bgFillStyleLst>
     </a:fmtScheme>
   </a:themeElements>
-  <a:objectDefaults/>
-  <a:extraClrSchemeLst/>
   <a:extLst>
     <a:ext uri="{05A4C25C-085E-4340-85A3-A5531E510DB2}">
       <thm15:themeFamily xmlns:thm15="http://schemas.microsoft.com/office/thememl/2012/main" name="Office Theme" id="{62F939B6-93AF-4DB8-9C6B-D6C7DFDC589F}" vid="{4A3C46E8-61CC-4603-A589-7422A47A8E4A}"/>
@@ -29395,8 +29482,6 @@
       </a:bgFillStyleLst>
     </a:fmtScheme>
   </a:themeElements>
-  <a:objectDefaults/>
-  <a:extraClrSchemeLst/>
   <a:extLst>
     <a:ext uri="{05A4C25C-085E-4340-85A3-A5531E510DB2}">
       <thm15:themeFamily xmlns:thm15="http://schemas.microsoft.com/office/thememl/2012/main" name="Office Theme" id="{62F939B6-93AF-4DB8-9C6B-D6C7DFDC589F}" vid="{4A3C46E8-61CC-4603-A589-7422A47A8E4A}"/>
@@ -29625,7 +29710,6 @@
       </a:bgFillStyleLst>
     </a:fmtScheme>
   </a:themeElements>
-  <a:objectDefaults/>
   <a:extraClrSchemeLst>
     <a:extraClrScheme>
       <a:clrScheme name="3_自訂設計 1">
@@ -30408,8 +30492,6 @@
       </a:bgFillStyleLst>
     </a:fmtScheme>
   </a:themeElements>
-  <a:objectDefaults/>
-  <a:extraClrSchemeLst/>
   <a:extLst>
     <a:ext uri="{05A4C25C-085E-4340-85A3-A5531E510DB2}">
       <thm15:themeFamily xmlns:thm15="http://schemas.microsoft.com/office/thememl/2012/main" name="Office Theme" id="{62F939B6-93AF-4DB8-9C6B-D6C7DFDC589F}" vid="{4A3C46E8-61CC-4603-A589-7422A47A8E4A}"/>
@@ -30638,7 +30720,6 @@
       </a:bgFillStyleLst>
     </a:fmtScheme>
   </a:themeElements>
-  <a:objectDefaults/>
   <a:extraClrSchemeLst>
     <a:extraClrScheme>
       <a:clrScheme name="3_自訂設計 1">
@@ -31421,8 +31502,6 @@
       </a:bgFillStyleLst>
     </a:fmtScheme>
   </a:themeElements>
-  <a:objectDefaults/>
-  <a:extraClrSchemeLst/>
   <a:extLst>
     <a:ext uri="{05A4C25C-085E-4340-85A3-A5531E510DB2}">
       <thm15:themeFamily xmlns:thm15="http://schemas.microsoft.com/office/thememl/2012/main" name="Office Theme" id="{62F939B6-93AF-4DB8-9C6B-D6C7DFDC589F}" vid="{4A3C46E8-61CC-4603-A589-7422A47A8E4A}"/>
